--- a/week-01-python-basics/slides/week-01-python-basics.pptx
+++ b/week-01-python-basics/slides/week-01-python-basics.pptx
@@ -2,24 +2,26 @@
 <file path=ppt/presentation.xml><?xml version="1.0" encoding="utf-8"?>
 <p:presentation xmlns:p="http://schemas.openxmlformats.org/presentationml/2006/main">
   <p:sldMasterIdLst>
-    <p:sldMasterId xmlns:r="http://schemas.openxmlformats.org/officeDocument/2006/relationships" id="2147483648" r:id="R0e95d0f6198140de"/>
+    <p:sldMasterId xmlns:r="http://schemas.openxmlformats.org/officeDocument/2006/relationships" id="2147483648" r:id="Rdc591d169c214a22"/>
   </p:sldMasterIdLst>
   <p:notesMasterIdLst>
-    <p:notesMasterId xmlns:r="http://schemas.openxmlformats.org/officeDocument/2006/relationships" r:id="R8f5692c543284395"/>
+    <p:notesMasterId xmlns:r="http://schemas.openxmlformats.org/officeDocument/2006/relationships" r:id="Rcdd9bd14c8ae47af"/>
   </p:notesMasterIdLst>
   <p:sldIdLst>
-    <p:sldId xmlns:r="http://schemas.openxmlformats.org/officeDocument/2006/relationships" id="256" r:id="Re21a477f48e349b8"/>
-    <p:sldId xmlns:r="http://schemas.openxmlformats.org/officeDocument/2006/relationships" id="257" r:id="R5b3880708efb4db6"/>
-    <p:sldId xmlns:r="http://schemas.openxmlformats.org/officeDocument/2006/relationships" id="258" r:id="R2c30b11f46924074"/>
-    <p:sldId xmlns:r="http://schemas.openxmlformats.org/officeDocument/2006/relationships" id="259" r:id="Ra0b30da4a53b4257"/>
-    <p:sldId xmlns:r="http://schemas.openxmlformats.org/officeDocument/2006/relationships" id="260" r:id="Re9099b1dbd8a48cd"/>
-    <p:sldId xmlns:r="http://schemas.openxmlformats.org/officeDocument/2006/relationships" id="261" r:id="Rbc07e508bc114ef7"/>
-    <p:sldId xmlns:r="http://schemas.openxmlformats.org/officeDocument/2006/relationships" id="262" r:id="R73e7487d82ae42ce"/>
-    <p:sldId xmlns:r="http://schemas.openxmlformats.org/officeDocument/2006/relationships" id="263" r:id="R8f5583e1f19e480a"/>
-    <p:sldId xmlns:r="http://schemas.openxmlformats.org/officeDocument/2006/relationships" id="264" r:id="R10da11388f9e43fb"/>
-    <p:sldId xmlns:r="http://schemas.openxmlformats.org/officeDocument/2006/relationships" id="265" r:id="R638173b28f4549da"/>
-    <p:sldId xmlns:r="http://schemas.openxmlformats.org/officeDocument/2006/relationships" id="266" r:id="Re74054d37e9e447f"/>
-    <p:sldId xmlns:r="http://schemas.openxmlformats.org/officeDocument/2006/relationships" id="267" r:id="Rfd81c3a078234750"/>
+    <p:sldId xmlns:r="http://schemas.openxmlformats.org/officeDocument/2006/relationships" id="256" r:id="Rc42d4d5a46964f62"/>
+    <p:sldId xmlns:r="http://schemas.openxmlformats.org/officeDocument/2006/relationships" id="257" r:id="R7c4e0a7946824335"/>
+    <p:sldId xmlns:r="http://schemas.openxmlformats.org/officeDocument/2006/relationships" id="258" r:id="Rac44232713a84c65"/>
+    <p:sldId xmlns:r="http://schemas.openxmlformats.org/officeDocument/2006/relationships" id="259" r:id="Rc1de2006e7bd47b6"/>
+    <p:sldId xmlns:r="http://schemas.openxmlformats.org/officeDocument/2006/relationships" id="260" r:id="R9005a80a679249dc"/>
+    <p:sldId xmlns:r="http://schemas.openxmlformats.org/officeDocument/2006/relationships" id="261" r:id="R35504fdbde004b7b"/>
+    <p:sldId xmlns:r="http://schemas.openxmlformats.org/officeDocument/2006/relationships" id="262" r:id="R33de3e2b45f14331"/>
+    <p:sldId xmlns:r="http://schemas.openxmlformats.org/officeDocument/2006/relationships" id="263" r:id="R4e4fbd4692024449"/>
+    <p:sldId xmlns:r="http://schemas.openxmlformats.org/officeDocument/2006/relationships" id="264" r:id="R85a5f99921ff4490"/>
+    <p:sldId xmlns:r="http://schemas.openxmlformats.org/officeDocument/2006/relationships" id="265" r:id="Re994b48621764be9"/>
+    <p:sldId xmlns:r="http://schemas.openxmlformats.org/officeDocument/2006/relationships" id="266" r:id="R78e04e8e5d884876"/>
+    <p:sldId xmlns:r="http://schemas.openxmlformats.org/officeDocument/2006/relationships" id="267" r:id="R45ef74c3299247a7"/>
+    <p:sldId xmlns:r="http://schemas.openxmlformats.org/officeDocument/2006/relationships" id="268" r:id="R937a71a1b82e4c24"/>
+    <p:sldId xmlns:r="http://schemas.openxmlformats.org/officeDocument/2006/relationships" id="269" r:id="R2454609b42ac40dc"/>
   </p:sldIdLst>
   <p:sldSz cx="12192000" cy="6858000"/>
   <p:notesSz cx="6858000" cy="9144000"/>
@@ -523,7 +525,7 @@
           <a:lstStyle xmlns:a="http://schemas.openxmlformats.org/drawingml/2006/main"/>
           <a:p xmlns:a="http://schemas.openxmlformats.org/drawingml/2006/main">
             <a:r>
-              <a:t>Keep the project deliberately small because Day 1 includes 30 minutes of administration. Require a working minimum version before students personalize formatting or add optional lines.</a:t>
+              <a:t>Pause after each step and check that every student has the same result. Pair students intentionally. Students who finish early should explain an error message to a partner rather than racing ahead.</a:t>
             </a:r>
           </a:p>
         </p:txBody>
@@ -593,7 +595,7 @@
           <a:lstStyle xmlns:a="http://schemas.openxmlformats.org/drawingml/2006/main"/>
           <a:p xmlns:a="http://schemas.openxmlformats.org/drawingml/2006/main">
             <a:r>
-              <a:t>Model feedback that is specific and kind. Ask two or three students to demonstrate a program or explain a bug they fixed. Do not require everyone to present on Day 1.</a:t>
+              <a:t>Start a visible ten-minute timer. Confirm that students know where the assignment starter file is before they leave.</a:t>
             </a:r>
           </a:p>
         </p:txBody>
@@ -663,6 +665,146 @@
           <a:lstStyle xmlns:a="http://schemas.openxmlformats.org/drawingml/2006/main"/>
           <a:p xmlns:a="http://schemas.openxmlformats.org/drawingml/2006/main">
             <a:r>
+              <a:t>Keep the project deliberately small because Day 1 includes 30 minutes of administration. Require a working minimum version before students personalize formatting or add optional lines.</a:t>
+            </a:r>
+          </a:p>
+        </p:txBody>
+      </p:sp>
+      <p:sp>
+        <p:nvSpPr>
+          <p:cNvPr id="4" name="Slide Number Placeholder 3"/>
+          <p:cNvSpPr>
+            <a:spLocks xmlns:a="http://schemas.openxmlformats.org/drawingml/2006/main" noGrp="1"/>
+          </p:cNvSpPr>
+          <p:nvPr>
+            <p:ph type="sldNum" idx="5"/>
+          </p:nvPr>
+        </p:nvSpPr>
+        <p:spPr/>
+        <p:txBody>
+          <a:bodyPr xmlns:a="http://schemas.openxmlformats.org/drawingml/2006/main"/>
+          <a:lstStyle xmlns:a="http://schemas.openxmlformats.org/drawingml/2006/main"/>
+          <a:p xmlns:a="http://schemas.openxmlformats.org/drawingml/2006/main"/>
+        </p:txBody>
+      </p:sp>
+    </p:spTree>
+  </p:cSld>
+  <p:clrMapOvr>
+    <a:masterClrMapping xmlns:a="http://schemas.openxmlformats.org/drawingml/2006/main"/>
+  </p:clrMapOvr>
+</p:notes>
+</file>
+
+<file path=ppt/notesSlides/notesSlide13.xml><?xml version="1.0" encoding="utf-8"?>
+<p:notes xmlns:p="http://schemas.openxmlformats.org/presentationml/2006/main">
+  <p:cSld>
+    <p:spTree>
+      <p:nvGrpSpPr>
+        <p:cNvPr id="1" name=""/>
+        <p:cNvGrpSpPr/>
+        <p:nvPr/>
+      </p:nvGrpSpPr>
+      <p:grpSpPr>
+        <a:xfrm xmlns:a="http://schemas.openxmlformats.org/drawingml/2006/main"/>
+      </p:grpSpPr>
+      <p:sp>
+        <p:nvSpPr>
+          <p:cNvPr id="2" name="Slide Image Placeholder 1"/>
+          <p:cNvSpPr>
+            <a:spLocks xmlns:a="http://schemas.openxmlformats.org/drawingml/2006/main" noGrp="1"/>
+          </p:cNvSpPr>
+          <p:nvPr>
+            <p:ph type="sldImg" idx="0"/>
+          </p:nvPr>
+        </p:nvSpPr>
+        <p:spPr/>
+      </p:sp>
+      <p:sp>
+        <p:nvSpPr>
+          <p:cNvPr id="3" name="Notes Placeholder 2"/>
+          <p:cNvSpPr>
+            <a:spLocks xmlns:a="http://schemas.openxmlformats.org/drawingml/2006/main" noGrp="1"/>
+          </p:cNvSpPr>
+          <p:nvPr>
+            <p:ph type="body" idx="1"/>
+          </p:nvPr>
+        </p:nvSpPr>
+        <p:spPr/>
+        <p:txBody>
+          <a:bodyPr xmlns:a="http://schemas.openxmlformats.org/drawingml/2006/main"/>
+          <a:lstStyle xmlns:a="http://schemas.openxmlformats.org/drawingml/2006/main"/>
+          <a:p xmlns:a="http://schemas.openxmlformats.org/drawingml/2006/main">
+            <a:r>
+              <a:t>Model feedback that is specific and kind. Ask two or three students to demonstrate a program or explain a bug they fixed. Do not require everyone to present on Day 1.</a:t>
+            </a:r>
+          </a:p>
+        </p:txBody>
+      </p:sp>
+      <p:sp>
+        <p:nvSpPr>
+          <p:cNvPr id="4" name="Slide Number Placeholder 3"/>
+          <p:cNvSpPr>
+            <a:spLocks xmlns:a="http://schemas.openxmlformats.org/drawingml/2006/main" noGrp="1"/>
+          </p:cNvSpPr>
+          <p:nvPr>
+            <p:ph type="sldNum" idx="5"/>
+          </p:nvPr>
+        </p:nvSpPr>
+        <p:spPr/>
+        <p:txBody>
+          <a:bodyPr xmlns:a="http://schemas.openxmlformats.org/drawingml/2006/main"/>
+          <a:lstStyle xmlns:a="http://schemas.openxmlformats.org/drawingml/2006/main"/>
+          <a:p xmlns:a="http://schemas.openxmlformats.org/drawingml/2006/main"/>
+        </p:txBody>
+      </p:sp>
+    </p:spTree>
+  </p:cSld>
+  <p:clrMapOvr>
+    <a:masterClrMapping xmlns:a="http://schemas.openxmlformats.org/drawingml/2006/main"/>
+  </p:clrMapOvr>
+</p:notes>
+</file>
+
+<file path=ppt/notesSlides/notesSlide14.xml><?xml version="1.0" encoding="utf-8"?>
+<p:notes xmlns:p="http://schemas.openxmlformats.org/presentationml/2006/main">
+  <p:cSld>
+    <p:spTree>
+      <p:nvGrpSpPr>
+        <p:cNvPr id="1" name=""/>
+        <p:cNvGrpSpPr/>
+        <p:nvPr/>
+      </p:nvGrpSpPr>
+      <p:grpSpPr>
+        <a:xfrm xmlns:a="http://schemas.openxmlformats.org/drawingml/2006/main"/>
+      </p:grpSpPr>
+      <p:sp>
+        <p:nvSpPr>
+          <p:cNvPr id="2" name="Slide Image Placeholder 1"/>
+          <p:cNvSpPr>
+            <a:spLocks xmlns:a="http://schemas.openxmlformats.org/drawingml/2006/main" noGrp="1"/>
+          </p:cNvSpPr>
+          <p:nvPr>
+            <p:ph type="sldImg" idx="0"/>
+          </p:nvPr>
+        </p:nvSpPr>
+        <p:spPr/>
+      </p:sp>
+      <p:sp>
+        <p:nvSpPr>
+          <p:cNvPr id="3" name="Notes Placeholder 2"/>
+          <p:cNvSpPr>
+            <a:spLocks xmlns:a="http://schemas.openxmlformats.org/drawingml/2006/main" noGrp="1"/>
+          </p:cNvSpPr>
+          <p:nvPr>
+            <p:ph type="body" idx="1"/>
+          </p:nvPr>
+        </p:nvSpPr>
+        <p:spPr/>
+        <p:txBody>
+          <a:bodyPr xmlns:a="http://schemas.openxmlformats.org/drawingml/2006/main"/>
+          <a:lstStyle xmlns:a="http://schemas.openxmlformats.org/drawingml/2006/main"/>
+          <a:p xmlns:a="http://schemas.openxmlformats.org/drawingml/2006/main">
+            <a:r>
               <a:t>Collect responses by 12:55 so students can save files and confirm their repository location. Record unresolved setup issues for follow-up before Week 2.</a:t>
             </a:r>
           </a:p>
@@ -873,7 +1015,7 @@
           <a:lstStyle xmlns:a="http://schemas.openxmlformats.org/drawingml/2006/main"/>
           <a:p xmlns:a="http://schemas.openxmlformats.org/drawingml/2006/main">
             <a:r>
-              <a:t>Invite students to read the objectives silently. Ask which objective feels most familiar and which feels newest.</a:t>
+              <a:t>Source: project_syncere_python_foundations_3_saturdays.pdf, Saturday 1 activity: Program the Human. Give each pair one sheet of paper and one pen. Suggested timing: two minutes to pair and choose a drawing, six minutes for round one, six minutes after switching, and four minutes to debrief. Connect precise instructions to algorithms and debugging.</a:t>
             </a:r>
           </a:p>
         </p:txBody>
@@ -943,7 +1085,7 @@
           <a:lstStyle xmlns:a="http://schemas.openxmlformats.org/drawingml/2006/main"/>
           <a:p xmlns:a="http://schemas.openxmlformats.org/drawingml/2006/main">
             <a:r>
-              <a:t>Source: project_syncere_python_foundations_3_saturdays.pdf, Saturday 1 core concept: Input -&gt; Process -&gt; Output. Ask students for a non-computer example before showing the name-and-greeting example.</a:t>
+              <a:t>Explain that Git tracks versions of files, while GitHub stores a shared copy online. A clone downloads the full repository and its history into a new folder on the student's computer. Demonstrate the command, then show the new folder in File Explorer or Visual Studio Code. Students only clone this repository once. In later classes, they use git pull to download new lessons.</a:t>
             </a:r>
           </a:p>
         </p:txBody>
@@ -1013,7 +1155,7 @@
           <a:lstStyle xmlns:a="http://schemas.openxmlformats.org/drawingml/2006/main"/>
           <a:p xmlns:a="http://schemas.openxmlformats.org/drawingml/2006/main">
             <a:r>
-              <a:t>Live-code this example rather than only reading it. Narrate the quotation marks, parentheses, save action, and run command. Intentionally miss one quotation mark and read the error together.</a:t>
+              <a:t>Invite students to read the objectives silently. Ask which objective feels most familiar and which feels newest.</a:t>
             </a:r>
           </a:p>
         </p:txBody>
@@ -1083,7 +1225,7 @@
           <a:lstStyle xmlns:a="http://schemas.openxmlformats.org/drawingml/2006/main"/>
           <a:p xmlns:a="http://schemas.openxmlformats.org/drawingml/2006/main">
             <a:r>
-              <a:t>Start a visible ten-minute timer. Use the break to check on unresolved account or device problems.</a:t>
+              <a:t>Source: project_syncere_python_foundations_3_saturdays.pdf, Saturday 1 core concept: Input -&gt; Process -&gt; Output. Ask students for a non-computer example before showing the name-and-greeting example.</a:t>
             </a:r>
           </a:p>
         </p:txBody>
@@ -1153,7 +1295,7 @@
           <a:lstStyle xmlns:a="http://schemas.openxmlformats.org/drawingml/2006/main"/>
           <a:p xmlns:a="http://schemas.openxmlformats.org/drawingml/2006/main">
             <a:r>
-              <a:t>Pause after each step and check that every student has the same result. Pair students intentionally. Students who finish early should explain an error message to a partner rather than racing ahead.</a:t>
+              <a:t>Live-code this example rather than only reading it. Narrate the quotation marks, parentheses, save action, and run command. Intentionally miss one quotation mark and read the error together.</a:t>
             </a:r>
           </a:p>
         </p:txBody>
@@ -1223,7 +1365,7 @@
           <a:lstStyle xmlns:a="http://schemas.openxmlformats.org/drawingml/2006/main"/>
           <a:p xmlns:a="http://schemas.openxmlformats.org/drawingml/2006/main">
             <a:r>
-              <a:t>Start a visible ten-minute timer. Confirm that students know where the assignment starter file is before they leave.</a:t>
+              <a:t>Start a visible ten-minute timer. Use the break to check on unresolved account or device problems.</a:t>
             </a:r>
           </a:p>
         </p:txBody>
@@ -1291,7 +1433,7 @@
   </p:cSld>
   <p:clrMap bg1="lt1" tx1="dk1" bg2="lt2" tx2="dk2" accent1="accent1" accent2="accent2" accent3="accent3" accent4="accent4" accent5="accent5" accent6="accent6" hlink="hlink" folHlink="folHlink"/>
   <p:sldLayoutIdLst>
-    <p:sldLayoutId xmlns:r="http://schemas.openxmlformats.org/officeDocument/2006/relationships" id="2147483649" r:id="R4e76134c6748415c"/>
+    <p:sldLayoutId xmlns:r="http://schemas.openxmlformats.org/officeDocument/2006/relationships" id="2147483649" r:id="R453795c250ca4df8"/>
   </p:sldLayoutIdLst>
   <p:txStyles>
     <p:titleStyle>
@@ -1846,7 +1988,7 @@
           <p:nvPr/>
         </p:nvPicPr>
         <p:blipFill>
-          <a:blip xmlns:r="http://schemas.openxmlformats.org/officeDocument/2006/relationships" xmlns:a="http://schemas.openxmlformats.org/drawingml/2006/main" r:embed="Rff8eadb893134064"/>
+          <a:blip xmlns:r="http://schemas.openxmlformats.org/officeDocument/2006/relationships" xmlns:a="http://schemas.openxmlformats.org/drawingml/2006/main" r:embed="Rd6fb71f7b27c423c"/>
           <a:srcRect xmlns:a="http://schemas.openxmlformats.org/drawingml/2006/main" l="0" t="27" r="0" b="27"/>
           <a:stretch xmlns:a="http://schemas.openxmlformats.org/drawingml/2006/main">
             <a:fillRect l="0" t="0" r="0" b="0"/>
@@ -1867,7 +2009,7 @@
           <p:cNvPr id="2" name="">
             <a:extLst xmlns:a="http://schemas.openxmlformats.org/drawingml/2006/main">
               <a:ext uri="{FF2B5EF4-FFF2-40B4-BE49-F238E27FC236}">
-                <a16:creationId xmlns:a16="http://schemas.microsoft.com/office/drawing/2014/main" id="{A6FD90E2-6AAD-4230-A942-C5F7BEB562CC}"/>
+                <a16:creationId xmlns:a16="http://schemas.microsoft.com/office/drawing/2014/main" id="{CD42791C-60BB-4D25-AC11-E2D32600BFEC}"/>
               </a:ext>
             </a:extLst>
           </p:cNvPr>
@@ -1924,7 +2066,7 @@
           <p:cNvPr id="3" name="">
             <a:extLst xmlns:a="http://schemas.openxmlformats.org/drawingml/2006/main">
               <a:ext uri="{FF2B5EF4-FFF2-40B4-BE49-F238E27FC236}">
-                <a16:creationId xmlns:a16="http://schemas.microsoft.com/office/drawing/2014/main" id="{E9D03DF8-79AE-4C62-9ADE-B5E8F3BD70AE}"/>
+                <a16:creationId xmlns:a16="http://schemas.microsoft.com/office/drawing/2014/main" id="{6B7A669B-B4BA-4001-8556-1B002607FA57}"/>
               </a:ext>
             </a:extLst>
           </p:cNvPr>
@@ -1981,7 +2123,7 @@
           <p:cNvPr id="4" name="">
             <a:extLst xmlns:a="http://schemas.openxmlformats.org/drawingml/2006/main">
               <a:ext uri="{FF2B5EF4-FFF2-40B4-BE49-F238E27FC236}">
-                <a16:creationId xmlns:a16="http://schemas.microsoft.com/office/drawing/2014/main" id="{9FBAF47A-3E2E-4FA3-AD90-7BE32B36A6D4}"/>
+                <a16:creationId xmlns:a16="http://schemas.microsoft.com/office/drawing/2014/main" id="{82E9815D-40CE-45B5-9FC0-E7CED99DD8E1}"/>
               </a:ext>
             </a:extLst>
           </p:cNvPr>
@@ -2036,7 +2178,7 @@
     </p:spTree>
     <p:extLst>
       <p:ext uri="{BB962C8B-B14F-4D97-AF65-F5344CB8AC3E}">
-        <p14:creationId xmlns:p14="http://schemas.microsoft.com/office/powerpoint/2010/main" val="1708655352"/>
+        <p14:creationId xmlns:p14="http://schemas.microsoft.com/office/powerpoint/2010/main" val="1845377875"/>
       </p:ext>
     </p:extLst>
   </p:cSld>
@@ -2044,6 +2186,777 @@
 </file>
 
 <file path=ppt/slides/slide10.xml><?xml version="1.0" encoding="utf-8"?>
+<p:sld xmlns:p="http://schemas.openxmlformats.org/presentationml/2006/main">
+  <p:cSld>
+    <p:bg>
+      <p:bgPr>
+        <a:solidFill xmlns:a="http://schemas.openxmlformats.org/drawingml/2006/main">
+          <a:srgbClr val="FFFFFF"/>
+        </a:solidFill>
+      </p:bgPr>
+    </p:bg>
+    <p:spTree>
+      <p:nvGrpSpPr>
+        <p:cNvPr id="1" name=""/>
+        <p:cNvGrpSpPr/>
+        <p:nvPr/>
+      </p:nvGrpSpPr>
+      <p:grpSpPr>
+        <a:xfrm xmlns:a="http://schemas.openxmlformats.org/drawingml/2006/main"/>
+      </p:grpSpPr>
+      <p:sp>
+        <p:nvSpPr>
+          <p:cNvPr id="8" name="">
+            <a:extLst xmlns:a="http://schemas.openxmlformats.org/drawingml/2006/main">
+              <a:ext uri="{FF2B5EF4-FFF2-40B4-BE49-F238E27FC236}">
+                <a16:creationId xmlns:a16="http://schemas.microsoft.com/office/drawing/2014/main" id="{4979960C-E0D4-412F-AA25-EC5FB719E002}"/>
+              </a:ext>
+            </a:extLst>
+          </p:cNvPr>
+          <p:cNvSpPr>
+            <a:spLocks xmlns:a="http://schemas.openxmlformats.org/drawingml/2006/main" noGrp="1"/>
+          </p:cNvSpPr>
+          <p:nvPr/>
+        </p:nvSpPr>
+        <p:spPr>
+          <a:xfrm xmlns:a="http://schemas.openxmlformats.org/drawingml/2006/main">
+            <a:off x="685800" y="400050"/>
+            <a:ext cx="10820400" cy="590550"/>
+          </a:xfrm>
+          <a:prstGeom xmlns:a="http://schemas.openxmlformats.org/drawingml/2006/main" prst="rect">
+            <a:avLst/>
+          </a:prstGeom>
+          <a:noFill xmlns:a="http://schemas.openxmlformats.org/drawingml/2006/main"/>
+          <a:ln xmlns:a="http://schemas.openxmlformats.org/drawingml/2006/main" w="0">
+            <a:noFill/>
+          </a:ln>
+        </p:spPr>
+        <p:txBody>
+          <a:bodyPr xmlns:a="http://schemas.openxmlformats.org/drawingml/2006/main" anchor="ctr">
+            <a:noAutofit/>
+          </a:bodyPr>
+          <a:lstStyle xmlns:a="http://schemas.openxmlformats.org/drawingml/2006/main"/>
+          <a:p xmlns:a="http://schemas.openxmlformats.org/drawingml/2006/main">
+            <a:pPr>
+              <a:defRPr sz="3000" b="1" i="0">
+                <a:solidFill>
+                  <a:srgbClr val="173654"/>
+                </a:solidFill>
+                <a:latin typeface="Arial"/>
+                <a:ea typeface="Arial"/>
+                <a:cs typeface="Arial"/>
+              </a:defRPr>
+            </a:pPr>
+            <a:r>
+              <a:rPr sz="3000" b="1" i="0">
+                <a:solidFill>
+                  <a:srgbClr val="173654"/>
+                </a:solidFill>
+                <a:latin typeface="Arial"/>
+                <a:ea typeface="Arial"/>
+                <a:cs typeface="Arial"/>
+              </a:rPr>
+              <a:t>Guided Python lab</a:t>
+            </a:r>
+          </a:p>
+        </p:txBody>
+      </p:sp>
+      <p:sp>
+        <p:nvSpPr>
+          <p:cNvPr id="2" name="">
+            <a:extLst xmlns:a="http://schemas.openxmlformats.org/drawingml/2006/main">
+              <a:ext uri="{FF2B5EF4-FFF2-40B4-BE49-F238E27FC236}">
+                <a16:creationId xmlns:a16="http://schemas.microsoft.com/office/drawing/2014/main" id="{1C718188-554D-43B2-86D1-D7D3608B8707}"/>
+              </a:ext>
+            </a:extLst>
+          </p:cNvPr>
+          <p:cNvSpPr>
+            <a:spLocks xmlns:a="http://schemas.openxmlformats.org/drawingml/2006/main" noGrp="1"/>
+          </p:cNvSpPr>
+          <p:nvPr/>
+        </p:nvSpPr>
+        <p:spPr>
+          <a:xfrm xmlns:a="http://schemas.openxmlformats.org/drawingml/2006/main">
+            <a:off x="704850" y="1009650"/>
+            <a:ext cx="10477500" cy="361950"/>
+          </a:xfrm>
+          <a:prstGeom xmlns:a="http://schemas.openxmlformats.org/drawingml/2006/main" prst="rect">
+            <a:avLst/>
+          </a:prstGeom>
+          <a:noFill xmlns:a="http://schemas.openxmlformats.org/drawingml/2006/main"/>
+          <a:ln xmlns:a="http://schemas.openxmlformats.org/drawingml/2006/main" w="0">
+            <a:noFill/>
+          </a:ln>
+        </p:spPr>
+        <p:txBody>
+          <a:bodyPr xmlns:a="http://schemas.openxmlformats.org/drawingml/2006/main" anchor="ctr">
+            <a:noAutofit/>
+          </a:bodyPr>
+          <a:lstStyle xmlns:a="http://schemas.openxmlformats.org/drawingml/2006/main"/>
+          <a:p xmlns:a="http://schemas.openxmlformats.org/drawingml/2006/main">
+            <a:pPr>
+              <a:defRPr sz="1575" b="0" i="0">
+                <a:solidFill>
+                  <a:srgbClr val="5D6B78"/>
+                </a:solidFill>
+                <a:latin typeface="Arial"/>
+                <a:ea typeface="Arial"/>
+                <a:cs typeface="Arial"/>
+              </a:defRPr>
+            </a:pPr>
+            <a:r>
+              <a:rPr sz="1575" b="0" i="0">
+                <a:solidFill>
+                  <a:srgbClr val="5D6B78"/>
+                </a:solidFill>
+                <a:latin typeface="Arial"/>
+                <a:ea typeface="Arial"/>
+                <a:cs typeface="Arial"/>
+              </a:rPr>
+              <a:t>Work with the class first, then repeat the steps independently</a:t>
+            </a:r>
+          </a:p>
+        </p:txBody>
+      </p:sp>
+      <p:sp>
+        <p:nvSpPr>
+          <p:cNvPr id="3" name="">
+            <a:extLst xmlns:a="http://schemas.openxmlformats.org/drawingml/2006/main">
+              <a:ext uri="{FF2B5EF4-FFF2-40B4-BE49-F238E27FC236}">
+                <a16:creationId xmlns:a16="http://schemas.microsoft.com/office/drawing/2014/main" id="{228A6BAB-20C5-48D5-BDAE-02ED7409AF30}"/>
+              </a:ext>
+            </a:extLst>
+          </p:cNvPr>
+          <p:cNvSpPr>
+            <a:spLocks xmlns:a="http://schemas.openxmlformats.org/drawingml/2006/main" noGrp="1"/>
+          </p:cNvSpPr>
+          <p:nvPr/>
+        </p:nvSpPr>
+        <p:spPr>
+          <a:xfrm xmlns:a="http://schemas.openxmlformats.org/drawingml/2006/main">
+            <a:off x="857250" y="1676400"/>
+            <a:ext cx="7239000" cy="3619500"/>
+          </a:xfrm>
+          <a:prstGeom xmlns:a="http://schemas.openxmlformats.org/drawingml/2006/main" prst="rect">
+            <a:avLst/>
+          </a:prstGeom>
+          <a:noFill xmlns:a="http://schemas.openxmlformats.org/drawingml/2006/main"/>
+          <a:ln xmlns:a="http://schemas.openxmlformats.org/drawingml/2006/main" w="0">
+            <a:noFill/>
+          </a:ln>
+        </p:spPr>
+        <p:txBody>
+          <a:bodyPr xmlns:a="http://schemas.openxmlformats.org/drawingml/2006/main">
+            <a:noAutofit/>
+          </a:bodyPr>
+          <a:lstStyle xmlns:a="http://schemas.openxmlformats.org/drawingml/2006/main"/>
+          <a:p xmlns:a="http://schemas.openxmlformats.org/drawingml/2006/main">
+            <a:pPr marL="254000" indent="-127000">
+              <a:spcAft>
+                <a:spcPts val="1200"/>
+              </a:spcAft>
+              <a:buChar char="•"/>
+              <a:defRPr sz="2025">
+                <a:solidFill>
+                  <a:srgbClr val="172433"/>
+                </a:solidFill>
+                <a:latin typeface="Arial"/>
+                <a:ea typeface="Arial"/>
+                <a:cs typeface="Arial"/>
+              </a:defRPr>
+            </a:pPr>
+            <a:r>
+              <a:rPr sz="2025">
+                <a:solidFill>
+                  <a:srgbClr val="172433"/>
+                </a:solidFill>
+                <a:latin typeface="Arial"/>
+                <a:ea typeface="Arial"/>
+                <a:cs typeface="Arial"/>
+              </a:rPr>
+              <a:t>Open the course repository in Visual Studio Code</a:t>
+            </a:r>
+          </a:p>
+          <a:p xmlns:a="http://schemas.openxmlformats.org/drawingml/2006/main">
+            <a:pPr marL="254000" indent="-127000">
+              <a:spcAft>
+                <a:spcPts val="1200"/>
+              </a:spcAft>
+              <a:buChar char="•"/>
+              <a:defRPr sz="2025">
+                <a:solidFill>
+                  <a:srgbClr val="172433"/>
+                </a:solidFill>
+                <a:latin typeface="Arial"/>
+                <a:ea typeface="Arial"/>
+                <a:cs typeface="Arial"/>
+              </a:defRPr>
+            </a:pPr>
+            <a:r>
+              <a:rPr sz="2025">
+                <a:solidFill>
+                  <a:srgbClr val="172433"/>
+                </a:solidFill>
+                <a:latin typeface="Arial"/>
+                <a:ea typeface="Arial"/>
+                <a:cs typeface="Arial"/>
+              </a:rPr>
+              <a:t>Run setup/verify_setup.py</a:t>
+            </a:r>
+          </a:p>
+          <a:p xmlns:a="http://schemas.openxmlformats.org/drawingml/2006/main">
+            <a:pPr marL="254000" indent="-127000">
+              <a:spcAft>
+                <a:spcPts val="1200"/>
+              </a:spcAft>
+              <a:buChar char="•"/>
+              <a:defRPr sz="2025">
+                <a:solidFill>
+                  <a:srgbClr val="172433"/>
+                </a:solidFill>
+                <a:latin typeface="Arial"/>
+                <a:ea typeface="Arial"/>
+                <a:cs typeface="Arial"/>
+              </a:defRPr>
+            </a:pPr>
+            <a:r>
+              <a:rPr sz="2025">
+                <a:solidFill>
+                  <a:srgbClr val="172433"/>
+                </a:solidFill>
+                <a:latin typeface="Arial"/>
+                <a:ea typeface="Arial"/>
+                <a:cs typeface="Arial"/>
+              </a:rPr>
+              <a:t>Run week-01-python-basics/examples/hello.py</a:t>
+            </a:r>
+          </a:p>
+          <a:p xmlns:a="http://schemas.openxmlformats.org/drawingml/2006/main">
+            <a:pPr marL="254000" indent="-127000">
+              <a:spcAft>
+                <a:spcPts val="1200"/>
+              </a:spcAft>
+              <a:buChar char="•"/>
+              <a:defRPr sz="2025">
+                <a:solidFill>
+                  <a:srgbClr val="172433"/>
+                </a:solidFill>
+                <a:latin typeface="Arial"/>
+                <a:ea typeface="Arial"/>
+                <a:cs typeface="Arial"/>
+              </a:defRPr>
+            </a:pPr>
+            <a:r>
+              <a:rPr sz="2025">
+                <a:solidFill>
+                  <a:srgbClr val="172433"/>
+                </a:solidFill>
+                <a:latin typeface="Arial"/>
+                <a:ea typeface="Arial"/>
+                <a:cs typeface="Arial"/>
+              </a:rPr>
+              <a:t>Change every displayed message</a:t>
+            </a:r>
+          </a:p>
+          <a:p xmlns:a="http://schemas.openxmlformats.org/drawingml/2006/main">
+            <a:pPr marL="254000" indent="-127000">
+              <a:spcAft>
+                <a:spcPts val="1200"/>
+              </a:spcAft>
+              <a:buChar char="•"/>
+              <a:defRPr sz="2025">
+                <a:solidFill>
+                  <a:srgbClr val="172433"/>
+                </a:solidFill>
+                <a:latin typeface="Arial"/>
+                <a:ea typeface="Arial"/>
+                <a:cs typeface="Arial"/>
+              </a:defRPr>
+            </a:pPr>
+            <a:r>
+              <a:rPr sz="2025">
+                <a:solidFill>
+                  <a:srgbClr val="172433"/>
+                </a:solidFill>
+                <a:latin typeface="Arial"/>
+                <a:ea typeface="Arial"/>
+                <a:cs typeface="Arial"/>
+              </a:rPr>
+              <a:t>Create one error, read it, and repair it</a:t>
+            </a:r>
+          </a:p>
+        </p:txBody>
+      </p:sp>
+      <p:sp>
+        <p:nvSpPr>
+          <p:cNvPr id="4" name="">
+            <a:extLst xmlns:a="http://schemas.openxmlformats.org/drawingml/2006/main">
+              <a:ext uri="{FF2B5EF4-FFF2-40B4-BE49-F238E27FC236}">
+                <a16:creationId xmlns:a16="http://schemas.microsoft.com/office/drawing/2014/main" id="{5B640723-2BFB-49A0-BA26-D3E90B02D131}"/>
+              </a:ext>
+            </a:extLst>
+          </p:cNvPr>
+          <p:cNvSpPr>
+            <a:spLocks xmlns:a="http://schemas.openxmlformats.org/drawingml/2006/main" noGrp="1"/>
+          </p:cNvSpPr>
+          <p:nvPr/>
+        </p:nvSpPr>
+        <p:spPr>
+          <a:xfrm xmlns:a="http://schemas.openxmlformats.org/drawingml/2006/main">
+            <a:off x="8286750" y="1752600"/>
+            <a:ext cx="2762250" cy="419100"/>
+          </a:xfrm>
+          <a:prstGeom xmlns:a="http://schemas.openxmlformats.org/drawingml/2006/main" prst="rect">
+            <a:avLst/>
+          </a:prstGeom>
+          <a:noFill xmlns:a="http://schemas.openxmlformats.org/drawingml/2006/main"/>
+          <a:ln xmlns:a="http://schemas.openxmlformats.org/drawingml/2006/main" w="0">
+            <a:noFill/>
+          </a:ln>
+        </p:spPr>
+        <p:txBody>
+          <a:bodyPr xmlns:a="http://schemas.openxmlformats.org/drawingml/2006/main" anchor="ctr">
+            <a:noAutofit/>
+          </a:bodyPr>
+          <a:lstStyle xmlns:a="http://schemas.openxmlformats.org/drawingml/2006/main"/>
+          <a:p xmlns:a="http://schemas.openxmlformats.org/drawingml/2006/main">
+            <a:pPr>
+              <a:defRPr sz="1800" b="1" i="0">
+                <a:solidFill>
+                  <a:srgbClr val="2F6F89"/>
+                </a:solidFill>
+                <a:latin typeface="Arial"/>
+                <a:ea typeface="Arial"/>
+                <a:cs typeface="Arial"/>
+              </a:defRPr>
+            </a:pPr>
+            <a:r>
+              <a:rPr sz="1800" b="1" i="0">
+                <a:solidFill>
+                  <a:srgbClr val="2F6F89"/>
+                </a:solidFill>
+                <a:latin typeface="Arial"/>
+                <a:ea typeface="Arial"/>
+                <a:cs typeface="Arial"/>
+              </a:rPr>
+              <a:t>Command</a:t>
+            </a:r>
+          </a:p>
+        </p:txBody>
+      </p:sp>
+      <p:sp>
+        <p:nvSpPr>
+          <p:cNvPr id="5" name="">
+            <a:extLst xmlns:a="http://schemas.openxmlformats.org/drawingml/2006/main">
+              <a:ext uri="{FF2B5EF4-FFF2-40B4-BE49-F238E27FC236}">
+                <a16:creationId xmlns:a16="http://schemas.microsoft.com/office/drawing/2014/main" id="{777C26C0-EEA8-4EC0-8506-3B3C2A967AA9}"/>
+              </a:ext>
+            </a:extLst>
+          </p:cNvPr>
+          <p:cNvSpPr>
+            <a:spLocks xmlns:a="http://schemas.openxmlformats.org/drawingml/2006/main" noGrp="1"/>
+          </p:cNvSpPr>
+          <p:nvPr/>
+        </p:nvSpPr>
+        <p:spPr>
+          <a:xfrm xmlns:a="http://schemas.openxmlformats.org/drawingml/2006/main">
+            <a:off x="8248650" y="2305050"/>
+            <a:ext cx="3143250" cy="1428750"/>
+          </a:xfrm>
+          <a:prstGeom xmlns:a="http://schemas.openxmlformats.org/drawingml/2006/main" prst="roundRect">
+            <a:avLst>
+              <a:gd name="adj" fmla="val 5333"/>
+            </a:avLst>
+          </a:prstGeom>
+          <a:solidFill xmlns:a="http://schemas.openxmlformats.org/drawingml/2006/main">
+            <a:srgbClr val="173654"/>
+          </a:solidFill>
+          <a:ln xmlns:a="http://schemas.openxmlformats.org/drawingml/2006/main" w="0">
+            <a:noFill/>
+          </a:ln>
+        </p:spPr>
+        <p:txBody>
+          <a:bodyPr xmlns:a="http://schemas.openxmlformats.org/drawingml/2006/main" anchor="ctr">
+            <a:noAutofit/>
+          </a:bodyPr>
+          <a:lstStyle xmlns:a="http://schemas.openxmlformats.org/drawingml/2006/main"/>
+          <a:p xmlns:a="http://schemas.openxmlformats.org/drawingml/2006/main">
+            <a:pPr>
+              <a:defRPr sz="1725" b="0" i="0">
+                <a:solidFill>
+                  <a:srgbClr val="FFFFFF"/>
+                </a:solidFill>
+                <a:latin typeface="Consolas"/>
+                <a:ea typeface="Consolas"/>
+                <a:cs typeface="Consolas"/>
+              </a:defRPr>
+            </a:pPr>
+            <a:r>
+              <a:rPr sz="1725" b="0" i="0">
+                <a:solidFill>
+                  <a:srgbClr val="FFFFFF"/>
+                </a:solidFill>
+                <a:latin typeface="Consolas"/>
+                <a:ea typeface="Consolas"/>
+                <a:cs typeface="Consolas"/>
+              </a:rPr>
+              <a:t>python week-01-python-basics/</a:t>
+            </a:r>
+          </a:p>
+          <a:p xmlns:a="http://schemas.openxmlformats.org/drawingml/2006/main">
+            <a:pPr>
+              <a:defRPr sz="1725" b="0" i="0">
+                <a:solidFill>
+                  <a:srgbClr val="FFFFFF"/>
+                </a:solidFill>
+                <a:latin typeface="Consolas"/>
+                <a:ea typeface="Consolas"/>
+                <a:cs typeface="Consolas"/>
+              </a:defRPr>
+            </a:pPr>
+            <a:r>
+              <a:rPr sz="1725" b="0" i="0">
+                <a:solidFill>
+                  <a:srgbClr val="FFFFFF"/>
+                </a:solidFill>
+                <a:latin typeface="Consolas"/>
+                <a:ea typeface="Consolas"/>
+                <a:cs typeface="Consolas"/>
+              </a:rPr>
+              <a:t>examples/hello.py</a:t>
+            </a:r>
+          </a:p>
+        </p:txBody>
+      </p:sp>
+      <p:sp>
+        <p:nvSpPr>
+          <p:cNvPr id="6" name="">
+            <a:extLst xmlns:a="http://schemas.openxmlformats.org/drawingml/2006/main">
+              <a:ext uri="{FF2B5EF4-FFF2-40B4-BE49-F238E27FC236}">
+                <a16:creationId xmlns:a16="http://schemas.microsoft.com/office/drawing/2014/main" id="{CD7F5DAC-A51A-4F04-9EC4-057E612687A3}"/>
+              </a:ext>
+            </a:extLst>
+          </p:cNvPr>
+          <p:cNvSpPr>
+            <a:spLocks xmlns:a="http://schemas.openxmlformats.org/drawingml/2006/main" noGrp="1"/>
+          </p:cNvSpPr>
+          <p:nvPr/>
+        </p:nvSpPr>
+        <p:spPr>
+          <a:xfrm xmlns:a="http://schemas.openxmlformats.org/drawingml/2006/main">
+            <a:off x="8248650" y="4171950"/>
+            <a:ext cx="3143250" cy="952500"/>
+          </a:xfrm>
+          <a:prstGeom xmlns:a="http://schemas.openxmlformats.org/drawingml/2006/main" prst="roundRect">
+            <a:avLst>
+              <a:gd name="adj" fmla="val 8000"/>
+            </a:avLst>
+          </a:prstGeom>
+          <a:solidFill xmlns:a="http://schemas.openxmlformats.org/drawingml/2006/main">
+            <a:srgbClr val="EAF2F7"/>
+          </a:solidFill>
+          <a:ln xmlns:a="http://schemas.openxmlformats.org/drawingml/2006/main" w="0">
+            <a:noFill/>
+          </a:ln>
+        </p:spPr>
+        <p:txBody>
+          <a:bodyPr xmlns:a="http://schemas.openxmlformats.org/drawingml/2006/main" anchor="ctr">
+            <a:noAutofit/>
+          </a:bodyPr>
+          <a:lstStyle xmlns:a="http://schemas.openxmlformats.org/drawingml/2006/main"/>
+          <a:p xmlns:a="http://schemas.openxmlformats.org/drawingml/2006/main">
+            <a:pPr>
+              <a:defRPr sz="1650" b="0" i="0">
+                <a:solidFill>
+                  <a:srgbClr val="172433"/>
+                </a:solidFill>
+                <a:latin typeface="Arial"/>
+                <a:ea typeface="Arial"/>
+                <a:cs typeface="Arial"/>
+              </a:defRPr>
+            </a:pPr>
+            <a:r>
+              <a:rPr sz="1650" b="0" i="0">
+                <a:solidFill>
+                  <a:srgbClr val="172433"/>
+                </a:solidFill>
+                <a:latin typeface="Arial"/>
+                <a:ea typeface="Arial"/>
+                <a:cs typeface="Arial"/>
+              </a:rPr>
+              <a:t>Ask for help with the complete error message visible.</a:t>
+            </a:r>
+          </a:p>
+        </p:txBody>
+      </p:sp>
+      <p:sp>
+        <p:nvSpPr>
+          <p:cNvPr id="7" name="">
+            <a:extLst xmlns:a="http://schemas.openxmlformats.org/drawingml/2006/main">
+              <a:ext uri="{FF2B5EF4-FFF2-40B4-BE49-F238E27FC236}">
+                <a16:creationId xmlns:a16="http://schemas.microsoft.com/office/drawing/2014/main" id="{A7EDEA0D-918A-4E99-A043-A4D3BC0CE7A9}"/>
+              </a:ext>
+            </a:extLst>
+          </p:cNvPr>
+          <p:cNvSpPr>
+            <a:spLocks xmlns:a="http://schemas.openxmlformats.org/drawingml/2006/main" noGrp="1"/>
+          </p:cNvSpPr>
+          <p:nvPr/>
+        </p:nvSpPr>
+        <p:spPr>
+          <a:xfrm xmlns:a="http://schemas.openxmlformats.org/drawingml/2006/main">
+            <a:off x="685800" y="6438900"/>
+            <a:ext cx="10820400" cy="228600"/>
+          </a:xfrm>
+          <a:prstGeom xmlns:a="http://schemas.openxmlformats.org/drawingml/2006/main" prst="rect">
+            <a:avLst/>
+          </a:prstGeom>
+          <a:noFill xmlns:a="http://schemas.openxmlformats.org/drawingml/2006/main"/>
+          <a:ln xmlns:a="http://schemas.openxmlformats.org/drawingml/2006/main" w="0">
+            <a:noFill/>
+          </a:ln>
+        </p:spPr>
+        <p:txBody>
+          <a:bodyPr xmlns:a="http://schemas.openxmlformats.org/drawingml/2006/main" anchor="ctr">
+            <a:noAutofit/>
+          </a:bodyPr>
+          <a:lstStyle xmlns:a="http://schemas.openxmlformats.org/drawingml/2006/main"/>
+          <a:p xmlns:a="http://schemas.openxmlformats.org/drawingml/2006/main">
+            <a:pPr>
+              <a:defRPr sz="1200" b="0" i="0">
+                <a:solidFill>
+                  <a:srgbClr val="5D6B78"/>
+                </a:solidFill>
+                <a:latin typeface="Arial"/>
+                <a:ea typeface="Arial"/>
+                <a:cs typeface="Arial"/>
+              </a:defRPr>
+            </a:pPr>
+            <a:r>
+              <a:rPr sz="1200" b="0" i="0">
+                <a:solidFill>
+                  <a:srgbClr val="5D6B78"/>
+                </a:solidFill>
+                <a:latin typeface="Arial"/>
+                <a:ea typeface="Arial"/>
+                <a:cs typeface="Arial"/>
+              </a:rPr>
+              <a:t>10:35-11:20 | Guided lab</a:t>
+            </a:r>
+          </a:p>
+        </p:txBody>
+      </p:sp>
+    </p:spTree>
+    <p:extLst>
+      <p:ext uri="{BB962C8B-B14F-4D97-AF65-F5344CB8AC3E}">
+        <p14:creationId xmlns:p14="http://schemas.microsoft.com/office/powerpoint/2010/main" val="742153838"/>
+      </p:ext>
+    </p:extLst>
+  </p:cSld>
+</p:sld>
+</file>
+
+<file path=ppt/slides/slide11.xml><?xml version="1.0" encoding="utf-8"?>
+<p:sld xmlns:p="http://schemas.openxmlformats.org/presentationml/2006/main">
+  <p:cSld>
+    <p:bg>
+      <p:bgPr>
+        <a:solidFill xmlns:a="http://schemas.openxmlformats.org/drawingml/2006/main">
+          <a:srgbClr val="3C8994"/>
+        </a:solidFill>
+      </p:bgPr>
+    </p:bg>
+    <p:spTree>
+      <p:nvGrpSpPr>
+        <p:cNvPr id="1" name=""/>
+        <p:cNvGrpSpPr/>
+        <p:nvPr/>
+      </p:nvGrpSpPr>
+      <p:grpSpPr>
+        <a:xfrm xmlns:a="http://schemas.openxmlformats.org/drawingml/2006/main"/>
+      </p:grpSpPr>
+      <p:sp>
+        <p:nvSpPr>
+          <p:cNvPr id="4" name="">
+            <a:extLst xmlns:a="http://schemas.openxmlformats.org/drawingml/2006/main">
+              <a:ext uri="{FF2B5EF4-FFF2-40B4-BE49-F238E27FC236}">
+                <a16:creationId xmlns:a16="http://schemas.microsoft.com/office/drawing/2014/main" id="{F91A1703-162C-4E42-845B-E311CA9606D6}"/>
+              </a:ext>
+            </a:extLst>
+          </p:cNvPr>
+          <p:cNvSpPr>
+            <a:spLocks xmlns:a="http://schemas.openxmlformats.org/drawingml/2006/main" noGrp="1"/>
+          </p:cNvSpPr>
+          <p:nvPr/>
+        </p:nvSpPr>
+        <p:spPr>
+          <a:xfrm xmlns:a="http://schemas.openxmlformats.org/drawingml/2006/main">
+            <a:off x="685800" y="2095500"/>
+            <a:ext cx="10820400" cy="952500"/>
+          </a:xfrm>
+          <a:prstGeom xmlns:a="http://schemas.openxmlformats.org/drawingml/2006/main" prst="rect">
+            <a:avLst/>
+          </a:prstGeom>
+          <a:noFill xmlns:a="http://schemas.openxmlformats.org/drawingml/2006/main"/>
+          <a:ln xmlns:a="http://schemas.openxmlformats.org/drawingml/2006/main" w="0">
+            <a:noFill/>
+          </a:ln>
+        </p:spPr>
+        <p:txBody>
+          <a:bodyPr xmlns:a="http://schemas.openxmlformats.org/drawingml/2006/main" anchor="ctr">
+            <a:noAutofit/>
+          </a:bodyPr>
+          <a:lstStyle xmlns:a="http://schemas.openxmlformats.org/drawingml/2006/main"/>
+          <a:p xmlns:a="http://schemas.openxmlformats.org/drawingml/2006/main">
+            <a:pPr>
+              <a:defRPr sz="5400" b="1" i="0">
+                <a:solidFill>
+                  <a:srgbClr val="FFFFFF"/>
+                </a:solidFill>
+                <a:latin typeface="Arial"/>
+                <a:ea typeface="Arial"/>
+                <a:cs typeface="Arial"/>
+              </a:defRPr>
+            </a:pPr>
+            <a:r>
+              <a:rPr sz="5400" b="1" i="0">
+                <a:solidFill>
+                  <a:srgbClr val="FFFFFF"/>
+                </a:solidFill>
+                <a:latin typeface="Arial"/>
+                <a:ea typeface="Arial"/>
+                <a:cs typeface="Arial"/>
+              </a:rPr>
+              <a:t>Break</a:t>
+            </a:r>
+          </a:p>
+        </p:txBody>
+      </p:sp>
+      <p:sp>
+        <p:nvSpPr>
+          <p:cNvPr id="2" name="">
+            <a:extLst xmlns:a="http://schemas.openxmlformats.org/drawingml/2006/main">
+              <a:ext uri="{FF2B5EF4-FFF2-40B4-BE49-F238E27FC236}">
+                <a16:creationId xmlns:a16="http://schemas.microsoft.com/office/drawing/2014/main" id="{EA00AD43-51E3-45DA-B5E3-CAD727906AA1}"/>
+              </a:ext>
+            </a:extLst>
+          </p:cNvPr>
+          <p:cNvSpPr>
+            <a:spLocks xmlns:a="http://schemas.openxmlformats.org/drawingml/2006/main" noGrp="1"/>
+          </p:cNvSpPr>
+          <p:nvPr/>
+        </p:nvSpPr>
+        <p:spPr>
+          <a:xfrm xmlns:a="http://schemas.openxmlformats.org/drawingml/2006/main">
+            <a:off x="685800" y="3238500"/>
+            <a:ext cx="10820400" cy="571500"/>
+          </a:xfrm>
+          <a:prstGeom xmlns:a="http://schemas.openxmlformats.org/drawingml/2006/main" prst="rect">
+            <a:avLst/>
+          </a:prstGeom>
+          <a:noFill xmlns:a="http://schemas.openxmlformats.org/drawingml/2006/main"/>
+          <a:ln xmlns:a="http://schemas.openxmlformats.org/drawingml/2006/main" w="0">
+            <a:noFill/>
+          </a:ln>
+        </p:spPr>
+        <p:txBody>
+          <a:bodyPr xmlns:a="http://schemas.openxmlformats.org/drawingml/2006/main" anchor="ctr">
+            <a:noAutofit/>
+          </a:bodyPr>
+          <a:lstStyle xmlns:a="http://schemas.openxmlformats.org/drawingml/2006/main"/>
+          <a:p xmlns:a="http://schemas.openxmlformats.org/drawingml/2006/main">
+            <a:pPr>
+              <a:defRPr sz="2700" b="0" i="0">
+                <a:solidFill>
+                  <a:srgbClr val="FFFFFF"/>
+                </a:solidFill>
+                <a:latin typeface="Arial"/>
+                <a:ea typeface="Arial"/>
+                <a:cs typeface="Arial"/>
+              </a:defRPr>
+            </a:pPr>
+            <a:r>
+              <a:rPr sz="2700" b="0" i="0">
+                <a:solidFill>
+                  <a:srgbClr val="FFFFFF"/>
+                </a:solidFill>
+                <a:latin typeface="Arial"/>
+                <a:ea typeface="Arial"/>
+                <a:cs typeface="Arial"/>
+              </a:rPr>
+              <a:t>11:20-11:30</a:t>
+            </a:r>
+          </a:p>
+        </p:txBody>
+      </p:sp>
+      <p:sp>
+        <p:nvSpPr>
+          <p:cNvPr id="3" name="">
+            <a:extLst xmlns:a="http://schemas.openxmlformats.org/drawingml/2006/main">
+              <a:ext uri="{FF2B5EF4-FFF2-40B4-BE49-F238E27FC236}">
+                <a16:creationId xmlns:a16="http://schemas.microsoft.com/office/drawing/2014/main" id="{A9ECB7A6-76AA-4208-B4DB-D93ED7CE1C28}"/>
+              </a:ext>
+            </a:extLst>
+          </p:cNvPr>
+          <p:cNvSpPr>
+            <a:spLocks xmlns:a="http://schemas.openxmlformats.org/drawingml/2006/main" noGrp="1"/>
+          </p:cNvSpPr>
+          <p:nvPr/>
+        </p:nvSpPr>
+        <p:spPr>
+          <a:xfrm xmlns:a="http://schemas.openxmlformats.org/drawingml/2006/main">
+            <a:off x="685800" y="4171950"/>
+            <a:ext cx="10820400" cy="495300"/>
+          </a:xfrm>
+          <a:prstGeom xmlns:a="http://schemas.openxmlformats.org/drawingml/2006/main" prst="rect">
+            <a:avLst/>
+          </a:prstGeom>
+          <a:noFill xmlns:a="http://schemas.openxmlformats.org/drawingml/2006/main"/>
+          <a:ln xmlns:a="http://schemas.openxmlformats.org/drawingml/2006/main" w="0">
+            <a:noFill/>
+          </a:ln>
+        </p:spPr>
+        <p:txBody>
+          <a:bodyPr xmlns:a="http://schemas.openxmlformats.org/drawingml/2006/main" anchor="ctr">
+            <a:noAutofit/>
+          </a:bodyPr>
+          <a:lstStyle xmlns:a="http://schemas.openxmlformats.org/drawingml/2006/main"/>
+          <a:p xmlns:a="http://schemas.openxmlformats.org/drawingml/2006/main">
+            <a:pPr>
+              <a:defRPr sz="1875" b="0" i="0">
+                <a:solidFill>
+                  <a:srgbClr val="FFFFFF"/>
+                </a:solidFill>
+                <a:latin typeface="Arial"/>
+                <a:ea typeface="Arial"/>
+                <a:cs typeface="Arial"/>
+              </a:defRPr>
+            </a:pPr>
+            <a:r>
+              <a:rPr sz="1875" b="0" i="0">
+                <a:solidFill>
+                  <a:srgbClr val="FFFFFF"/>
+                </a:solidFill>
+                <a:latin typeface="Arial"/>
+                <a:ea typeface="Arial"/>
+                <a:cs typeface="Arial"/>
+              </a:rPr>
+              <a:t>After the break: build something that introduces you.</a:t>
+            </a:r>
+          </a:p>
+        </p:txBody>
+      </p:sp>
+    </p:spTree>
+    <p:extLst>
+      <p:ext uri="{BB962C8B-B14F-4D97-AF65-F5344CB8AC3E}">
+        <p14:creationId xmlns:p14="http://schemas.microsoft.com/office/powerpoint/2010/main" val="991942461"/>
+      </p:ext>
+    </p:extLst>
+  </p:cSld>
+</p:sld>
+</file>
+
+<file path=ppt/slides/slide12.xml><?xml version="1.0" encoding="utf-8"?>
 <p:sld xmlns:p="http://schemas.openxmlformats.org/presentationml/2006/main">
   <p:cSld>
     <p:bg>
@@ -2067,7 +2980,7 @@
           <p:cNvPr id="9" name="">
             <a:extLst xmlns:a="http://schemas.openxmlformats.org/drawingml/2006/main">
               <a:ext uri="{FF2B5EF4-FFF2-40B4-BE49-F238E27FC236}">
-                <a16:creationId xmlns:a16="http://schemas.microsoft.com/office/drawing/2014/main" id="{A8CD8386-4A22-4796-AE5C-069718EAE652}"/>
+                <a16:creationId xmlns:a16="http://schemas.microsoft.com/office/drawing/2014/main" id="{6FBFCEAE-CA1E-4191-96E6-A905DE509B30}"/>
               </a:ext>
             </a:extLst>
           </p:cNvPr>
@@ -2124,7 +3037,7 @@
           <p:cNvPr id="2" name="">
             <a:extLst xmlns:a="http://schemas.openxmlformats.org/drawingml/2006/main">
               <a:ext uri="{FF2B5EF4-FFF2-40B4-BE49-F238E27FC236}">
-                <a16:creationId xmlns:a16="http://schemas.microsoft.com/office/drawing/2014/main" id="{222CE974-CDD5-4062-A687-CBBE59CBE895}"/>
+                <a16:creationId xmlns:a16="http://schemas.microsoft.com/office/drawing/2014/main" id="{71EE0A95-4DDF-43B4-8D1B-F204FC4BB67C}"/>
               </a:ext>
             </a:extLst>
           </p:cNvPr>
@@ -2181,7 +3094,7 @@
           <p:cNvPr id="3" name="">
             <a:extLst xmlns:a="http://schemas.openxmlformats.org/drawingml/2006/main">
               <a:ext uri="{FF2B5EF4-FFF2-40B4-BE49-F238E27FC236}">
-                <a16:creationId xmlns:a16="http://schemas.microsoft.com/office/drawing/2014/main" id="{B7124CB3-B7AB-47D1-91CE-C93C1E4DB4F1}"/>
+                <a16:creationId xmlns:a16="http://schemas.microsoft.com/office/drawing/2014/main" id="{918C3C14-A5C1-49E0-93FE-711EAFEF921C}"/>
               </a:ext>
             </a:extLst>
           </p:cNvPr>
@@ -2238,7 +3151,7 @@
           <p:cNvPr id="4" name="">
             <a:extLst xmlns:a="http://schemas.openxmlformats.org/drawingml/2006/main">
               <a:ext uri="{FF2B5EF4-FFF2-40B4-BE49-F238E27FC236}">
-                <a16:creationId xmlns:a16="http://schemas.microsoft.com/office/drawing/2014/main" id="{A87AA992-B0DD-4105-AF51-DF5E84C09E2D}"/>
+                <a16:creationId xmlns:a16="http://schemas.microsoft.com/office/drawing/2014/main" id="{524DE84D-3EC3-4617-9E54-B3841A8DCA04}"/>
               </a:ext>
             </a:extLst>
           </p:cNvPr>
@@ -2407,7 +3320,7 @@
           <p:cNvPr id="5" name="">
             <a:extLst xmlns:a="http://schemas.openxmlformats.org/drawingml/2006/main">
               <a:ext uri="{FF2B5EF4-FFF2-40B4-BE49-F238E27FC236}">
-                <a16:creationId xmlns:a16="http://schemas.microsoft.com/office/drawing/2014/main" id="{D521D112-64F9-4079-AC43-47CE00430653}"/>
+                <a16:creationId xmlns:a16="http://schemas.microsoft.com/office/drawing/2014/main" id="{32DF1BFD-640C-4F26-BC45-FFAB1847FE32}"/>
               </a:ext>
             </a:extLst>
           </p:cNvPr>
@@ -2464,7 +3377,7 @@
           <p:cNvPr id="6" name="">
             <a:extLst xmlns:a="http://schemas.openxmlformats.org/drawingml/2006/main">
               <a:ext uri="{FF2B5EF4-FFF2-40B4-BE49-F238E27FC236}">
-                <a16:creationId xmlns:a16="http://schemas.microsoft.com/office/drawing/2014/main" id="{5EDF52AA-A902-4505-BD66-D063868425B8}"/>
+                <a16:creationId xmlns:a16="http://schemas.microsoft.com/office/drawing/2014/main" id="{D3CA5C99-65A5-4FD2-A29F-3F4084DF1173}"/>
               </a:ext>
             </a:extLst>
           </p:cNvPr>
@@ -2548,7 +3461,7 @@
           <p:cNvPr id="7" name="">
             <a:extLst xmlns:a="http://schemas.openxmlformats.org/drawingml/2006/main">
               <a:ext uri="{FF2B5EF4-FFF2-40B4-BE49-F238E27FC236}">
-                <a16:creationId xmlns:a16="http://schemas.microsoft.com/office/drawing/2014/main" id="{B5D99E9A-F9CD-474B-8D71-EB918B3C435D}"/>
+                <a16:creationId xmlns:a16="http://schemas.microsoft.com/office/drawing/2014/main" id="{65A9F725-FA50-43F2-9BB1-49A0AED6DD36}"/>
               </a:ext>
             </a:extLst>
           </p:cNvPr>
@@ -2605,7 +3518,7 @@
           <p:cNvPr id="8" name="">
             <a:extLst xmlns:a="http://schemas.openxmlformats.org/drawingml/2006/main">
               <a:ext uri="{FF2B5EF4-FFF2-40B4-BE49-F238E27FC236}">
-                <a16:creationId xmlns:a16="http://schemas.microsoft.com/office/drawing/2014/main" id="{D66F3D9B-3209-46B5-9C4A-EC5748C05D52}"/>
+                <a16:creationId xmlns:a16="http://schemas.microsoft.com/office/drawing/2014/main" id="{D74317CB-B55B-4DB4-8B63-DA2D75738C8D}"/>
               </a:ext>
             </a:extLst>
           </p:cNvPr>
@@ -2660,14 +3573,14 @@
     </p:spTree>
     <p:extLst>
       <p:ext uri="{BB962C8B-B14F-4D97-AF65-F5344CB8AC3E}">
-        <p14:creationId xmlns:p14="http://schemas.microsoft.com/office/powerpoint/2010/main" val="2005874420"/>
+        <p14:creationId xmlns:p14="http://schemas.microsoft.com/office/powerpoint/2010/main" val="1633076460"/>
       </p:ext>
     </p:extLst>
   </p:cSld>
 </p:sld>
 </file>
 
-<file path=ppt/slides/slide11.xml><?xml version="1.0" encoding="utf-8"?>
+<file path=ppt/slides/slide13.xml><?xml version="1.0" encoding="utf-8"?>
 <p:sld xmlns:p="http://schemas.openxmlformats.org/presentationml/2006/main">
   <p:cSld>
     <p:bg>
@@ -2691,7 +3604,7 @@
           <p:cNvPr id="6" name="">
             <a:extLst xmlns:a="http://schemas.openxmlformats.org/drawingml/2006/main">
               <a:ext uri="{FF2B5EF4-FFF2-40B4-BE49-F238E27FC236}">
-                <a16:creationId xmlns:a16="http://schemas.microsoft.com/office/drawing/2014/main" id="{B822F649-2A04-437E-A315-2EBA2C8DD496}"/>
+                <a16:creationId xmlns:a16="http://schemas.microsoft.com/office/drawing/2014/main" id="{8BA0C26B-F24A-489D-959D-594A86D1746A}"/>
               </a:ext>
             </a:extLst>
           </p:cNvPr>
@@ -2748,7 +3661,7 @@
           <p:cNvPr id="2" name="">
             <a:extLst xmlns:a="http://schemas.openxmlformats.org/drawingml/2006/main">
               <a:ext uri="{FF2B5EF4-FFF2-40B4-BE49-F238E27FC236}">
-                <a16:creationId xmlns:a16="http://schemas.microsoft.com/office/drawing/2014/main" id="{5AC48949-5685-4EF9-AE83-B19DDF96852B}"/>
+                <a16:creationId xmlns:a16="http://schemas.microsoft.com/office/drawing/2014/main" id="{A366D86C-C6C8-43F5-9F94-FF67558FFC6B}"/>
               </a:ext>
             </a:extLst>
           </p:cNvPr>
@@ -2805,7 +3718,7 @@
           <p:cNvPr id="3" name="">
             <a:extLst xmlns:a="http://schemas.openxmlformats.org/drawingml/2006/main">
               <a:ext uri="{FF2B5EF4-FFF2-40B4-BE49-F238E27FC236}">
-                <a16:creationId xmlns:a16="http://schemas.microsoft.com/office/drawing/2014/main" id="{3E0FD84F-9D3B-4BFC-B1AB-946862905A6E}"/>
+                <a16:creationId xmlns:a16="http://schemas.microsoft.com/office/drawing/2014/main" id="{453DB96C-BC20-4754-A789-D65D3B06B066}"/>
               </a:ext>
             </a:extLst>
           </p:cNvPr>
@@ -2974,7 +3887,7 @@
           <p:cNvPr id="4" name="">
             <a:extLst xmlns:a="http://schemas.openxmlformats.org/drawingml/2006/main">
               <a:ext uri="{FF2B5EF4-FFF2-40B4-BE49-F238E27FC236}">
-                <a16:creationId xmlns:a16="http://schemas.microsoft.com/office/drawing/2014/main" id="{FB7C7AD4-F30D-4EA1-A86F-A4F2DB5D90FA}"/>
+                <a16:creationId xmlns:a16="http://schemas.microsoft.com/office/drawing/2014/main" id="{48025FB1-28BC-4610-8D39-3AEA3DB6A62F}"/>
               </a:ext>
             </a:extLst>
           </p:cNvPr>
@@ -3031,7 +3944,7 @@
           <p:cNvPr id="5" name="">
             <a:extLst xmlns:a="http://schemas.openxmlformats.org/drawingml/2006/main">
               <a:ext uri="{FF2B5EF4-FFF2-40B4-BE49-F238E27FC236}">
-                <a16:creationId xmlns:a16="http://schemas.microsoft.com/office/drawing/2014/main" id="{788648F7-D689-48A7-B48D-3B77674BFBAB}"/>
+                <a16:creationId xmlns:a16="http://schemas.microsoft.com/office/drawing/2014/main" id="{F1B03BEC-E8D7-42B5-9D97-6E0251B2F7A5}"/>
               </a:ext>
             </a:extLst>
           </p:cNvPr>
@@ -3086,14 +3999,14 @@
     </p:spTree>
     <p:extLst>
       <p:ext uri="{BB962C8B-B14F-4D97-AF65-F5344CB8AC3E}">
-        <p14:creationId xmlns:p14="http://schemas.microsoft.com/office/powerpoint/2010/main" val="1995908275"/>
+        <p14:creationId xmlns:p14="http://schemas.microsoft.com/office/powerpoint/2010/main" val="51861682"/>
       </p:ext>
     </p:extLst>
   </p:cSld>
 </p:sld>
 </file>
 
-<file path=ppt/slides/slide12.xml><?xml version="1.0" encoding="utf-8"?>
+<file path=ppt/slides/slide14.xml><?xml version="1.0" encoding="utf-8"?>
 <p:sld xmlns:p="http://schemas.openxmlformats.org/presentationml/2006/main">
   <p:cSld>
     <p:bg>
@@ -3117,7 +4030,7 @@
           <p:cNvPr id="10" name="">
             <a:extLst xmlns:a="http://schemas.openxmlformats.org/drawingml/2006/main">
               <a:ext uri="{FF2B5EF4-FFF2-40B4-BE49-F238E27FC236}">
-                <a16:creationId xmlns:a16="http://schemas.microsoft.com/office/drawing/2014/main" id="{7926E376-73BA-4362-9E5A-7F47BA9ADB43}"/>
+                <a16:creationId xmlns:a16="http://schemas.microsoft.com/office/drawing/2014/main" id="{7679A28D-58E0-4822-AAB2-5FEB74525B46}"/>
               </a:ext>
             </a:extLst>
           </p:cNvPr>
@@ -3174,7 +4087,7 @@
           <p:cNvPr id="2" name="">
             <a:extLst xmlns:a="http://schemas.openxmlformats.org/drawingml/2006/main">
               <a:ext uri="{FF2B5EF4-FFF2-40B4-BE49-F238E27FC236}">
-                <a16:creationId xmlns:a16="http://schemas.microsoft.com/office/drawing/2014/main" id="{21E0DEC7-38BC-41FD-8A09-33444C1281EC}"/>
+                <a16:creationId xmlns:a16="http://schemas.microsoft.com/office/drawing/2014/main" id="{0024EF52-4BD6-447A-902C-4123D387D791}"/>
               </a:ext>
             </a:extLst>
           </p:cNvPr>
@@ -3231,7 +4144,7 @@
           <p:cNvPr id="3" name="">
             <a:extLst xmlns:a="http://schemas.openxmlformats.org/drawingml/2006/main">
               <a:ext uri="{FF2B5EF4-FFF2-40B4-BE49-F238E27FC236}">
-                <a16:creationId xmlns:a16="http://schemas.microsoft.com/office/drawing/2014/main" id="{4B9BDDD8-135E-4631-A302-D749B0C95499}"/>
+                <a16:creationId xmlns:a16="http://schemas.microsoft.com/office/drawing/2014/main" id="{9D00C9CC-5582-4977-A6CD-2AAC7DB3E469}"/>
               </a:ext>
             </a:extLst>
           </p:cNvPr>
@@ -3288,7 +4201,7 @@
           <p:cNvPr id="4" name="">
             <a:extLst xmlns:a="http://schemas.openxmlformats.org/drawingml/2006/main">
               <a:ext uri="{FF2B5EF4-FFF2-40B4-BE49-F238E27FC236}">
-                <a16:creationId xmlns:a16="http://schemas.microsoft.com/office/drawing/2014/main" id="{0CEBE0F2-84FD-4E3A-B5D5-0169B430D760}"/>
+                <a16:creationId xmlns:a16="http://schemas.microsoft.com/office/drawing/2014/main" id="{88123B61-90AF-473E-AE5C-037612AD16DF}"/>
               </a:ext>
             </a:extLst>
           </p:cNvPr>
@@ -3345,7 +4258,7 @@
           <p:cNvPr id="5" name="">
             <a:extLst xmlns:a="http://schemas.openxmlformats.org/drawingml/2006/main">
               <a:ext uri="{FF2B5EF4-FFF2-40B4-BE49-F238E27FC236}">
-                <a16:creationId xmlns:a16="http://schemas.microsoft.com/office/drawing/2014/main" id="{0528B248-0F1F-44E8-9BC7-5FA79B58D5AF}"/>
+                <a16:creationId xmlns:a16="http://schemas.microsoft.com/office/drawing/2014/main" id="{B5D8DC3C-37DA-4DBF-AEA6-E716F4148C9E}"/>
               </a:ext>
             </a:extLst>
           </p:cNvPr>
@@ -3402,7 +4315,7 @@
           <p:cNvPr id="6" name="">
             <a:extLst xmlns:a="http://schemas.openxmlformats.org/drawingml/2006/main">
               <a:ext uri="{FF2B5EF4-FFF2-40B4-BE49-F238E27FC236}">
-                <a16:creationId xmlns:a16="http://schemas.microsoft.com/office/drawing/2014/main" id="{9B1900A6-A379-4BB6-AD9D-420ACB3DF088}"/>
+                <a16:creationId xmlns:a16="http://schemas.microsoft.com/office/drawing/2014/main" id="{3CB08CC9-FCD9-473D-AA7A-9E539CD56B36}"/>
               </a:ext>
             </a:extLst>
           </p:cNvPr>
@@ -3459,7 +4372,7 @@
           <p:cNvPr id="7" name="">
             <a:extLst xmlns:a="http://schemas.openxmlformats.org/drawingml/2006/main">
               <a:ext uri="{FF2B5EF4-FFF2-40B4-BE49-F238E27FC236}">
-                <a16:creationId xmlns:a16="http://schemas.microsoft.com/office/drawing/2014/main" id="{92B3FF22-C07F-44F8-8F71-FDD12CDE3DBE}"/>
+                <a16:creationId xmlns:a16="http://schemas.microsoft.com/office/drawing/2014/main" id="{4B4FAECE-32BD-4BDF-AA1E-D50C31D495EB}"/>
               </a:ext>
             </a:extLst>
           </p:cNvPr>
@@ -3516,7 +4429,7 @@
           <p:cNvPr id="8" name="">
             <a:extLst xmlns:a="http://schemas.openxmlformats.org/drawingml/2006/main">
               <a:ext uri="{FF2B5EF4-FFF2-40B4-BE49-F238E27FC236}">
-                <a16:creationId xmlns:a16="http://schemas.microsoft.com/office/drawing/2014/main" id="{EFA5F2F3-35CB-41C0-96CE-5B03FA839B42}"/>
+                <a16:creationId xmlns:a16="http://schemas.microsoft.com/office/drawing/2014/main" id="{6E734038-9C87-4403-9ABF-0E77BC4E379E}"/>
               </a:ext>
             </a:extLst>
           </p:cNvPr>
@@ -3573,7 +4486,7 @@
           <p:cNvPr id="9" name="">
             <a:extLst xmlns:a="http://schemas.openxmlformats.org/drawingml/2006/main">
               <a:ext uri="{FF2B5EF4-FFF2-40B4-BE49-F238E27FC236}">
-                <a16:creationId xmlns:a16="http://schemas.microsoft.com/office/drawing/2014/main" id="{850F4CAB-858D-4228-AAAF-35D4286BCFB3}"/>
+                <a16:creationId xmlns:a16="http://schemas.microsoft.com/office/drawing/2014/main" id="{4D719E78-5919-4C0C-A615-AF4F4AD7673B}"/>
               </a:ext>
             </a:extLst>
           </p:cNvPr>
@@ -3628,7 +4541,7 @@
     </p:spTree>
     <p:extLst>
       <p:ext uri="{BB962C8B-B14F-4D97-AF65-F5344CB8AC3E}">
-        <p14:creationId xmlns:p14="http://schemas.microsoft.com/office/powerpoint/2010/main" val="1207436684"/>
+        <p14:creationId xmlns:p14="http://schemas.microsoft.com/office/powerpoint/2010/main" val="566851974"/>
       </p:ext>
     </p:extLst>
   </p:cSld>
@@ -3659,7 +4572,7 @@
           <p:cNvPr id="20" name="">
             <a:extLst xmlns:a="http://schemas.openxmlformats.org/drawingml/2006/main">
               <a:ext uri="{FF2B5EF4-FFF2-40B4-BE49-F238E27FC236}">
-                <a16:creationId xmlns:a16="http://schemas.microsoft.com/office/drawing/2014/main" id="{68F6D90F-E5C5-4672-B01B-CD8A252F0D1A}"/>
+                <a16:creationId xmlns:a16="http://schemas.microsoft.com/office/drawing/2014/main" id="{59436524-71C7-4240-99F4-146BCFDDA41B}"/>
               </a:ext>
             </a:extLst>
           </p:cNvPr>
@@ -3716,7 +4629,7 @@
           <p:cNvPr id="2" name="">
             <a:extLst xmlns:a="http://schemas.openxmlformats.org/drawingml/2006/main">
               <a:ext uri="{FF2B5EF4-FFF2-40B4-BE49-F238E27FC236}">
-                <a16:creationId xmlns:a16="http://schemas.microsoft.com/office/drawing/2014/main" id="{556B0BCC-3ABB-4620-B546-96F73BE2B369}"/>
+                <a16:creationId xmlns:a16="http://schemas.microsoft.com/office/drawing/2014/main" id="{44775D21-0517-4557-98FB-10949333A095}"/>
               </a:ext>
             </a:extLst>
           </p:cNvPr>
@@ -3773,7 +4686,7 @@
           <p:cNvPr id="3" name="">
             <a:extLst xmlns:a="http://schemas.openxmlformats.org/drawingml/2006/main">
               <a:ext uri="{FF2B5EF4-FFF2-40B4-BE49-F238E27FC236}">
-                <a16:creationId xmlns:a16="http://schemas.microsoft.com/office/drawing/2014/main" id="{B3A6B7B5-FF3E-4C67-8259-C1DEFBB207F3}"/>
+                <a16:creationId xmlns:a16="http://schemas.microsoft.com/office/drawing/2014/main" id="{81D2609F-826F-4A53-B15F-37A9C46BFF01}"/>
               </a:ext>
             </a:extLst>
           </p:cNvPr>
@@ -3830,7 +4743,7 @@
           <p:cNvPr id="4" name="">
             <a:extLst xmlns:a="http://schemas.openxmlformats.org/drawingml/2006/main">
               <a:ext uri="{FF2B5EF4-FFF2-40B4-BE49-F238E27FC236}">
-                <a16:creationId xmlns:a16="http://schemas.microsoft.com/office/drawing/2014/main" id="{3C8EF264-EE7F-4366-8A39-A03301E8F72A}"/>
+                <a16:creationId xmlns:a16="http://schemas.microsoft.com/office/drawing/2014/main" id="{34EBC96E-7E14-47C3-AC35-7071210139E0}"/>
               </a:ext>
             </a:extLst>
           </p:cNvPr>
@@ -3887,7 +4800,7 @@
           <p:cNvPr id="5" name="">
             <a:extLst xmlns:a="http://schemas.openxmlformats.org/drawingml/2006/main">
               <a:ext uri="{FF2B5EF4-FFF2-40B4-BE49-F238E27FC236}">
-                <a16:creationId xmlns:a16="http://schemas.microsoft.com/office/drawing/2014/main" id="{24CA98BA-323F-41EA-A36F-6D7E59729DF5}"/>
+                <a16:creationId xmlns:a16="http://schemas.microsoft.com/office/drawing/2014/main" id="{19AB4111-435C-4C83-9D6A-7A05D5105742}"/>
               </a:ext>
             </a:extLst>
           </p:cNvPr>
@@ -3944,7 +4857,7 @@
           <p:cNvPr id="6" name="">
             <a:extLst xmlns:a="http://schemas.openxmlformats.org/drawingml/2006/main">
               <a:ext uri="{FF2B5EF4-FFF2-40B4-BE49-F238E27FC236}">
-                <a16:creationId xmlns:a16="http://schemas.microsoft.com/office/drawing/2014/main" id="{657DFCAC-1B90-49B2-ABF1-CE25F36A96FA}"/>
+                <a16:creationId xmlns:a16="http://schemas.microsoft.com/office/drawing/2014/main" id="{56CBEDFB-0753-42E5-AE79-FA9C4C131546}"/>
               </a:ext>
             </a:extLst>
           </p:cNvPr>
@@ -3991,7 +4904,7 @@
                 <a:ea typeface="Arial"/>
                 <a:cs typeface="Arial"/>
               </a:rPr>
-              <a:t>Welcome, community, and objectives</a:t>
+              <a:t>Welcome, icebreaker, and objectives</a:t>
             </a:r>
           </a:p>
         </p:txBody>
@@ -4001,7 +4914,7 @@
           <p:cNvPr id="7" name="">
             <a:extLst xmlns:a="http://schemas.openxmlformats.org/drawingml/2006/main">
               <a:ext uri="{FF2B5EF4-FFF2-40B4-BE49-F238E27FC236}">
-                <a16:creationId xmlns:a16="http://schemas.microsoft.com/office/drawing/2014/main" id="{91D867CA-C1B0-4172-9E52-0DA882CBF990}"/>
+                <a16:creationId xmlns:a16="http://schemas.microsoft.com/office/drawing/2014/main" id="{951FB51C-9B8F-441E-A008-FBFFA28F3655}"/>
               </a:ext>
             </a:extLst>
           </p:cNvPr>
@@ -4058,7 +4971,7 @@
           <p:cNvPr id="8" name="">
             <a:extLst xmlns:a="http://schemas.openxmlformats.org/drawingml/2006/main">
               <a:ext uri="{FF2B5EF4-FFF2-40B4-BE49-F238E27FC236}">
-                <a16:creationId xmlns:a16="http://schemas.microsoft.com/office/drawing/2014/main" id="{2CE09EED-39C9-4305-A395-1569854DB44A}"/>
+                <a16:creationId xmlns:a16="http://schemas.microsoft.com/office/drawing/2014/main" id="{288023D1-592B-4298-B1BF-7A1B5B55FE8E}"/>
               </a:ext>
             </a:extLst>
           </p:cNvPr>
@@ -4115,7 +5028,7 @@
           <p:cNvPr id="9" name="">
             <a:extLst xmlns:a="http://schemas.openxmlformats.org/drawingml/2006/main">
               <a:ext uri="{FF2B5EF4-FFF2-40B4-BE49-F238E27FC236}">
-                <a16:creationId xmlns:a16="http://schemas.microsoft.com/office/drawing/2014/main" id="{51D24EA2-CDC5-4826-960A-4960D7457459}"/>
+                <a16:creationId xmlns:a16="http://schemas.microsoft.com/office/drawing/2014/main" id="{0CC9B1AA-B642-4A8E-A71D-4BA7CF01E364}"/>
               </a:ext>
             </a:extLst>
           </p:cNvPr>
@@ -4172,7 +5085,7 @@
           <p:cNvPr id="10" name="">
             <a:extLst xmlns:a="http://schemas.openxmlformats.org/drawingml/2006/main">
               <a:ext uri="{FF2B5EF4-FFF2-40B4-BE49-F238E27FC236}">
-                <a16:creationId xmlns:a16="http://schemas.microsoft.com/office/drawing/2014/main" id="{87D321AF-FA5B-478A-81A2-2E06A3BFEE00}"/>
+                <a16:creationId xmlns:a16="http://schemas.microsoft.com/office/drawing/2014/main" id="{5CC09683-86B3-4154-A224-153A62FDB360}"/>
               </a:ext>
             </a:extLst>
           </p:cNvPr>
@@ -4229,7 +5142,7 @@
           <p:cNvPr id="11" name="">
             <a:extLst xmlns:a="http://schemas.openxmlformats.org/drawingml/2006/main">
               <a:ext uri="{FF2B5EF4-FFF2-40B4-BE49-F238E27FC236}">
-                <a16:creationId xmlns:a16="http://schemas.microsoft.com/office/drawing/2014/main" id="{5D7A04B5-AF2B-4664-B48F-25EAF8A1B88F}"/>
+                <a16:creationId xmlns:a16="http://schemas.microsoft.com/office/drawing/2014/main" id="{B998EFFE-BAEF-4278-B1F5-9EB6FAC76585}"/>
               </a:ext>
             </a:extLst>
           </p:cNvPr>
@@ -4286,7 +5199,7 @@
           <p:cNvPr id="12" name="">
             <a:extLst xmlns:a="http://schemas.openxmlformats.org/drawingml/2006/main">
               <a:ext uri="{FF2B5EF4-FFF2-40B4-BE49-F238E27FC236}">
-                <a16:creationId xmlns:a16="http://schemas.microsoft.com/office/drawing/2014/main" id="{F966E757-C160-4F23-9DD3-D52D11BE1052}"/>
+                <a16:creationId xmlns:a16="http://schemas.microsoft.com/office/drawing/2014/main" id="{3DEBB7BF-617A-4FF9-B8E6-D73B31BB69C6}"/>
               </a:ext>
             </a:extLst>
           </p:cNvPr>
@@ -4343,7 +5256,7 @@
           <p:cNvPr id="13" name="">
             <a:extLst xmlns:a="http://schemas.openxmlformats.org/drawingml/2006/main">
               <a:ext uri="{FF2B5EF4-FFF2-40B4-BE49-F238E27FC236}">
-                <a16:creationId xmlns:a16="http://schemas.microsoft.com/office/drawing/2014/main" id="{B73C3CC7-C1A3-4A3F-B5C7-14841A82BA78}"/>
+                <a16:creationId xmlns:a16="http://schemas.microsoft.com/office/drawing/2014/main" id="{037E7309-C6BF-43D6-BD5D-7D937E532E38}"/>
               </a:ext>
             </a:extLst>
           </p:cNvPr>
@@ -4400,7 +5313,7 @@
           <p:cNvPr id="14" name="">
             <a:extLst xmlns:a="http://schemas.openxmlformats.org/drawingml/2006/main">
               <a:ext uri="{FF2B5EF4-FFF2-40B4-BE49-F238E27FC236}">
-                <a16:creationId xmlns:a16="http://schemas.microsoft.com/office/drawing/2014/main" id="{7CD36F0F-5997-4188-A734-2B78AFC7365D}"/>
+                <a16:creationId xmlns:a16="http://schemas.microsoft.com/office/drawing/2014/main" id="{E753B930-216B-440C-B597-407DD08E2219}"/>
               </a:ext>
             </a:extLst>
           </p:cNvPr>
@@ -4457,7 +5370,7 @@
           <p:cNvPr id="15" name="">
             <a:extLst xmlns:a="http://schemas.openxmlformats.org/drawingml/2006/main">
               <a:ext uri="{FF2B5EF4-FFF2-40B4-BE49-F238E27FC236}">
-                <a16:creationId xmlns:a16="http://schemas.microsoft.com/office/drawing/2014/main" id="{D9AA4313-7F98-48AE-8936-45641763CE7F}"/>
+                <a16:creationId xmlns:a16="http://schemas.microsoft.com/office/drawing/2014/main" id="{033D2D6D-B979-4D25-B61B-6F12EA5A63F0}"/>
               </a:ext>
             </a:extLst>
           </p:cNvPr>
@@ -4514,7 +5427,7 @@
           <p:cNvPr id="16" name="">
             <a:extLst xmlns:a="http://schemas.openxmlformats.org/drawingml/2006/main">
               <a:ext uri="{FF2B5EF4-FFF2-40B4-BE49-F238E27FC236}">
-                <a16:creationId xmlns:a16="http://schemas.microsoft.com/office/drawing/2014/main" id="{8C807B26-90C1-45AB-BCA9-E274E6148D60}"/>
+                <a16:creationId xmlns:a16="http://schemas.microsoft.com/office/drawing/2014/main" id="{CC14D0C0-D601-454A-A726-5E122A901331}"/>
               </a:ext>
             </a:extLst>
           </p:cNvPr>
@@ -4571,7 +5484,7 @@
           <p:cNvPr id="17" name="">
             <a:extLst xmlns:a="http://schemas.openxmlformats.org/drawingml/2006/main">
               <a:ext uri="{FF2B5EF4-FFF2-40B4-BE49-F238E27FC236}">
-                <a16:creationId xmlns:a16="http://schemas.microsoft.com/office/drawing/2014/main" id="{8B86832C-CA47-47A6-ABFF-A0EF962CF5BF}"/>
+                <a16:creationId xmlns:a16="http://schemas.microsoft.com/office/drawing/2014/main" id="{65D08479-6562-48D9-92BF-70C6CB83F002}"/>
               </a:ext>
             </a:extLst>
           </p:cNvPr>
@@ -4628,7 +5541,7 @@
           <p:cNvPr id="18" name="">
             <a:extLst xmlns:a="http://schemas.openxmlformats.org/drawingml/2006/main">
               <a:ext uri="{FF2B5EF4-FFF2-40B4-BE49-F238E27FC236}">
-                <a16:creationId xmlns:a16="http://schemas.microsoft.com/office/drawing/2014/main" id="{7A7C8CC8-2036-43C3-906D-86147BBB0373}"/>
+                <a16:creationId xmlns:a16="http://schemas.microsoft.com/office/drawing/2014/main" id="{42875DF3-FA98-47BC-B107-FA979EBDA850}"/>
               </a:ext>
             </a:extLst>
           </p:cNvPr>
@@ -4685,7 +5598,7 @@
           <p:cNvPr id="19" name="">
             <a:extLst xmlns:a="http://schemas.openxmlformats.org/drawingml/2006/main">
               <a:ext uri="{FF2B5EF4-FFF2-40B4-BE49-F238E27FC236}">
-                <a16:creationId xmlns:a16="http://schemas.microsoft.com/office/drawing/2014/main" id="{0A627580-F31D-4ECD-BA4C-5044C15A0F1D}"/>
+                <a16:creationId xmlns:a16="http://schemas.microsoft.com/office/drawing/2014/main" id="{24180F9E-77F5-43DA-AB1A-0C4E7F2EB38D}"/>
               </a:ext>
             </a:extLst>
           </p:cNvPr>
@@ -4740,7 +5653,7 @@
     </p:spTree>
     <p:extLst>
       <p:ext uri="{BB962C8B-B14F-4D97-AF65-F5344CB8AC3E}">
-        <p14:creationId xmlns:p14="http://schemas.microsoft.com/office/powerpoint/2010/main" val="866932257"/>
+        <p14:creationId xmlns:p14="http://schemas.microsoft.com/office/powerpoint/2010/main" val="1735339675"/>
       </p:ext>
     </p:extLst>
   </p:cSld>
@@ -4771,7 +5684,7 @@
           <p:cNvPr id="5" name="">
             <a:extLst xmlns:a="http://schemas.openxmlformats.org/drawingml/2006/main">
               <a:ext uri="{FF2B5EF4-FFF2-40B4-BE49-F238E27FC236}">
-                <a16:creationId xmlns:a16="http://schemas.microsoft.com/office/drawing/2014/main" id="{FA3B1CEC-7D61-4B7B-81B2-5624DAA5E95A}"/>
+                <a16:creationId xmlns:a16="http://schemas.microsoft.com/office/drawing/2014/main" id="{BEE31590-E808-4EB3-9E33-7CBF406F65E5}"/>
               </a:ext>
             </a:extLst>
           </p:cNvPr>
@@ -4828,7 +5741,7 @@
           <p:cNvPr id="2" name="">
             <a:extLst xmlns:a="http://schemas.openxmlformats.org/drawingml/2006/main">
               <a:ext uri="{FF2B5EF4-FFF2-40B4-BE49-F238E27FC236}">
-                <a16:creationId xmlns:a16="http://schemas.microsoft.com/office/drawing/2014/main" id="{822D36F7-6A27-4344-8DE2-383D39B5DAEB}"/>
+                <a16:creationId xmlns:a16="http://schemas.microsoft.com/office/drawing/2014/main" id="{7058C2A5-2F20-4236-BB8A-F57E93E1EFB6}"/>
               </a:ext>
             </a:extLst>
           </p:cNvPr>
@@ -4885,7 +5798,7 @@
           <p:cNvPr id="3" name="">
             <a:extLst xmlns:a="http://schemas.openxmlformats.org/drawingml/2006/main">
               <a:ext uri="{FF2B5EF4-FFF2-40B4-BE49-F238E27FC236}">
-                <a16:creationId xmlns:a16="http://schemas.microsoft.com/office/drawing/2014/main" id="{EB801A47-65E8-43DE-B098-00DB3968B586}"/>
+                <a16:creationId xmlns:a16="http://schemas.microsoft.com/office/drawing/2014/main" id="{A86FA1F5-2C4B-438A-BFA3-C34BDFF250A5}"/>
               </a:ext>
             </a:extLst>
           </p:cNvPr>
@@ -5027,7 +5940,7 @@
           <p:cNvPr id="4" name="">
             <a:extLst xmlns:a="http://schemas.openxmlformats.org/drawingml/2006/main">
               <a:ext uri="{FF2B5EF4-FFF2-40B4-BE49-F238E27FC236}">
-                <a16:creationId xmlns:a16="http://schemas.microsoft.com/office/drawing/2014/main" id="{BC8AB976-5194-473E-BD2A-EFA3045F2E83}"/>
+                <a16:creationId xmlns:a16="http://schemas.microsoft.com/office/drawing/2014/main" id="{AC1D3097-49AB-455C-9FC4-68E7F2F395E8}"/>
               </a:ext>
             </a:extLst>
           </p:cNvPr>
@@ -5086,7 +5999,7 @@
     </p:spTree>
     <p:extLst>
       <p:ext uri="{BB962C8B-B14F-4D97-AF65-F5344CB8AC3E}">
-        <p14:creationId xmlns:p14="http://schemas.microsoft.com/office/powerpoint/2010/main" val="1062434001"/>
+        <p14:creationId xmlns:p14="http://schemas.microsoft.com/office/powerpoint/2010/main" val="1975247357"/>
       </p:ext>
     </p:extLst>
   </p:cSld>
@@ -5099,7 +6012,7 @@
     <p:bg>
       <p:bgPr>
         <a:solidFill xmlns:a="http://schemas.openxmlformats.org/drawingml/2006/main">
-          <a:srgbClr val="FFFFFF"/>
+          <a:srgbClr val="EAF2F7"/>
         </a:solidFill>
       </p:bgPr>
     </p:bg>
@@ -5114,10 +6027,10 @@
       </p:grpSpPr>
       <p:sp>
         <p:nvSpPr>
-          <p:cNvPr id="5" name="">
-            <a:extLst xmlns:a="http://schemas.openxmlformats.org/drawingml/2006/main">
-              <a:ext uri="{FF2B5EF4-FFF2-40B4-BE49-F238E27FC236}">
-                <a16:creationId xmlns:a16="http://schemas.microsoft.com/office/drawing/2014/main" id="{27D8B28A-1BDB-4611-9E28-C07C6EC188B7}"/>
+          <p:cNvPr id="13" name="">
+            <a:extLst xmlns:a="http://schemas.openxmlformats.org/drawingml/2006/main">
+              <a:ext uri="{FF2B5EF4-FFF2-40B4-BE49-F238E27FC236}">
+                <a16:creationId xmlns:a16="http://schemas.microsoft.com/office/drawing/2014/main" id="{E028106F-8ACF-4E0A-98FC-0BB95EEC1F28}"/>
               </a:ext>
             </a:extLst>
           </p:cNvPr>
@@ -5164,7 +6077,7 @@
                 <a:ea typeface="Arial"/>
                 <a:cs typeface="Arial"/>
               </a:rPr>
-              <a:t>Learning objectives</a:t>
+              <a:t>Program the Human</a:t>
             </a:r>
           </a:p>
         </p:txBody>
@@ -5174,7 +6087,7 @@
           <p:cNvPr id="2" name="">
             <a:extLst xmlns:a="http://schemas.openxmlformats.org/drawingml/2006/main">
               <a:ext uri="{FF2B5EF4-FFF2-40B4-BE49-F238E27FC236}">
-                <a16:creationId xmlns:a16="http://schemas.microsoft.com/office/drawing/2014/main" id="{447EF833-6BCC-42DB-81F7-4EDBF2BDFA0F}"/>
+                <a16:creationId xmlns:a16="http://schemas.microsoft.com/office/drawing/2014/main" id="{42E2DDAB-4396-4E52-904F-775E14B14384}"/>
               </a:ext>
             </a:extLst>
           </p:cNvPr>
@@ -5221,7 +6134,7 @@
                 <a:ea typeface="Arial"/>
                 <a:cs typeface="Arial"/>
               </a:rPr>
-              <a:t>By 1:00 PM, you should be able to...</a:t>
+              <a:t>One partner is the programmer. One partner is the computer.</a:t>
             </a:r>
           </a:p>
         </p:txBody>
@@ -5231,19 +6144,19 @@
           <p:cNvPr id="3" name="">
             <a:extLst xmlns:a="http://schemas.openxmlformats.org/drawingml/2006/main">
               <a:ext uri="{FF2B5EF4-FFF2-40B4-BE49-F238E27FC236}">
-                <a16:creationId xmlns:a16="http://schemas.microsoft.com/office/drawing/2014/main" id="{FD264FE6-4931-4CEB-89F7-B215DA6C4BA4}"/>
-              </a:ext>
-            </a:extLst>
-          </p:cNvPr>
-          <p:cNvSpPr>
-            <a:spLocks xmlns:a="http://schemas.openxmlformats.org/drawingml/2006/main" noGrp="1"/>
-          </p:cNvSpPr>
-          <p:nvPr/>
-        </p:nvSpPr>
-        <p:spPr>
-          <a:xfrm xmlns:a="http://schemas.openxmlformats.org/drawingml/2006/main">
-            <a:off x="1181100" y="1714500"/>
-            <a:ext cx="9810750" cy="3905250"/>
+                <a16:creationId xmlns:a16="http://schemas.microsoft.com/office/drawing/2014/main" id="{7A7D2BDB-17ED-4CC0-9B22-57329CA6685D}"/>
+              </a:ext>
+            </a:extLst>
+          </p:cNvPr>
+          <p:cNvSpPr>
+            <a:spLocks xmlns:a="http://schemas.openxmlformats.org/drawingml/2006/main" noGrp="1"/>
+          </p:cNvSpPr>
+          <p:nvPr/>
+        </p:nvSpPr>
+        <p:spPr>
+          <a:xfrm xmlns:a="http://schemas.openxmlformats.org/drawingml/2006/main">
+            <a:off x="876300" y="1790700"/>
+            <a:ext cx="666750" cy="552450"/>
           </a:xfrm>
           <a:prstGeom xmlns:a="http://schemas.openxmlformats.org/drawingml/2006/main" prst="rect">
             <a:avLst/>
@@ -5254,17 +6167,70 @@
           </a:ln>
         </p:spPr>
         <p:txBody>
-          <a:bodyPr xmlns:a="http://schemas.openxmlformats.org/drawingml/2006/main">
-            <a:noAutofit/>
-          </a:bodyPr>
-          <a:lstStyle xmlns:a="http://schemas.openxmlformats.org/drawingml/2006/main"/>
-          <a:p xmlns:a="http://schemas.openxmlformats.org/drawingml/2006/main">
-            <a:pPr marL="254000" indent="-127000">
-              <a:spcAft>
-                <a:spcPts val="1400"/>
-              </a:spcAft>
-              <a:buChar char="•"/>
-              <a:defRPr sz="2250">
+          <a:bodyPr xmlns:a="http://schemas.openxmlformats.org/drawingml/2006/main" anchor="ctr">
+            <a:noAutofit/>
+          </a:bodyPr>
+          <a:lstStyle xmlns:a="http://schemas.openxmlformats.org/drawingml/2006/main"/>
+          <a:p xmlns:a="http://schemas.openxmlformats.org/drawingml/2006/main">
+            <a:pPr>
+              <a:defRPr sz="3150" b="1" i="0">
+                <a:solidFill>
+                  <a:srgbClr val="DF6765"/>
+                </a:solidFill>
+                <a:latin typeface="Arial"/>
+                <a:ea typeface="Arial"/>
+                <a:cs typeface="Arial"/>
+              </a:defRPr>
+            </a:pPr>
+            <a:r>
+              <a:rPr sz="3150" b="1" i="0">
+                <a:solidFill>
+                  <a:srgbClr val="DF6765"/>
+                </a:solidFill>
+                <a:latin typeface="Arial"/>
+                <a:ea typeface="Arial"/>
+                <a:cs typeface="Arial"/>
+              </a:rPr>
+              <a:t>1</a:t>
+            </a:r>
+          </a:p>
+        </p:txBody>
+      </p:sp>
+      <p:sp>
+        <p:nvSpPr>
+          <p:cNvPr id="4" name="">
+            <a:extLst xmlns:a="http://schemas.openxmlformats.org/drawingml/2006/main">
+              <a:ext uri="{FF2B5EF4-FFF2-40B4-BE49-F238E27FC236}">
+                <a16:creationId xmlns:a16="http://schemas.microsoft.com/office/drawing/2014/main" id="{18695D0D-2D4A-4826-AEB0-3C14D3605282}"/>
+              </a:ext>
+            </a:extLst>
+          </p:cNvPr>
+          <p:cNvSpPr>
+            <a:spLocks xmlns:a="http://schemas.openxmlformats.org/drawingml/2006/main" noGrp="1"/>
+          </p:cNvSpPr>
+          <p:nvPr/>
+        </p:nvSpPr>
+        <p:spPr>
+          <a:xfrm xmlns:a="http://schemas.openxmlformats.org/drawingml/2006/main">
+            <a:off x="1809750" y="1790700"/>
+            <a:ext cx="8858250" cy="552450"/>
+          </a:xfrm>
+          <a:prstGeom xmlns:a="http://schemas.openxmlformats.org/drawingml/2006/main" prst="rect">
+            <a:avLst/>
+          </a:prstGeom>
+          <a:noFill xmlns:a="http://schemas.openxmlformats.org/drawingml/2006/main"/>
+          <a:ln xmlns:a="http://schemas.openxmlformats.org/drawingml/2006/main" w="0">
+            <a:noFill/>
+          </a:ln>
+        </p:spPr>
+        <p:txBody>
+          <a:bodyPr xmlns:a="http://schemas.openxmlformats.org/drawingml/2006/main" anchor="ctr">
+            <a:noAutofit/>
+          </a:bodyPr>
+          <a:lstStyle xmlns:a="http://schemas.openxmlformats.org/drawingml/2006/main"/>
+          <a:p xmlns:a="http://schemas.openxmlformats.org/drawingml/2006/main">
+            <a:pPr>
+              <a:defRPr sz="2100" b="0" i="0">
                 <a:solidFill>
                   <a:srgbClr val="172433"/>
                 </a:solidFill>
@@ -5274,7 +6240,7 @@
               </a:defRPr>
             </a:pPr>
             <a:r>
-              <a:rPr sz="2250">
+              <a:rPr sz="2100" b="0" i="0">
                 <a:solidFill>
                   <a:srgbClr val="172433"/>
                 </a:solidFill>
@@ -5282,16 +6248,103 @@
                 <a:ea typeface="Arial"/>
                 <a:cs typeface="Arial"/>
               </a:rPr>
-              <a:t>Run a Python file from Visual Studio Code or PowerShell</a:t>
-            </a:r>
-          </a:p>
-          <a:p xmlns:a="http://schemas.openxmlformats.org/drawingml/2006/main">
-            <a:pPr marL="254000" indent="-127000">
-              <a:spcAft>
-                <a:spcPts val="1400"/>
-              </a:spcAft>
-              <a:buChar char="•"/>
-              <a:defRPr sz="2250">
+              <a:t>Choose a simple drawing: a house, face, or robot.</a:t>
+            </a:r>
+          </a:p>
+        </p:txBody>
+      </p:sp>
+      <p:sp>
+        <p:nvSpPr>
+          <p:cNvPr id="5" name="">
+            <a:extLst xmlns:a="http://schemas.openxmlformats.org/drawingml/2006/main">
+              <a:ext uri="{FF2B5EF4-FFF2-40B4-BE49-F238E27FC236}">
+                <a16:creationId xmlns:a16="http://schemas.microsoft.com/office/drawing/2014/main" id="{2FF6ACD2-2011-4CBD-B84B-6CB2D591C849}"/>
+              </a:ext>
+            </a:extLst>
+          </p:cNvPr>
+          <p:cNvSpPr>
+            <a:spLocks xmlns:a="http://schemas.openxmlformats.org/drawingml/2006/main" noGrp="1"/>
+          </p:cNvSpPr>
+          <p:nvPr/>
+        </p:nvSpPr>
+        <p:spPr>
+          <a:xfrm xmlns:a="http://schemas.openxmlformats.org/drawingml/2006/main">
+            <a:off x="876300" y="2647950"/>
+            <a:ext cx="666750" cy="552450"/>
+          </a:xfrm>
+          <a:prstGeom xmlns:a="http://schemas.openxmlformats.org/drawingml/2006/main" prst="rect">
+            <a:avLst/>
+          </a:prstGeom>
+          <a:noFill xmlns:a="http://schemas.openxmlformats.org/drawingml/2006/main"/>
+          <a:ln xmlns:a="http://schemas.openxmlformats.org/drawingml/2006/main" w="0">
+            <a:noFill/>
+          </a:ln>
+        </p:spPr>
+        <p:txBody>
+          <a:bodyPr xmlns:a="http://schemas.openxmlformats.org/drawingml/2006/main" anchor="ctr">
+            <a:noAutofit/>
+          </a:bodyPr>
+          <a:lstStyle xmlns:a="http://schemas.openxmlformats.org/drawingml/2006/main"/>
+          <a:p xmlns:a="http://schemas.openxmlformats.org/drawingml/2006/main">
+            <a:pPr>
+              <a:defRPr sz="3150" b="1" i="0">
+                <a:solidFill>
+                  <a:srgbClr val="5F9F4B"/>
+                </a:solidFill>
+                <a:latin typeface="Arial"/>
+                <a:ea typeface="Arial"/>
+                <a:cs typeface="Arial"/>
+              </a:defRPr>
+            </a:pPr>
+            <a:r>
+              <a:rPr sz="3150" b="1" i="0">
+                <a:solidFill>
+                  <a:srgbClr val="5F9F4B"/>
+                </a:solidFill>
+                <a:latin typeface="Arial"/>
+                <a:ea typeface="Arial"/>
+                <a:cs typeface="Arial"/>
+              </a:rPr>
+              <a:t>2</a:t>
+            </a:r>
+          </a:p>
+        </p:txBody>
+      </p:sp>
+      <p:sp>
+        <p:nvSpPr>
+          <p:cNvPr id="6" name="">
+            <a:extLst xmlns:a="http://schemas.openxmlformats.org/drawingml/2006/main">
+              <a:ext uri="{FF2B5EF4-FFF2-40B4-BE49-F238E27FC236}">
+                <a16:creationId xmlns:a16="http://schemas.microsoft.com/office/drawing/2014/main" id="{91E26746-EEE9-4434-BAFB-E7101F3FF1A8}"/>
+              </a:ext>
+            </a:extLst>
+          </p:cNvPr>
+          <p:cNvSpPr>
+            <a:spLocks xmlns:a="http://schemas.openxmlformats.org/drawingml/2006/main" noGrp="1"/>
+          </p:cNvSpPr>
+          <p:nvPr/>
+        </p:nvSpPr>
+        <p:spPr>
+          <a:xfrm xmlns:a="http://schemas.openxmlformats.org/drawingml/2006/main">
+            <a:off x="1809750" y="2647950"/>
+            <a:ext cx="8858250" cy="552450"/>
+          </a:xfrm>
+          <a:prstGeom xmlns:a="http://schemas.openxmlformats.org/drawingml/2006/main" prst="rect">
+            <a:avLst/>
+          </a:prstGeom>
+          <a:noFill xmlns:a="http://schemas.openxmlformats.org/drawingml/2006/main"/>
+          <a:ln xmlns:a="http://schemas.openxmlformats.org/drawingml/2006/main" w="0">
+            <a:noFill/>
+          </a:ln>
+        </p:spPr>
+        <p:txBody>
+          <a:bodyPr xmlns:a="http://schemas.openxmlformats.org/drawingml/2006/main" anchor="ctr">
+            <a:noAutofit/>
+          </a:bodyPr>
+          <a:lstStyle xmlns:a="http://schemas.openxmlformats.org/drawingml/2006/main"/>
+          <a:p xmlns:a="http://schemas.openxmlformats.org/drawingml/2006/main">
+            <a:pPr>
+              <a:defRPr sz="2100" b="0" i="0">
                 <a:solidFill>
                   <a:srgbClr val="172433"/>
                 </a:solidFill>
@@ -5301,7 +6354,7 @@
               </a:defRPr>
             </a:pPr>
             <a:r>
-              <a:rPr sz="2250">
+              <a:rPr sz="2100" b="0" i="0">
                 <a:solidFill>
                   <a:srgbClr val="172433"/>
                 </a:solidFill>
@@ -5309,16 +6362,103 @@
                 <a:ea typeface="Arial"/>
                 <a:cs typeface="Arial"/>
               </a:rPr>
-              <a:t>Use print() to display text</a:t>
-            </a:r>
-          </a:p>
-          <a:p xmlns:a="http://schemas.openxmlformats.org/drawingml/2006/main">
-            <a:pPr marL="254000" indent="-127000">
-              <a:spcAft>
-                <a:spcPts val="1400"/>
-              </a:spcAft>
-              <a:buChar char="•"/>
-              <a:defRPr sz="2250">
+              <a:t>The programmer gives one exact instruction at a time.</a:t>
+            </a:r>
+          </a:p>
+        </p:txBody>
+      </p:sp>
+      <p:sp>
+        <p:nvSpPr>
+          <p:cNvPr id="7" name="">
+            <a:extLst xmlns:a="http://schemas.openxmlformats.org/drawingml/2006/main">
+              <a:ext uri="{FF2B5EF4-FFF2-40B4-BE49-F238E27FC236}">
+                <a16:creationId xmlns:a16="http://schemas.microsoft.com/office/drawing/2014/main" id="{9D3DCEFB-6E79-4DC6-8F29-981D0E99DA79}"/>
+              </a:ext>
+            </a:extLst>
+          </p:cNvPr>
+          <p:cNvSpPr>
+            <a:spLocks xmlns:a="http://schemas.openxmlformats.org/drawingml/2006/main" noGrp="1"/>
+          </p:cNvSpPr>
+          <p:nvPr/>
+        </p:nvSpPr>
+        <p:spPr>
+          <a:xfrm xmlns:a="http://schemas.openxmlformats.org/drawingml/2006/main">
+            <a:off x="876300" y="3505200"/>
+            <a:ext cx="666750" cy="552450"/>
+          </a:xfrm>
+          <a:prstGeom xmlns:a="http://schemas.openxmlformats.org/drawingml/2006/main" prst="rect">
+            <a:avLst/>
+          </a:prstGeom>
+          <a:noFill xmlns:a="http://schemas.openxmlformats.org/drawingml/2006/main"/>
+          <a:ln xmlns:a="http://schemas.openxmlformats.org/drawingml/2006/main" w="0">
+            <a:noFill/>
+          </a:ln>
+        </p:spPr>
+        <p:txBody>
+          <a:bodyPr xmlns:a="http://schemas.openxmlformats.org/drawingml/2006/main" anchor="ctr">
+            <a:noAutofit/>
+          </a:bodyPr>
+          <a:lstStyle xmlns:a="http://schemas.openxmlformats.org/drawingml/2006/main"/>
+          <a:p xmlns:a="http://schemas.openxmlformats.org/drawingml/2006/main">
+            <a:pPr>
+              <a:defRPr sz="3150" b="1" i="0">
+                <a:solidFill>
+                  <a:srgbClr val="2F6F89"/>
+                </a:solidFill>
+                <a:latin typeface="Arial"/>
+                <a:ea typeface="Arial"/>
+                <a:cs typeface="Arial"/>
+              </a:defRPr>
+            </a:pPr>
+            <a:r>
+              <a:rPr sz="3150" b="1" i="0">
+                <a:solidFill>
+                  <a:srgbClr val="2F6F89"/>
+                </a:solidFill>
+                <a:latin typeface="Arial"/>
+                <a:ea typeface="Arial"/>
+                <a:cs typeface="Arial"/>
+              </a:rPr>
+              <a:t>3</a:t>
+            </a:r>
+          </a:p>
+        </p:txBody>
+      </p:sp>
+      <p:sp>
+        <p:nvSpPr>
+          <p:cNvPr id="8" name="">
+            <a:extLst xmlns:a="http://schemas.openxmlformats.org/drawingml/2006/main">
+              <a:ext uri="{FF2B5EF4-FFF2-40B4-BE49-F238E27FC236}">
+                <a16:creationId xmlns:a16="http://schemas.microsoft.com/office/drawing/2014/main" id="{37974DB1-DF60-45F7-A127-AE558CC5B9BB}"/>
+              </a:ext>
+            </a:extLst>
+          </p:cNvPr>
+          <p:cNvSpPr>
+            <a:spLocks xmlns:a="http://schemas.openxmlformats.org/drawingml/2006/main" noGrp="1"/>
+          </p:cNvSpPr>
+          <p:nvPr/>
+        </p:nvSpPr>
+        <p:spPr>
+          <a:xfrm xmlns:a="http://schemas.openxmlformats.org/drawingml/2006/main">
+            <a:off x="1809750" y="3505200"/>
+            <a:ext cx="8858250" cy="552450"/>
+          </a:xfrm>
+          <a:prstGeom xmlns:a="http://schemas.openxmlformats.org/drawingml/2006/main" prst="rect">
+            <a:avLst/>
+          </a:prstGeom>
+          <a:noFill xmlns:a="http://schemas.openxmlformats.org/drawingml/2006/main"/>
+          <a:ln xmlns:a="http://schemas.openxmlformats.org/drawingml/2006/main" w="0">
+            <a:noFill/>
+          </a:ln>
+        </p:spPr>
+        <p:txBody>
+          <a:bodyPr xmlns:a="http://schemas.openxmlformats.org/drawingml/2006/main" anchor="ctr">
+            <a:noAutofit/>
+          </a:bodyPr>
+          <a:lstStyle xmlns:a="http://schemas.openxmlformats.org/drawingml/2006/main"/>
+          <a:p xmlns:a="http://schemas.openxmlformats.org/drawingml/2006/main">
+            <a:pPr>
+              <a:defRPr sz="2100" b="0" i="0">
                 <a:solidFill>
                   <a:srgbClr val="172433"/>
                 </a:solidFill>
@@ -5328,7 +6468,7 @@
               </a:defRPr>
             </a:pPr>
             <a:r>
-              <a:rPr sz="2250">
+              <a:rPr sz="2100" b="0" i="0">
                 <a:solidFill>
                   <a:srgbClr val="172433"/>
                 </a:solidFill>
@@ -5336,16 +6476,103 @@
                 <a:ea typeface="Arial"/>
                 <a:cs typeface="Arial"/>
               </a:rPr>
-              <a:t>Add comments that explain a program</a:t>
-            </a:r>
-          </a:p>
-          <a:p xmlns:a="http://schemas.openxmlformats.org/drawingml/2006/main">
-            <a:pPr marL="254000" indent="-127000">
-              <a:spcAft>
-                <a:spcPts val="1400"/>
-              </a:spcAft>
-              <a:buChar char="•"/>
-              <a:defRPr sz="2250">
+              <a:t>The computer follows the instructions literally. No guessing.</a:t>
+            </a:r>
+          </a:p>
+        </p:txBody>
+      </p:sp>
+      <p:sp>
+        <p:nvSpPr>
+          <p:cNvPr id="9" name="">
+            <a:extLst xmlns:a="http://schemas.openxmlformats.org/drawingml/2006/main">
+              <a:ext uri="{FF2B5EF4-FFF2-40B4-BE49-F238E27FC236}">
+                <a16:creationId xmlns:a16="http://schemas.microsoft.com/office/drawing/2014/main" id="{1EB7855B-E3C6-438C-A5B3-2BEB6ECF6A7B}"/>
+              </a:ext>
+            </a:extLst>
+          </p:cNvPr>
+          <p:cNvSpPr>
+            <a:spLocks xmlns:a="http://schemas.openxmlformats.org/drawingml/2006/main" noGrp="1"/>
+          </p:cNvSpPr>
+          <p:nvPr/>
+        </p:nvSpPr>
+        <p:spPr>
+          <a:xfrm xmlns:a="http://schemas.openxmlformats.org/drawingml/2006/main">
+            <a:off x="876300" y="4362450"/>
+            <a:ext cx="666750" cy="552450"/>
+          </a:xfrm>
+          <a:prstGeom xmlns:a="http://schemas.openxmlformats.org/drawingml/2006/main" prst="rect">
+            <a:avLst/>
+          </a:prstGeom>
+          <a:noFill xmlns:a="http://schemas.openxmlformats.org/drawingml/2006/main"/>
+          <a:ln xmlns:a="http://schemas.openxmlformats.org/drawingml/2006/main" w="0">
+            <a:noFill/>
+          </a:ln>
+        </p:spPr>
+        <p:txBody>
+          <a:bodyPr xmlns:a="http://schemas.openxmlformats.org/drawingml/2006/main" anchor="ctr">
+            <a:noAutofit/>
+          </a:bodyPr>
+          <a:lstStyle xmlns:a="http://schemas.openxmlformats.org/drawingml/2006/main"/>
+          <a:p xmlns:a="http://schemas.openxmlformats.org/drawingml/2006/main">
+            <a:pPr>
+              <a:defRPr sz="3150" b="1" i="0">
+                <a:solidFill>
+                  <a:srgbClr val="DF6765"/>
+                </a:solidFill>
+                <a:latin typeface="Arial"/>
+                <a:ea typeface="Arial"/>
+                <a:cs typeface="Arial"/>
+              </a:defRPr>
+            </a:pPr>
+            <a:r>
+              <a:rPr sz="3150" b="1" i="0">
+                <a:solidFill>
+                  <a:srgbClr val="DF6765"/>
+                </a:solidFill>
+                <a:latin typeface="Arial"/>
+                <a:ea typeface="Arial"/>
+                <a:cs typeface="Arial"/>
+              </a:rPr>
+              <a:t>4</a:t>
+            </a:r>
+          </a:p>
+        </p:txBody>
+      </p:sp>
+      <p:sp>
+        <p:nvSpPr>
+          <p:cNvPr id="10" name="">
+            <a:extLst xmlns:a="http://schemas.openxmlformats.org/drawingml/2006/main">
+              <a:ext uri="{FF2B5EF4-FFF2-40B4-BE49-F238E27FC236}">
+                <a16:creationId xmlns:a16="http://schemas.microsoft.com/office/drawing/2014/main" id="{15D0A991-F067-4CE2-B744-5047EE36EC2F}"/>
+              </a:ext>
+            </a:extLst>
+          </p:cNvPr>
+          <p:cNvSpPr>
+            <a:spLocks xmlns:a="http://schemas.openxmlformats.org/drawingml/2006/main" noGrp="1"/>
+          </p:cNvSpPr>
+          <p:nvPr/>
+        </p:nvSpPr>
+        <p:spPr>
+          <a:xfrm xmlns:a="http://schemas.openxmlformats.org/drawingml/2006/main">
+            <a:off x="1809750" y="4362450"/>
+            <a:ext cx="8858250" cy="552450"/>
+          </a:xfrm>
+          <a:prstGeom xmlns:a="http://schemas.openxmlformats.org/drawingml/2006/main" prst="rect">
+            <a:avLst/>
+          </a:prstGeom>
+          <a:noFill xmlns:a="http://schemas.openxmlformats.org/drawingml/2006/main"/>
+          <a:ln xmlns:a="http://schemas.openxmlformats.org/drawingml/2006/main" w="0">
+            <a:noFill/>
+          </a:ln>
+        </p:spPr>
+        <p:txBody>
+          <a:bodyPr xmlns:a="http://schemas.openxmlformats.org/drawingml/2006/main" anchor="ctr">
+            <a:noAutofit/>
+          </a:bodyPr>
+          <a:lstStyle xmlns:a="http://schemas.openxmlformats.org/drawingml/2006/main"/>
+          <a:p xmlns:a="http://schemas.openxmlformats.org/drawingml/2006/main">
+            <a:pPr>
+              <a:defRPr sz="2100" b="0" i="0">
                 <a:solidFill>
                   <a:srgbClr val="172433"/>
                 </a:solidFill>
@@ -5355,7 +6582,7 @@
               </a:defRPr>
             </a:pPr>
             <a:r>
-              <a:rPr sz="2250">
+              <a:rPr sz="2100" b="0" i="0">
                 <a:solidFill>
                   <a:srgbClr val="172433"/>
                 </a:solidFill>
@@ -5363,44 +6590,74 @@
                 <a:ea typeface="Arial"/>
                 <a:cs typeface="Arial"/>
               </a:rPr>
-              <a:t>Locate the useful line in a Python error message</a:t>
-            </a:r>
-          </a:p>
-          <a:p xmlns:a="http://schemas.openxmlformats.org/drawingml/2006/main">
-            <a:pPr marL="254000" indent="-127000">
-              <a:spcAft>
-                <a:spcPts val="1400"/>
-              </a:spcAft>
-              <a:buChar char="•"/>
-              <a:defRPr sz="2250">
-                <a:solidFill>
-                  <a:srgbClr val="172433"/>
-                </a:solidFill>
-                <a:latin typeface="Arial"/>
-                <a:ea typeface="Arial"/>
-                <a:cs typeface="Arial"/>
-              </a:defRPr>
-            </a:pPr>
-            <a:r>
-              <a:rPr sz="2250">
-                <a:solidFill>
-                  <a:srgbClr val="172433"/>
-                </a:solidFill>
-                <a:latin typeface="Arial"/>
-                <a:ea typeface="Arial"/>
-                <a:cs typeface="Arial"/>
-              </a:rPr>
-              <a:t>Make and describe one Git commit</a:t>
-            </a:r>
-          </a:p>
-        </p:txBody>
-      </p:sp>
-      <p:sp>
-        <p:nvSpPr>
-          <p:cNvPr id="4" name="">
-            <a:extLst xmlns:a="http://schemas.openxmlformats.org/drawingml/2006/main">
-              <a:ext uri="{FF2B5EF4-FFF2-40B4-BE49-F238E27FC236}">
-                <a16:creationId xmlns:a16="http://schemas.microsoft.com/office/drawing/2014/main" id="{E1B5C4D4-29BB-4875-B8D7-B9FFF5348E3A}"/>
+              <a:t>Switch roles after six minutes.</a:t>
+            </a:r>
+          </a:p>
+        </p:txBody>
+      </p:sp>
+      <p:sp>
+        <p:nvSpPr>
+          <p:cNvPr id="11" name="">
+            <a:extLst xmlns:a="http://schemas.openxmlformats.org/drawingml/2006/main">
+              <a:ext uri="{FF2B5EF4-FFF2-40B4-BE49-F238E27FC236}">
+                <a16:creationId xmlns:a16="http://schemas.microsoft.com/office/drawing/2014/main" id="{DF7FF232-172F-4470-8258-D7ACEF22261B}"/>
+              </a:ext>
+            </a:extLst>
+          </p:cNvPr>
+          <p:cNvSpPr>
+            <a:spLocks xmlns:a="http://schemas.openxmlformats.org/drawingml/2006/main" noGrp="1"/>
+          </p:cNvSpPr>
+          <p:nvPr/>
+        </p:nvSpPr>
+        <p:spPr>
+          <a:xfrm xmlns:a="http://schemas.openxmlformats.org/drawingml/2006/main">
+            <a:off x="1428750" y="5467350"/>
+            <a:ext cx="9334500" cy="590550"/>
+          </a:xfrm>
+          <a:prstGeom xmlns:a="http://schemas.openxmlformats.org/drawingml/2006/main" prst="rect">
+            <a:avLst/>
+          </a:prstGeom>
+          <a:noFill xmlns:a="http://schemas.openxmlformats.org/drawingml/2006/main"/>
+          <a:ln xmlns:a="http://schemas.openxmlformats.org/drawingml/2006/main" w="0">
+            <a:noFill/>
+          </a:ln>
+        </p:spPr>
+        <p:txBody>
+          <a:bodyPr xmlns:a="http://schemas.openxmlformats.org/drawingml/2006/main" anchor="ctr">
+            <a:noAutofit/>
+          </a:bodyPr>
+          <a:lstStyle xmlns:a="http://schemas.openxmlformats.org/drawingml/2006/main"/>
+          <a:p xmlns:a="http://schemas.openxmlformats.org/drawingml/2006/main">
+            <a:pPr>
+              <a:defRPr sz="2175" b="1" i="0">
+                <a:solidFill>
+                  <a:srgbClr val="173654"/>
+                </a:solidFill>
+                <a:latin typeface="Arial"/>
+                <a:ea typeface="Arial"/>
+                <a:cs typeface="Arial"/>
+              </a:defRPr>
+            </a:pPr>
+            <a:r>
+              <a:rPr sz="2175" b="1" i="0">
+                <a:solidFill>
+                  <a:srgbClr val="173654"/>
+                </a:solidFill>
+                <a:latin typeface="Arial"/>
+                <a:ea typeface="Arial"/>
+                <a:cs typeface="Arial"/>
+              </a:rPr>
+              <a:t>What made an instruction easy or hard to follow?</a:t>
+            </a:r>
+          </a:p>
+        </p:txBody>
+      </p:sp>
+      <p:sp>
+        <p:nvSpPr>
+          <p:cNvPr id="12" name="">
+            <a:extLst xmlns:a="http://schemas.openxmlformats.org/drawingml/2006/main">
+              <a:ext uri="{FF2B5EF4-FFF2-40B4-BE49-F238E27FC236}">
+                <a16:creationId xmlns:a16="http://schemas.microsoft.com/office/drawing/2014/main" id="{38D07DC5-4F24-453A-BEC3-ACD16DDE24E0}"/>
               </a:ext>
             </a:extLst>
           </p:cNvPr>
@@ -5447,7 +6704,7 @@
                 <a:ea typeface="Arial"/>
                 <a:cs typeface="Arial"/>
               </a:rPr>
-              <a:t>9:30-9:50 | Welcome and objectives</a:t>
+              <a:t>9:30-9:50 | Icebreaker and debrief</a:t>
             </a:r>
           </a:p>
         </p:txBody>
@@ -5455,7 +6712,7 @@
     </p:spTree>
     <p:extLst>
       <p:ext uri="{BB962C8B-B14F-4D97-AF65-F5344CB8AC3E}">
-        <p14:creationId xmlns:p14="http://schemas.microsoft.com/office/powerpoint/2010/main" val="1241438345"/>
+        <p14:creationId xmlns:p14="http://schemas.microsoft.com/office/powerpoint/2010/main" val="786431863"/>
       </p:ext>
     </p:extLst>
   </p:cSld>
@@ -5486,7 +6743,7 @@
           <p:cNvPr id="13" name="">
             <a:extLst xmlns:a="http://schemas.openxmlformats.org/drawingml/2006/main">
               <a:ext uri="{FF2B5EF4-FFF2-40B4-BE49-F238E27FC236}">
-                <a16:creationId xmlns:a16="http://schemas.microsoft.com/office/drawing/2014/main" id="{693A5A7D-D0B5-4704-B27D-02ABC06EF294}"/>
+                <a16:creationId xmlns:a16="http://schemas.microsoft.com/office/drawing/2014/main" id="{BA10F237-A8F7-4F5D-9F69-8B4C5BC6CF0B}"/>
               </a:ext>
             </a:extLst>
           </p:cNvPr>
@@ -5533,7 +6790,7 @@
                 <a:ea typeface="Arial"/>
                 <a:cs typeface="Arial"/>
               </a:rPr>
-              <a:t>Input, process, output</a:t>
+              <a:t>Git and git clone</a:t>
             </a:r>
           </a:p>
         </p:txBody>
@@ -5543,7 +6800,7 @@
           <p:cNvPr id="2" name="">
             <a:extLst xmlns:a="http://schemas.openxmlformats.org/drawingml/2006/main">
               <a:ext uri="{FF2B5EF4-FFF2-40B4-BE49-F238E27FC236}">
-                <a16:creationId xmlns:a16="http://schemas.microsoft.com/office/drawing/2014/main" id="{54ACCB40-B1FF-4B98-96AA-9024C191287F}"/>
+                <a16:creationId xmlns:a16="http://schemas.microsoft.com/office/drawing/2014/main" id="{F6A4AFB6-2503-4B8F-97BA-D04B8A599D68}"/>
               </a:ext>
             </a:extLst>
           </p:cNvPr>
@@ -5590,7 +6847,7 @@
                 <a:ea typeface="Arial"/>
                 <a:cs typeface="Arial"/>
               </a:rPr>
-              <a:t>A program turns information into a result</a:t>
+              <a:t>Git keeps a history of changes to a project.</a:t>
             </a:r>
           </a:p>
         </p:txBody>
@@ -5600,19 +6857,430 @@
           <p:cNvPr id="3" name="">
             <a:extLst xmlns:a="http://schemas.openxmlformats.org/drawingml/2006/main">
               <a:ext uri="{FF2B5EF4-FFF2-40B4-BE49-F238E27FC236}">
-                <a16:creationId xmlns:a16="http://schemas.microsoft.com/office/drawing/2014/main" id="{70E42812-B4BE-4A9B-83A2-9F77CC1017DA}"/>
-              </a:ext>
-            </a:extLst>
-          </p:cNvPr>
-          <p:cNvSpPr>
-            <a:spLocks xmlns:a="http://schemas.openxmlformats.org/drawingml/2006/main" noGrp="1"/>
-          </p:cNvSpPr>
-          <p:nvPr/>
-        </p:nvSpPr>
-        <p:spPr>
-          <a:xfrm xmlns:a="http://schemas.openxmlformats.org/drawingml/2006/main">
-            <a:off x="838200" y="2076450"/>
-            <a:ext cx="3162300" cy="666750"/>
+                <a16:creationId xmlns:a16="http://schemas.microsoft.com/office/drawing/2014/main" id="{FED34926-6E7E-4B6C-BC1F-15AC80FD963D}"/>
+              </a:ext>
+            </a:extLst>
+          </p:cNvPr>
+          <p:cNvSpPr>
+            <a:spLocks xmlns:a="http://schemas.openxmlformats.org/drawingml/2006/main" noGrp="1"/>
+          </p:cNvSpPr>
+          <p:nvPr/>
+        </p:nvSpPr>
+        <p:spPr>
+          <a:xfrm xmlns:a="http://schemas.openxmlformats.org/drawingml/2006/main">
+            <a:off x="1066800" y="2000250"/>
+            <a:ext cx="2571750" cy="723900"/>
+          </a:xfrm>
+          <a:prstGeom xmlns:a="http://schemas.openxmlformats.org/drawingml/2006/main" prst="roundRect">
+            <a:avLst>
+              <a:gd name="adj" fmla="val 10526"/>
+            </a:avLst>
+          </a:prstGeom>
+          <a:solidFill xmlns:a="http://schemas.openxmlformats.org/drawingml/2006/main">
+            <a:srgbClr val="EDF5E9"/>
+          </a:solidFill>
+          <a:ln xmlns:a="http://schemas.openxmlformats.org/drawingml/2006/main" w="0">
+            <a:noFill/>
+          </a:ln>
+        </p:spPr>
+        <p:txBody>
+          <a:bodyPr xmlns:a="http://schemas.openxmlformats.org/drawingml/2006/main" anchor="ctr">
+            <a:noAutofit/>
+          </a:bodyPr>
+          <a:lstStyle xmlns:a="http://schemas.openxmlformats.org/drawingml/2006/main"/>
+          <a:p xmlns:a="http://schemas.openxmlformats.org/drawingml/2006/main">
+            <a:pPr>
+              <a:defRPr sz="2550" b="1" i="0">
+                <a:solidFill>
+                  <a:srgbClr val="173654"/>
+                </a:solidFill>
+                <a:latin typeface="Arial"/>
+                <a:ea typeface="Arial"/>
+                <a:cs typeface="Arial"/>
+              </a:defRPr>
+            </a:pPr>
+            <a:r>
+              <a:rPr sz="2550" b="1" i="0">
+                <a:solidFill>
+                  <a:srgbClr val="173654"/>
+                </a:solidFill>
+                <a:latin typeface="Arial"/>
+                <a:ea typeface="Arial"/>
+                <a:cs typeface="Arial"/>
+              </a:rPr>
+              <a:t>GitHub</a:t>
+            </a:r>
+          </a:p>
+        </p:txBody>
+      </p:sp>
+      <p:sp>
+        <p:nvSpPr>
+          <p:cNvPr id="4" name="">
+            <a:extLst xmlns:a="http://schemas.openxmlformats.org/drawingml/2006/main">
+              <a:ext uri="{FF2B5EF4-FFF2-40B4-BE49-F238E27FC236}">
+                <a16:creationId xmlns:a16="http://schemas.microsoft.com/office/drawing/2014/main" id="{23170332-742B-40BD-9504-DC4F9B317225}"/>
+              </a:ext>
+            </a:extLst>
+          </p:cNvPr>
+          <p:cNvSpPr>
+            <a:spLocks xmlns:a="http://schemas.openxmlformats.org/drawingml/2006/main" noGrp="1"/>
+          </p:cNvSpPr>
+          <p:nvPr/>
+        </p:nvSpPr>
+        <p:spPr>
+          <a:xfrm xmlns:a="http://schemas.openxmlformats.org/drawingml/2006/main">
+            <a:off x="1066800" y="2781300"/>
+            <a:ext cx="2571750" cy="419100"/>
+          </a:xfrm>
+          <a:prstGeom xmlns:a="http://schemas.openxmlformats.org/drawingml/2006/main" prst="rect">
+            <a:avLst/>
+          </a:prstGeom>
+          <a:noFill xmlns:a="http://schemas.openxmlformats.org/drawingml/2006/main"/>
+          <a:ln xmlns:a="http://schemas.openxmlformats.org/drawingml/2006/main" w="0">
+            <a:noFill/>
+          </a:ln>
+        </p:spPr>
+        <p:txBody>
+          <a:bodyPr xmlns:a="http://schemas.openxmlformats.org/drawingml/2006/main" anchor="ctr">
+            <a:noAutofit/>
+          </a:bodyPr>
+          <a:lstStyle xmlns:a="http://schemas.openxmlformats.org/drawingml/2006/main"/>
+          <a:p xmlns:a="http://schemas.openxmlformats.org/drawingml/2006/main">
+            <a:pPr>
+              <a:defRPr sz="1575" b="0" i="0">
+                <a:solidFill>
+                  <a:srgbClr val="5D6B78"/>
+                </a:solidFill>
+                <a:latin typeface="Arial"/>
+                <a:ea typeface="Arial"/>
+                <a:cs typeface="Arial"/>
+              </a:defRPr>
+            </a:pPr>
+            <a:r>
+              <a:rPr sz="1575" b="0" i="0">
+                <a:solidFill>
+                  <a:srgbClr val="5D6B78"/>
+                </a:solidFill>
+                <a:latin typeface="Arial"/>
+                <a:ea typeface="Arial"/>
+                <a:cs typeface="Arial"/>
+              </a:rPr>
+              <a:t>class repository online</a:t>
+            </a:r>
+          </a:p>
+        </p:txBody>
+      </p:sp>
+      <p:sp>
+        <p:nvSpPr>
+          <p:cNvPr id="5" name="">
+            <a:extLst xmlns:a="http://schemas.openxmlformats.org/drawingml/2006/main">
+              <a:ext uri="{FF2B5EF4-FFF2-40B4-BE49-F238E27FC236}">
+                <a16:creationId xmlns:a16="http://schemas.microsoft.com/office/drawing/2014/main" id="{560E0DCE-7A93-43E6-B510-4C132420FEE1}"/>
+              </a:ext>
+            </a:extLst>
+          </p:cNvPr>
+          <p:cNvSpPr>
+            <a:spLocks xmlns:a="http://schemas.openxmlformats.org/drawingml/2006/main" noGrp="1"/>
+          </p:cNvSpPr>
+          <p:nvPr/>
+        </p:nvSpPr>
+        <p:spPr>
+          <a:xfrm xmlns:a="http://schemas.openxmlformats.org/drawingml/2006/main">
+            <a:off x="4514850" y="2133600"/>
+            <a:ext cx="3143250" cy="647700"/>
+          </a:xfrm>
+          <a:prstGeom xmlns:a="http://schemas.openxmlformats.org/drawingml/2006/main" prst="roundRect">
+            <a:avLst>
+              <a:gd name="adj" fmla="val 11765"/>
+            </a:avLst>
+          </a:prstGeom>
+          <a:solidFill xmlns:a="http://schemas.openxmlformats.org/drawingml/2006/main">
+            <a:srgbClr val="2F6F89"/>
+          </a:solidFill>
+          <a:ln xmlns:a="http://schemas.openxmlformats.org/drawingml/2006/main" w="0">
+            <a:noFill/>
+          </a:ln>
+        </p:spPr>
+        <p:txBody>
+          <a:bodyPr xmlns:a="http://schemas.openxmlformats.org/drawingml/2006/main" anchor="ctr">
+            <a:noAutofit/>
+          </a:bodyPr>
+          <a:lstStyle xmlns:a="http://schemas.openxmlformats.org/drawingml/2006/main"/>
+          <a:p xmlns:a="http://schemas.openxmlformats.org/drawingml/2006/main">
+            <a:pPr>
+              <a:defRPr sz="2250" b="1" i="0">
+                <a:solidFill>
+                  <a:srgbClr val="FFFFFF"/>
+                </a:solidFill>
+                <a:latin typeface="Consolas"/>
+                <a:ea typeface="Consolas"/>
+                <a:cs typeface="Consolas"/>
+              </a:defRPr>
+            </a:pPr>
+            <a:r>
+              <a:rPr sz="2250" b="1" i="0">
+                <a:solidFill>
+                  <a:srgbClr val="FFFFFF"/>
+                </a:solidFill>
+                <a:latin typeface="Consolas"/>
+                <a:ea typeface="Consolas"/>
+                <a:cs typeface="Consolas"/>
+              </a:rPr>
+              <a:t>git clone</a:t>
+            </a:r>
+          </a:p>
+        </p:txBody>
+      </p:sp>
+      <p:sp>
+        <p:nvSpPr>
+          <p:cNvPr id="6" name="">
+            <a:extLst xmlns:a="http://schemas.openxmlformats.org/drawingml/2006/main">
+              <a:ext uri="{FF2B5EF4-FFF2-40B4-BE49-F238E27FC236}">
+                <a16:creationId xmlns:a16="http://schemas.microsoft.com/office/drawing/2014/main" id="{9798A8E0-6B5F-467F-BE40-A001C60F3E10}"/>
+              </a:ext>
+            </a:extLst>
+          </p:cNvPr>
+          <p:cNvSpPr>
+            <a:spLocks xmlns:a="http://schemas.openxmlformats.org/drawingml/2006/main" noGrp="1"/>
+          </p:cNvSpPr>
+          <p:nvPr/>
+        </p:nvSpPr>
+        <p:spPr>
+          <a:xfrm xmlns:a="http://schemas.openxmlformats.org/drawingml/2006/main">
+            <a:off x="4514850" y="2838450"/>
+            <a:ext cx="3143250" cy="400050"/>
+          </a:xfrm>
+          <a:prstGeom xmlns:a="http://schemas.openxmlformats.org/drawingml/2006/main" prst="rect">
+            <a:avLst/>
+          </a:prstGeom>
+          <a:noFill xmlns:a="http://schemas.openxmlformats.org/drawingml/2006/main"/>
+          <a:ln xmlns:a="http://schemas.openxmlformats.org/drawingml/2006/main" w="0">
+            <a:noFill/>
+          </a:ln>
+        </p:spPr>
+        <p:txBody>
+          <a:bodyPr xmlns:a="http://schemas.openxmlformats.org/drawingml/2006/main" anchor="ctr">
+            <a:noAutofit/>
+          </a:bodyPr>
+          <a:lstStyle xmlns:a="http://schemas.openxmlformats.org/drawingml/2006/main"/>
+          <a:p xmlns:a="http://schemas.openxmlformats.org/drawingml/2006/main">
+            <a:pPr>
+              <a:defRPr sz="1575" b="0" i="0">
+                <a:solidFill>
+                  <a:srgbClr val="5D6B78"/>
+                </a:solidFill>
+                <a:latin typeface="Arial"/>
+                <a:ea typeface="Arial"/>
+                <a:cs typeface="Arial"/>
+              </a:defRPr>
+            </a:pPr>
+            <a:r>
+              <a:rPr sz="1575" b="0" i="0">
+                <a:solidFill>
+                  <a:srgbClr val="5D6B78"/>
+                </a:solidFill>
+                <a:latin typeface="Arial"/>
+                <a:ea typeface="Arial"/>
+                <a:cs typeface="Arial"/>
+              </a:rPr>
+              <a:t>copies the repository</a:t>
+            </a:r>
+          </a:p>
+        </p:txBody>
+      </p:sp>
+      <p:sp>
+        <p:nvSpPr>
+          <p:cNvPr id="7" name="">
+            <a:extLst xmlns:a="http://schemas.openxmlformats.org/drawingml/2006/main">
+              <a:ext uri="{FF2B5EF4-FFF2-40B4-BE49-F238E27FC236}">
+                <a16:creationId xmlns:a16="http://schemas.microsoft.com/office/drawing/2014/main" id="{86D85F1D-FADC-4C8A-B453-F181799FE4F9}"/>
+              </a:ext>
+            </a:extLst>
+          </p:cNvPr>
+          <p:cNvSpPr>
+            <a:spLocks xmlns:a="http://schemas.openxmlformats.org/drawingml/2006/main" noGrp="1"/>
+          </p:cNvSpPr>
+          <p:nvPr/>
+        </p:nvSpPr>
+        <p:spPr>
+          <a:xfrm xmlns:a="http://schemas.openxmlformats.org/drawingml/2006/main">
+            <a:off x="8534400" y="2000250"/>
+            <a:ext cx="2571750" cy="723900"/>
+          </a:xfrm>
+          <a:prstGeom xmlns:a="http://schemas.openxmlformats.org/drawingml/2006/main" prst="roundRect">
+            <a:avLst>
+              <a:gd name="adj" fmla="val 10526"/>
+            </a:avLst>
+          </a:prstGeom>
+          <a:solidFill xmlns:a="http://schemas.openxmlformats.org/drawingml/2006/main">
+            <a:srgbClr val="EAF2F7"/>
+          </a:solidFill>
+          <a:ln xmlns:a="http://schemas.openxmlformats.org/drawingml/2006/main" w="0">
+            <a:noFill/>
+          </a:ln>
+        </p:spPr>
+        <p:txBody>
+          <a:bodyPr xmlns:a="http://schemas.openxmlformats.org/drawingml/2006/main" anchor="ctr">
+            <a:noAutofit/>
+          </a:bodyPr>
+          <a:lstStyle xmlns:a="http://schemas.openxmlformats.org/drawingml/2006/main"/>
+          <a:p xmlns:a="http://schemas.openxmlformats.org/drawingml/2006/main">
+            <a:pPr>
+              <a:defRPr sz="2550" b="1" i="0">
+                <a:solidFill>
+                  <a:srgbClr val="173654"/>
+                </a:solidFill>
+                <a:latin typeface="Arial"/>
+                <a:ea typeface="Arial"/>
+                <a:cs typeface="Arial"/>
+              </a:defRPr>
+            </a:pPr>
+            <a:r>
+              <a:rPr sz="2550" b="1" i="0">
+                <a:solidFill>
+                  <a:srgbClr val="173654"/>
+                </a:solidFill>
+                <a:latin typeface="Arial"/>
+                <a:ea typeface="Arial"/>
+                <a:cs typeface="Arial"/>
+              </a:rPr>
+              <a:t>Your computer</a:t>
+            </a:r>
+          </a:p>
+        </p:txBody>
+      </p:sp>
+      <p:sp>
+        <p:nvSpPr>
+          <p:cNvPr id="8" name="">
+            <a:extLst xmlns:a="http://schemas.openxmlformats.org/drawingml/2006/main">
+              <a:ext uri="{FF2B5EF4-FFF2-40B4-BE49-F238E27FC236}">
+                <a16:creationId xmlns:a16="http://schemas.microsoft.com/office/drawing/2014/main" id="{21F2214A-DE10-4B0F-9D30-72177D60CF0B}"/>
+              </a:ext>
+            </a:extLst>
+          </p:cNvPr>
+          <p:cNvSpPr>
+            <a:spLocks xmlns:a="http://schemas.openxmlformats.org/drawingml/2006/main" noGrp="1"/>
+          </p:cNvSpPr>
+          <p:nvPr/>
+        </p:nvSpPr>
+        <p:spPr>
+          <a:xfrm xmlns:a="http://schemas.openxmlformats.org/drawingml/2006/main">
+            <a:off x="8534400" y="2781300"/>
+            <a:ext cx="2571750" cy="419100"/>
+          </a:xfrm>
+          <a:prstGeom xmlns:a="http://schemas.openxmlformats.org/drawingml/2006/main" prst="rect">
+            <a:avLst/>
+          </a:prstGeom>
+          <a:noFill xmlns:a="http://schemas.openxmlformats.org/drawingml/2006/main"/>
+          <a:ln xmlns:a="http://schemas.openxmlformats.org/drawingml/2006/main" w="0">
+            <a:noFill/>
+          </a:ln>
+        </p:spPr>
+        <p:txBody>
+          <a:bodyPr xmlns:a="http://schemas.openxmlformats.org/drawingml/2006/main" anchor="ctr">
+            <a:noAutofit/>
+          </a:bodyPr>
+          <a:lstStyle xmlns:a="http://schemas.openxmlformats.org/drawingml/2006/main"/>
+          <a:p xmlns:a="http://schemas.openxmlformats.org/drawingml/2006/main">
+            <a:pPr>
+              <a:defRPr sz="1575" b="0" i="0">
+                <a:solidFill>
+                  <a:srgbClr val="5D6B78"/>
+                </a:solidFill>
+                <a:latin typeface="Arial"/>
+                <a:ea typeface="Arial"/>
+                <a:cs typeface="Arial"/>
+              </a:defRPr>
+            </a:pPr>
+            <a:r>
+              <a:rPr sz="1575" b="0" i="0">
+                <a:solidFill>
+                  <a:srgbClr val="5D6B78"/>
+                </a:solidFill>
+                <a:latin typeface="Arial"/>
+                <a:ea typeface="Arial"/>
+                <a:cs typeface="Arial"/>
+              </a:rPr>
+              <a:t>a local working copy</a:t>
+            </a:r>
+          </a:p>
+        </p:txBody>
+      </p:sp>
+      <p:sp>
+        <p:nvSpPr>
+          <p:cNvPr id="9" name="">
+            <a:extLst xmlns:a="http://schemas.openxmlformats.org/drawingml/2006/main">
+              <a:ext uri="{FF2B5EF4-FFF2-40B4-BE49-F238E27FC236}">
+                <a16:creationId xmlns:a16="http://schemas.microsoft.com/office/drawing/2014/main" id="{35E2989C-4AE5-4A55-84E9-54AF5881B108}"/>
+              </a:ext>
+            </a:extLst>
+          </p:cNvPr>
+          <p:cNvSpPr>
+            <a:spLocks xmlns:a="http://schemas.openxmlformats.org/drawingml/2006/main" noGrp="1"/>
+          </p:cNvSpPr>
+          <p:nvPr/>
+        </p:nvSpPr>
+        <p:spPr>
+          <a:xfrm xmlns:a="http://schemas.openxmlformats.org/drawingml/2006/main">
+            <a:off x="1257300" y="3714750"/>
+            <a:ext cx="9677400" cy="438150"/>
+          </a:xfrm>
+          <a:prstGeom xmlns:a="http://schemas.openxmlformats.org/drawingml/2006/main" prst="rect">
+            <a:avLst/>
+          </a:prstGeom>
+          <a:noFill xmlns:a="http://schemas.openxmlformats.org/drawingml/2006/main"/>
+          <a:ln xmlns:a="http://schemas.openxmlformats.org/drawingml/2006/main" w="0">
+            <a:noFill/>
+          </a:ln>
+        </p:spPr>
+        <p:txBody>
+          <a:bodyPr xmlns:a="http://schemas.openxmlformats.org/drawingml/2006/main" anchor="ctr">
+            <a:noAutofit/>
+          </a:bodyPr>
+          <a:lstStyle xmlns:a="http://schemas.openxmlformats.org/drawingml/2006/main"/>
+          <a:p xmlns:a="http://schemas.openxmlformats.org/drawingml/2006/main">
+            <a:pPr>
+              <a:defRPr sz="1875" b="1" i="0">
+                <a:solidFill>
+                  <a:srgbClr val="5F9F4B"/>
+                </a:solidFill>
+                <a:latin typeface="Arial"/>
+                <a:ea typeface="Arial"/>
+                <a:cs typeface="Arial"/>
+              </a:defRPr>
+            </a:pPr>
+            <a:r>
+              <a:rPr sz="1875" b="1" i="0">
+                <a:solidFill>
+                  <a:srgbClr val="5F9F4B"/>
+                </a:solidFill>
+                <a:latin typeface="Arial"/>
+                <a:ea typeface="Arial"/>
+                <a:cs typeface="Arial"/>
+              </a:rPr>
+              <a:t>git clone copies the online repository into a local folder.</a:t>
+            </a:r>
+          </a:p>
+        </p:txBody>
+      </p:sp>
+      <p:sp>
+        <p:nvSpPr>
+          <p:cNvPr id="10" name="">
+            <a:extLst xmlns:a="http://schemas.openxmlformats.org/drawingml/2006/main">
+              <a:ext uri="{FF2B5EF4-FFF2-40B4-BE49-F238E27FC236}">
+                <a16:creationId xmlns:a16="http://schemas.microsoft.com/office/drawing/2014/main" id="{9FDD6B4A-1D6F-4F2E-96B1-A276B869B695}"/>
+              </a:ext>
+            </a:extLst>
+          </p:cNvPr>
+          <p:cNvSpPr>
+            <a:spLocks xmlns:a="http://schemas.openxmlformats.org/drawingml/2006/main" noGrp="1"/>
+          </p:cNvSpPr>
+          <p:nvPr/>
+        </p:nvSpPr>
+        <p:spPr>
+          <a:xfrm xmlns:a="http://schemas.openxmlformats.org/drawingml/2006/main">
+            <a:off x="1085850" y="4629150"/>
+            <a:ext cx="10020300" cy="666750"/>
           </a:xfrm>
           <a:prstGeom xmlns:a="http://schemas.openxmlformats.org/drawingml/2006/main" prst="roundRect">
             <a:avLst>
@@ -5620,7 +7288,7 @@
             </a:avLst>
           </a:prstGeom>
           <a:solidFill xmlns:a="http://schemas.openxmlformats.org/drawingml/2006/main">
-            <a:srgbClr val="EAF2F7"/>
+            <a:srgbClr val="173654"/>
           </a:solidFill>
           <a:ln xmlns:a="http://schemas.openxmlformats.org/drawingml/2006/main" w="0">
             <a:noFill/>
@@ -5633,47 +7301,47 @@
           <a:lstStyle xmlns:a="http://schemas.openxmlformats.org/drawingml/2006/main"/>
           <a:p xmlns:a="http://schemas.openxmlformats.org/drawingml/2006/main">
             <a:pPr>
-              <a:defRPr sz="2250" b="1" i="0">
-                <a:solidFill>
-                  <a:srgbClr val="2F6F89"/>
-                </a:solidFill>
-                <a:latin typeface="Arial"/>
-                <a:ea typeface="Arial"/>
-                <a:cs typeface="Arial"/>
-              </a:defRPr>
-            </a:pPr>
-            <a:r>
-              <a:rPr sz="2250" b="1" i="0">
-                <a:solidFill>
-                  <a:srgbClr val="2F6F89"/>
-                </a:solidFill>
-                <a:latin typeface="Arial"/>
-                <a:ea typeface="Arial"/>
-                <a:cs typeface="Arial"/>
-              </a:rPr>
-              <a:t>INPUT</a:t>
-            </a:r>
-          </a:p>
-        </p:txBody>
-      </p:sp>
-      <p:sp>
-        <p:nvSpPr>
-          <p:cNvPr id="4" name="">
-            <a:extLst xmlns:a="http://schemas.openxmlformats.org/drawingml/2006/main">
-              <a:ext uri="{FF2B5EF4-FFF2-40B4-BE49-F238E27FC236}">
-                <a16:creationId xmlns:a16="http://schemas.microsoft.com/office/drawing/2014/main" id="{A9B5058A-1218-4144-889A-44D0F9581C02}"/>
-              </a:ext>
-            </a:extLst>
-          </p:cNvPr>
-          <p:cNvSpPr>
-            <a:spLocks xmlns:a="http://schemas.openxmlformats.org/drawingml/2006/main" noGrp="1"/>
-          </p:cNvSpPr>
-          <p:nvPr/>
-        </p:nvSpPr>
-        <p:spPr>
-          <a:xfrm xmlns:a="http://schemas.openxmlformats.org/drawingml/2006/main">
-            <a:off x="1047750" y="3009900"/>
-            <a:ext cx="2743200" cy="857250"/>
+              <a:defRPr sz="1650" b="0" i="0">
+                <a:solidFill>
+                  <a:srgbClr val="FFFFFF"/>
+                </a:solidFill>
+                <a:latin typeface="Consolas"/>
+                <a:ea typeface="Consolas"/>
+                <a:cs typeface="Consolas"/>
+              </a:defRPr>
+            </a:pPr>
+            <a:r>
+              <a:rPr sz="1650" b="0" i="0">
+                <a:solidFill>
+                  <a:srgbClr val="FFFFFF"/>
+                </a:solidFill>
+                <a:latin typeface="Consolas"/>
+                <a:ea typeface="Consolas"/>
+                <a:cs typeface="Consolas"/>
+              </a:rPr>
+              <a:t>git clone https://github.com/lhernandez-sudo/project-syncere-cs-2027.git</a:t>
+            </a:r>
+          </a:p>
+        </p:txBody>
+      </p:sp>
+      <p:sp>
+        <p:nvSpPr>
+          <p:cNvPr id="11" name="">
+            <a:extLst xmlns:a="http://schemas.openxmlformats.org/drawingml/2006/main">
+              <a:ext uri="{FF2B5EF4-FFF2-40B4-BE49-F238E27FC236}">
+                <a16:creationId xmlns:a16="http://schemas.microsoft.com/office/drawing/2014/main" id="{A54C55F8-6DAE-4579-9162-5953E560BA6C}"/>
+              </a:ext>
+            </a:extLst>
+          </p:cNvPr>
+          <p:cNvSpPr>
+            <a:spLocks xmlns:a="http://schemas.openxmlformats.org/drawingml/2006/main" noGrp="1"/>
+          </p:cNvSpPr>
+          <p:nvPr/>
+        </p:nvSpPr>
+        <p:spPr>
+          <a:xfrm xmlns:a="http://schemas.openxmlformats.org/drawingml/2006/main">
+            <a:off x="1524000" y="5543550"/>
+            <a:ext cx="9144000" cy="438150"/>
           </a:xfrm>
           <a:prstGeom xmlns:a="http://schemas.openxmlformats.org/drawingml/2006/main" prst="rect">
             <a:avLst/>
@@ -5690,186 +7358,7 @@
           <a:lstStyle xmlns:a="http://schemas.openxmlformats.org/drawingml/2006/main"/>
           <a:p xmlns:a="http://schemas.openxmlformats.org/drawingml/2006/main">
             <a:pPr>
-              <a:defRPr sz="1800" b="0" i="0">
-                <a:solidFill>
-                  <a:srgbClr val="172433"/>
-                </a:solidFill>
-                <a:latin typeface="Arial"/>
-                <a:ea typeface="Arial"/>
-                <a:cs typeface="Arial"/>
-              </a:defRPr>
-            </a:pPr>
-            <a:r>
-              <a:rPr sz="1800" b="0" i="0">
-                <a:solidFill>
-                  <a:srgbClr val="172433"/>
-                </a:solidFill>
-                <a:latin typeface="Arial"/>
-                <a:ea typeface="Arial"/>
-                <a:cs typeface="Arial"/>
-              </a:rPr>
-              <a:t>What the program receives</a:t>
-            </a:r>
-          </a:p>
-        </p:txBody>
-      </p:sp>
-      <p:sp>
-        <p:nvSpPr>
-          <p:cNvPr id="5" name="">
-            <a:extLst xmlns:a="http://schemas.openxmlformats.org/drawingml/2006/main">
-              <a:ext uri="{FF2B5EF4-FFF2-40B4-BE49-F238E27FC236}">
-                <a16:creationId xmlns:a16="http://schemas.microsoft.com/office/drawing/2014/main" id="{77617213-81C0-48B0-90B0-432ABA36FE89}"/>
-              </a:ext>
-            </a:extLst>
-          </p:cNvPr>
-          <p:cNvSpPr>
-            <a:spLocks xmlns:a="http://schemas.openxmlformats.org/drawingml/2006/main" noGrp="1"/>
-          </p:cNvSpPr>
-          <p:nvPr/>
-        </p:nvSpPr>
-        <p:spPr>
-          <a:xfrm xmlns:a="http://schemas.openxmlformats.org/drawingml/2006/main">
-            <a:off x="4476750" y="2076450"/>
-            <a:ext cx="3162300" cy="666750"/>
-          </a:xfrm>
-          <a:prstGeom xmlns:a="http://schemas.openxmlformats.org/drawingml/2006/main" prst="roundRect">
-            <a:avLst>
-              <a:gd name="adj" fmla="val 11429"/>
-            </a:avLst>
-          </a:prstGeom>
-          <a:solidFill xmlns:a="http://schemas.openxmlformats.org/drawingml/2006/main">
-            <a:srgbClr val="EDF5E9"/>
-          </a:solidFill>
-          <a:ln xmlns:a="http://schemas.openxmlformats.org/drawingml/2006/main" w="0">
-            <a:noFill/>
-          </a:ln>
-        </p:spPr>
-        <p:txBody>
-          <a:bodyPr xmlns:a="http://schemas.openxmlformats.org/drawingml/2006/main" anchor="ctr">
-            <a:noAutofit/>
-          </a:bodyPr>
-          <a:lstStyle xmlns:a="http://schemas.openxmlformats.org/drawingml/2006/main"/>
-          <a:p xmlns:a="http://schemas.openxmlformats.org/drawingml/2006/main">
-            <a:pPr>
-              <a:defRPr sz="2250" b="1" i="0">
-                <a:solidFill>
-                  <a:srgbClr val="5F9F4B"/>
-                </a:solidFill>
-                <a:latin typeface="Arial"/>
-                <a:ea typeface="Arial"/>
-                <a:cs typeface="Arial"/>
-              </a:defRPr>
-            </a:pPr>
-            <a:r>
-              <a:rPr sz="2250" b="1" i="0">
-                <a:solidFill>
-                  <a:srgbClr val="5F9F4B"/>
-                </a:solidFill>
-                <a:latin typeface="Arial"/>
-                <a:ea typeface="Arial"/>
-                <a:cs typeface="Arial"/>
-              </a:rPr>
-              <a:t>PROCESS</a:t>
-            </a:r>
-          </a:p>
-        </p:txBody>
-      </p:sp>
-      <p:sp>
-        <p:nvSpPr>
-          <p:cNvPr id="6" name="">
-            <a:extLst xmlns:a="http://schemas.openxmlformats.org/drawingml/2006/main">
-              <a:ext uri="{FF2B5EF4-FFF2-40B4-BE49-F238E27FC236}">
-                <a16:creationId xmlns:a16="http://schemas.microsoft.com/office/drawing/2014/main" id="{886CBE4B-F38D-4E31-8A85-EF28EEC6AFFA}"/>
-              </a:ext>
-            </a:extLst>
-          </p:cNvPr>
-          <p:cNvSpPr>
-            <a:spLocks xmlns:a="http://schemas.openxmlformats.org/drawingml/2006/main" noGrp="1"/>
-          </p:cNvSpPr>
-          <p:nvPr/>
-        </p:nvSpPr>
-        <p:spPr>
-          <a:xfrm xmlns:a="http://schemas.openxmlformats.org/drawingml/2006/main">
-            <a:off x="4686300" y="3009900"/>
-            <a:ext cx="2743200" cy="857250"/>
-          </a:xfrm>
-          <a:prstGeom xmlns:a="http://schemas.openxmlformats.org/drawingml/2006/main" prst="rect">
-            <a:avLst/>
-          </a:prstGeom>
-          <a:noFill xmlns:a="http://schemas.openxmlformats.org/drawingml/2006/main"/>
-          <a:ln xmlns:a="http://schemas.openxmlformats.org/drawingml/2006/main" w="0">
-            <a:noFill/>
-          </a:ln>
-        </p:spPr>
-        <p:txBody>
-          <a:bodyPr xmlns:a="http://schemas.openxmlformats.org/drawingml/2006/main" anchor="ctr">
-            <a:noAutofit/>
-          </a:bodyPr>
-          <a:lstStyle xmlns:a="http://schemas.openxmlformats.org/drawingml/2006/main"/>
-          <a:p xmlns:a="http://schemas.openxmlformats.org/drawingml/2006/main">
-            <a:pPr>
-              <a:defRPr sz="1800" b="0" i="0">
-                <a:solidFill>
-                  <a:srgbClr val="172433"/>
-                </a:solidFill>
-                <a:latin typeface="Arial"/>
-                <a:ea typeface="Arial"/>
-                <a:cs typeface="Arial"/>
-              </a:defRPr>
-            </a:pPr>
-            <a:r>
-              <a:rPr sz="1800" b="0" i="0">
-                <a:solidFill>
-                  <a:srgbClr val="172433"/>
-                </a:solidFill>
-                <a:latin typeface="Arial"/>
-                <a:ea typeface="Arial"/>
-                <a:cs typeface="Arial"/>
-              </a:rPr>
-              <a:t>The steps the program follows</a:t>
-            </a:r>
-          </a:p>
-        </p:txBody>
-      </p:sp>
-      <p:sp>
-        <p:nvSpPr>
-          <p:cNvPr id="7" name="">
-            <a:extLst xmlns:a="http://schemas.openxmlformats.org/drawingml/2006/main">
-              <a:ext uri="{FF2B5EF4-FFF2-40B4-BE49-F238E27FC236}">
-                <a16:creationId xmlns:a16="http://schemas.microsoft.com/office/drawing/2014/main" id="{4CCCEA6A-5842-41DE-A61C-0469FF75D7A8}"/>
-              </a:ext>
-            </a:extLst>
-          </p:cNvPr>
-          <p:cNvSpPr>
-            <a:spLocks xmlns:a="http://schemas.openxmlformats.org/drawingml/2006/main" noGrp="1"/>
-          </p:cNvSpPr>
-          <p:nvPr/>
-        </p:nvSpPr>
-        <p:spPr>
-          <a:xfrm xmlns:a="http://schemas.openxmlformats.org/drawingml/2006/main">
-            <a:off x="8115300" y="2076450"/>
-            <a:ext cx="3162300" cy="666750"/>
-          </a:xfrm>
-          <a:prstGeom xmlns:a="http://schemas.openxmlformats.org/drawingml/2006/main" prst="roundRect">
-            <a:avLst>
-              <a:gd name="adj" fmla="val 11429"/>
-            </a:avLst>
-          </a:prstGeom>
-          <a:solidFill xmlns:a="http://schemas.openxmlformats.org/drawingml/2006/main">
-            <a:srgbClr val="FBECEC"/>
-          </a:solidFill>
-          <a:ln xmlns:a="http://schemas.openxmlformats.org/drawingml/2006/main" w="0">
-            <a:noFill/>
-          </a:ln>
-        </p:spPr>
-        <p:txBody>
-          <a:bodyPr xmlns:a="http://schemas.openxmlformats.org/drawingml/2006/main" anchor="ctr">
-            <a:noAutofit/>
-          </a:bodyPr>
-          <a:lstStyle xmlns:a="http://schemas.openxmlformats.org/drawingml/2006/main"/>
-          <a:p xmlns:a="http://schemas.openxmlformats.org/drawingml/2006/main">
-            <a:pPr>
-              <a:defRPr sz="2250" b="1" i="0">
+              <a:defRPr sz="1875" b="1" i="0">
                 <a:solidFill>
                   <a:srgbClr val="DF6765"/>
                 </a:solidFill>
@@ -5879,7 +7368,7 @@
               </a:defRPr>
             </a:pPr>
             <a:r>
-              <a:rPr sz="2250" b="1" i="0">
+              <a:rPr sz="1875" b="1" i="0">
                 <a:solidFill>
                   <a:srgbClr val="DF6765"/>
                 </a:solidFill>
@@ -5887,235 +7376,7 @@
                 <a:ea typeface="Arial"/>
                 <a:cs typeface="Arial"/>
               </a:rPr>
-              <a:t>OUTPUT</a:t>
-            </a:r>
-          </a:p>
-        </p:txBody>
-      </p:sp>
-      <p:sp>
-        <p:nvSpPr>
-          <p:cNvPr id="8" name="">
-            <a:extLst xmlns:a="http://schemas.openxmlformats.org/drawingml/2006/main">
-              <a:ext uri="{FF2B5EF4-FFF2-40B4-BE49-F238E27FC236}">
-                <a16:creationId xmlns:a16="http://schemas.microsoft.com/office/drawing/2014/main" id="{B1BC008D-69D7-4ACC-BF86-2CA3DE205FBE}"/>
-              </a:ext>
-            </a:extLst>
-          </p:cNvPr>
-          <p:cNvSpPr>
-            <a:spLocks xmlns:a="http://schemas.openxmlformats.org/drawingml/2006/main" noGrp="1"/>
-          </p:cNvSpPr>
-          <p:nvPr/>
-        </p:nvSpPr>
-        <p:spPr>
-          <a:xfrm xmlns:a="http://schemas.openxmlformats.org/drawingml/2006/main">
-            <a:off x="8324850" y="3009900"/>
-            <a:ext cx="2743200" cy="857250"/>
-          </a:xfrm>
-          <a:prstGeom xmlns:a="http://schemas.openxmlformats.org/drawingml/2006/main" prst="rect">
-            <a:avLst/>
-          </a:prstGeom>
-          <a:noFill xmlns:a="http://schemas.openxmlformats.org/drawingml/2006/main"/>
-          <a:ln xmlns:a="http://schemas.openxmlformats.org/drawingml/2006/main" w="0">
-            <a:noFill/>
-          </a:ln>
-        </p:spPr>
-        <p:txBody>
-          <a:bodyPr xmlns:a="http://schemas.openxmlformats.org/drawingml/2006/main" anchor="ctr">
-            <a:noAutofit/>
-          </a:bodyPr>
-          <a:lstStyle xmlns:a="http://schemas.openxmlformats.org/drawingml/2006/main"/>
-          <a:p xmlns:a="http://schemas.openxmlformats.org/drawingml/2006/main">
-            <a:pPr>
-              <a:defRPr sz="1800" b="0" i="0">
-                <a:solidFill>
-                  <a:srgbClr val="172433"/>
-                </a:solidFill>
-                <a:latin typeface="Arial"/>
-                <a:ea typeface="Arial"/>
-                <a:cs typeface="Arial"/>
-              </a:defRPr>
-            </a:pPr>
-            <a:r>
-              <a:rPr sz="1800" b="0" i="0">
-                <a:solidFill>
-                  <a:srgbClr val="172433"/>
-                </a:solidFill>
-                <a:latin typeface="Arial"/>
-                <a:ea typeface="Arial"/>
-                <a:cs typeface="Arial"/>
-              </a:rPr>
-              <a:t>What the program produces</a:t>
-            </a:r>
-          </a:p>
-        </p:txBody>
-      </p:sp>
-      <p:sp>
-        <p:nvSpPr>
-          <p:cNvPr id="9" name="">
-            <a:extLst xmlns:a="http://schemas.openxmlformats.org/drawingml/2006/main">
-              <a:ext uri="{FF2B5EF4-FFF2-40B4-BE49-F238E27FC236}">
-                <a16:creationId xmlns:a16="http://schemas.microsoft.com/office/drawing/2014/main" id="{A870C2DB-5E11-4C4F-9BD8-754A0414CA54}"/>
-              </a:ext>
-            </a:extLst>
-          </p:cNvPr>
-          <p:cNvSpPr>
-            <a:spLocks xmlns:a="http://schemas.openxmlformats.org/drawingml/2006/main" noGrp="1"/>
-          </p:cNvSpPr>
-          <p:nvPr/>
-        </p:nvSpPr>
-        <p:spPr>
-          <a:xfrm xmlns:a="http://schemas.openxmlformats.org/drawingml/2006/main">
-            <a:off x="1047750" y="4495800"/>
-            <a:ext cx="2724150" cy="438150"/>
-          </a:xfrm>
-          <a:prstGeom xmlns:a="http://schemas.openxmlformats.org/drawingml/2006/main" prst="rect">
-            <a:avLst/>
-          </a:prstGeom>
-          <a:noFill xmlns:a="http://schemas.openxmlformats.org/drawingml/2006/main"/>
-          <a:ln xmlns:a="http://schemas.openxmlformats.org/drawingml/2006/main" w="0">
-            <a:noFill/>
-          </a:ln>
-        </p:spPr>
-        <p:txBody>
-          <a:bodyPr xmlns:a="http://schemas.openxmlformats.org/drawingml/2006/main" anchor="ctr">
-            <a:noAutofit/>
-          </a:bodyPr>
-          <a:lstStyle xmlns:a="http://schemas.openxmlformats.org/drawingml/2006/main"/>
-          <a:p xmlns:a="http://schemas.openxmlformats.org/drawingml/2006/main">
-            <a:pPr>
-              <a:defRPr sz="1875" b="1" i="0">
-                <a:solidFill>
-                  <a:srgbClr val="2F6F89"/>
-                </a:solidFill>
-                <a:latin typeface="Arial"/>
-                <a:ea typeface="Arial"/>
-                <a:cs typeface="Arial"/>
-              </a:defRPr>
-            </a:pPr>
-            <a:r>
-              <a:rPr sz="1875" b="1" i="0">
-                <a:solidFill>
-                  <a:srgbClr val="2F6F89"/>
-                </a:solidFill>
-                <a:latin typeface="Arial"/>
-                <a:ea typeface="Arial"/>
-                <a:cs typeface="Arial"/>
-              </a:rPr>
-              <a:t>Example: your name</a:t>
-            </a:r>
-          </a:p>
-        </p:txBody>
-      </p:sp>
-      <p:sp>
-        <p:nvSpPr>
-          <p:cNvPr id="10" name="">
-            <a:extLst xmlns:a="http://schemas.openxmlformats.org/drawingml/2006/main">
-              <a:ext uri="{FF2B5EF4-FFF2-40B4-BE49-F238E27FC236}">
-                <a16:creationId xmlns:a16="http://schemas.microsoft.com/office/drawing/2014/main" id="{EFD39FA5-456D-4AE6-9E2D-292384C8EC0D}"/>
-              </a:ext>
-            </a:extLst>
-          </p:cNvPr>
-          <p:cNvSpPr>
-            <a:spLocks xmlns:a="http://schemas.openxmlformats.org/drawingml/2006/main" noGrp="1"/>
-          </p:cNvSpPr>
-          <p:nvPr/>
-        </p:nvSpPr>
-        <p:spPr>
-          <a:xfrm xmlns:a="http://schemas.openxmlformats.org/drawingml/2006/main">
-            <a:off x="4705350" y="4495800"/>
-            <a:ext cx="2724150" cy="552450"/>
-          </a:xfrm>
-          <a:prstGeom xmlns:a="http://schemas.openxmlformats.org/drawingml/2006/main" prst="rect">
-            <a:avLst/>
-          </a:prstGeom>
-          <a:noFill xmlns:a="http://schemas.openxmlformats.org/drawingml/2006/main"/>
-          <a:ln xmlns:a="http://schemas.openxmlformats.org/drawingml/2006/main" w="0">
-            <a:noFill/>
-          </a:ln>
-        </p:spPr>
-        <p:txBody>
-          <a:bodyPr xmlns:a="http://schemas.openxmlformats.org/drawingml/2006/main" anchor="ctr">
-            <a:noAutofit/>
-          </a:bodyPr>
-          <a:lstStyle xmlns:a="http://schemas.openxmlformats.org/drawingml/2006/main"/>
-          <a:p xmlns:a="http://schemas.openxmlformats.org/drawingml/2006/main">
-            <a:pPr>
-              <a:defRPr sz="1875" b="1" i="0">
-                <a:solidFill>
-                  <a:srgbClr val="5F9F4B"/>
-                </a:solidFill>
-                <a:latin typeface="Arial"/>
-                <a:ea typeface="Arial"/>
-                <a:cs typeface="Arial"/>
-              </a:defRPr>
-            </a:pPr>
-            <a:r>
-              <a:rPr sz="1875" b="1" i="0">
-                <a:solidFill>
-                  <a:srgbClr val="5F9F4B"/>
-                </a:solidFill>
-                <a:latin typeface="Arial"/>
-                <a:ea typeface="Arial"/>
-                <a:cs typeface="Arial"/>
-              </a:rPr>
-              <a:t>Combine it with a greeting</a:t>
-            </a:r>
-          </a:p>
-        </p:txBody>
-      </p:sp>
-      <p:sp>
-        <p:nvSpPr>
-          <p:cNvPr id="11" name="">
-            <a:extLst xmlns:a="http://schemas.openxmlformats.org/drawingml/2006/main">
-              <a:ext uri="{FF2B5EF4-FFF2-40B4-BE49-F238E27FC236}">
-                <a16:creationId xmlns:a16="http://schemas.microsoft.com/office/drawing/2014/main" id="{056E1217-7438-4816-9EA6-C7EB1982AD95}"/>
-              </a:ext>
-            </a:extLst>
-          </p:cNvPr>
-          <p:cNvSpPr>
-            <a:spLocks xmlns:a="http://schemas.openxmlformats.org/drawingml/2006/main" noGrp="1"/>
-          </p:cNvSpPr>
-          <p:nvPr/>
-        </p:nvSpPr>
-        <p:spPr>
-          <a:xfrm xmlns:a="http://schemas.openxmlformats.org/drawingml/2006/main">
-            <a:off x="8324850" y="4495800"/>
-            <a:ext cx="2724150" cy="438150"/>
-          </a:xfrm>
-          <a:prstGeom xmlns:a="http://schemas.openxmlformats.org/drawingml/2006/main" prst="rect">
-            <a:avLst/>
-          </a:prstGeom>
-          <a:noFill xmlns:a="http://schemas.openxmlformats.org/drawingml/2006/main"/>
-          <a:ln xmlns:a="http://schemas.openxmlformats.org/drawingml/2006/main" w="0">
-            <a:noFill/>
-          </a:ln>
-        </p:spPr>
-        <p:txBody>
-          <a:bodyPr xmlns:a="http://schemas.openxmlformats.org/drawingml/2006/main" anchor="ctr">
-            <a:noAutofit/>
-          </a:bodyPr>
-          <a:lstStyle xmlns:a="http://schemas.openxmlformats.org/drawingml/2006/main"/>
-          <a:p xmlns:a="http://schemas.openxmlformats.org/drawingml/2006/main">
-            <a:pPr>
-              <a:defRPr sz="1875" b="1" i="0">
-                <a:solidFill>
-                  <a:srgbClr val="DF6765"/>
-                </a:solidFill>
-                <a:latin typeface="Arial"/>
-                <a:ea typeface="Arial"/>
-                <a:cs typeface="Arial"/>
-              </a:defRPr>
-            </a:pPr>
-            <a:r>
-              <a:rPr sz="1875" b="1" i="0">
-                <a:solidFill>
-                  <a:srgbClr val="DF6765"/>
-                </a:solidFill>
-                <a:latin typeface="Arial"/>
-                <a:ea typeface="Arial"/>
-                <a:cs typeface="Arial"/>
-              </a:rPr>
-              <a:t>Hello, Maya!</a:t>
+              <a:t>Clone once. Later, use git pull to get new lessons.</a:t>
             </a:r>
           </a:p>
         </p:txBody>
@@ -6125,7 +7386,7 @@
           <p:cNvPr id="12" name="">
             <a:extLst xmlns:a="http://schemas.openxmlformats.org/drawingml/2006/main">
               <a:ext uri="{FF2B5EF4-FFF2-40B4-BE49-F238E27FC236}">
-                <a16:creationId xmlns:a16="http://schemas.microsoft.com/office/drawing/2014/main" id="{99572AB0-9795-4AB9-BDB0-6DCCFCA9770B}"/>
+                <a16:creationId xmlns:a16="http://schemas.microsoft.com/office/drawing/2014/main" id="{4C76C4AB-E620-4A20-AE45-8846D9259489}"/>
               </a:ext>
             </a:extLst>
           </p:cNvPr>
@@ -6172,7 +7433,7 @@
                 <a:ea typeface="Arial"/>
                 <a:cs typeface="Arial"/>
               </a:rPr>
-              <a:t>9:50-10:25 | Lesson and live coding</a:t>
+              <a:t>9:50 | Getting the class repository</a:t>
             </a:r>
           </a:p>
         </p:txBody>
@@ -6180,7 +7441,7 @@
     </p:spTree>
     <p:extLst>
       <p:ext uri="{BB962C8B-B14F-4D97-AF65-F5344CB8AC3E}">
-        <p14:creationId xmlns:p14="http://schemas.microsoft.com/office/powerpoint/2010/main" val="1978104837"/>
+        <p14:creationId xmlns:p14="http://schemas.microsoft.com/office/powerpoint/2010/main" val="1273768736"/>
       </p:ext>
     </p:extLst>
   </p:cSld>
@@ -6188,6 +7449,1100 @@
 </file>
 
 <file path=ppt/slides/slide6.xml><?xml version="1.0" encoding="utf-8"?>
+<p:sld xmlns:p="http://schemas.openxmlformats.org/presentationml/2006/main">
+  <p:cSld>
+    <p:bg>
+      <p:bgPr>
+        <a:solidFill xmlns:a="http://schemas.openxmlformats.org/drawingml/2006/main">
+          <a:srgbClr val="FFFFFF"/>
+        </a:solidFill>
+      </p:bgPr>
+    </p:bg>
+    <p:spTree>
+      <p:nvGrpSpPr>
+        <p:cNvPr id="1" name=""/>
+        <p:cNvGrpSpPr/>
+        <p:nvPr/>
+      </p:nvGrpSpPr>
+      <p:grpSpPr>
+        <a:xfrm xmlns:a="http://schemas.openxmlformats.org/drawingml/2006/main"/>
+      </p:grpSpPr>
+      <p:sp>
+        <p:nvSpPr>
+          <p:cNvPr id="5" name="">
+            <a:extLst xmlns:a="http://schemas.openxmlformats.org/drawingml/2006/main">
+              <a:ext uri="{FF2B5EF4-FFF2-40B4-BE49-F238E27FC236}">
+                <a16:creationId xmlns:a16="http://schemas.microsoft.com/office/drawing/2014/main" id="{2484E9E7-F907-4708-B375-AB1AC65D5B5F}"/>
+              </a:ext>
+            </a:extLst>
+          </p:cNvPr>
+          <p:cNvSpPr>
+            <a:spLocks xmlns:a="http://schemas.openxmlformats.org/drawingml/2006/main" noGrp="1"/>
+          </p:cNvSpPr>
+          <p:nvPr/>
+        </p:nvSpPr>
+        <p:spPr>
+          <a:xfrm xmlns:a="http://schemas.openxmlformats.org/drawingml/2006/main">
+            <a:off x="685800" y="400050"/>
+            <a:ext cx="10820400" cy="590550"/>
+          </a:xfrm>
+          <a:prstGeom xmlns:a="http://schemas.openxmlformats.org/drawingml/2006/main" prst="rect">
+            <a:avLst/>
+          </a:prstGeom>
+          <a:noFill xmlns:a="http://schemas.openxmlformats.org/drawingml/2006/main"/>
+          <a:ln xmlns:a="http://schemas.openxmlformats.org/drawingml/2006/main" w="0">
+            <a:noFill/>
+          </a:ln>
+        </p:spPr>
+        <p:txBody>
+          <a:bodyPr xmlns:a="http://schemas.openxmlformats.org/drawingml/2006/main" anchor="ctr">
+            <a:noAutofit/>
+          </a:bodyPr>
+          <a:lstStyle xmlns:a="http://schemas.openxmlformats.org/drawingml/2006/main"/>
+          <a:p xmlns:a="http://schemas.openxmlformats.org/drawingml/2006/main">
+            <a:pPr>
+              <a:defRPr sz="3000" b="1" i="0">
+                <a:solidFill>
+                  <a:srgbClr val="173654"/>
+                </a:solidFill>
+                <a:latin typeface="Arial"/>
+                <a:ea typeface="Arial"/>
+                <a:cs typeface="Arial"/>
+              </a:defRPr>
+            </a:pPr>
+            <a:r>
+              <a:rPr sz="3000" b="1" i="0">
+                <a:solidFill>
+                  <a:srgbClr val="173654"/>
+                </a:solidFill>
+                <a:latin typeface="Arial"/>
+                <a:ea typeface="Arial"/>
+                <a:cs typeface="Arial"/>
+              </a:rPr>
+              <a:t>Learning objectives</a:t>
+            </a:r>
+          </a:p>
+        </p:txBody>
+      </p:sp>
+      <p:sp>
+        <p:nvSpPr>
+          <p:cNvPr id="2" name="">
+            <a:extLst xmlns:a="http://schemas.openxmlformats.org/drawingml/2006/main">
+              <a:ext uri="{FF2B5EF4-FFF2-40B4-BE49-F238E27FC236}">
+                <a16:creationId xmlns:a16="http://schemas.microsoft.com/office/drawing/2014/main" id="{0D0E1244-F34B-4ABE-BBA8-E858B31A6877}"/>
+              </a:ext>
+            </a:extLst>
+          </p:cNvPr>
+          <p:cNvSpPr>
+            <a:spLocks xmlns:a="http://schemas.openxmlformats.org/drawingml/2006/main" noGrp="1"/>
+          </p:cNvSpPr>
+          <p:nvPr/>
+        </p:nvSpPr>
+        <p:spPr>
+          <a:xfrm xmlns:a="http://schemas.openxmlformats.org/drawingml/2006/main">
+            <a:off x="704850" y="1009650"/>
+            <a:ext cx="10477500" cy="361950"/>
+          </a:xfrm>
+          <a:prstGeom xmlns:a="http://schemas.openxmlformats.org/drawingml/2006/main" prst="rect">
+            <a:avLst/>
+          </a:prstGeom>
+          <a:noFill xmlns:a="http://schemas.openxmlformats.org/drawingml/2006/main"/>
+          <a:ln xmlns:a="http://schemas.openxmlformats.org/drawingml/2006/main" w="0">
+            <a:noFill/>
+          </a:ln>
+        </p:spPr>
+        <p:txBody>
+          <a:bodyPr xmlns:a="http://schemas.openxmlformats.org/drawingml/2006/main" anchor="ctr">
+            <a:noAutofit/>
+          </a:bodyPr>
+          <a:lstStyle xmlns:a="http://schemas.openxmlformats.org/drawingml/2006/main"/>
+          <a:p xmlns:a="http://schemas.openxmlformats.org/drawingml/2006/main">
+            <a:pPr>
+              <a:defRPr sz="1575" b="0" i="0">
+                <a:solidFill>
+                  <a:srgbClr val="5D6B78"/>
+                </a:solidFill>
+                <a:latin typeface="Arial"/>
+                <a:ea typeface="Arial"/>
+                <a:cs typeface="Arial"/>
+              </a:defRPr>
+            </a:pPr>
+            <a:r>
+              <a:rPr sz="1575" b="0" i="0">
+                <a:solidFill>
+                  <a:srgbClr val="5D6B78"/>
+                </a:solidFill>
+                <a:latin typeface="Arial"/>
+                <a:ea typeface="Arial"/>
+                <a:cs typeface="Arial"/>
+              </a:rPr>
+              <a:t>By 1:00 PM, you should be able to...</a:t>
+            </a:r>
+          </a:p>
+        </p:txBody>
+      </p:sp>
+      <p:sp>
+        <p:nvSpPr>
+          <p:cNvPr id="3" name="">
+            <a:extLst xmlns:a="http://schemas.openxmlformats.org/drawingml/2006/main">
+              <a:ext uri="{FF2B5EF4-FFF2-40B4-BE49-F238E27FC236}">
+                <a16:creationId xmlns:a16="http://schemas.microsoft.com/office/drawing/2014/main" id="{39EFE3B2-32C4-4D53-A933-8A4F82DDB64D}"/>
+              </a:ext>
+            </a:extLst>
+          </p:cNvPr>
+          <p:cNvSpPr>
+            <a:spLocks xmlns:a="http://schemas.openxmlformats.org/drawingml/2006/main" noGrp="1"/>
+          </p:cNvSpPr>
+          <p:nvPr/>
+        </p:nvSpPr>
+        <p:spPr>
+          <a:xfrm xmlns:a="http://schemas.openxmlformats.org/drawingml/2006/main">
+            <a:off x="1181100" y="1714500"/>
+            <a:ext cx="9810750" cy="3905250"/>
+          </a:xfrm>
+          <a:prstGeom xmlns:a="http://schemas.openxmlformats.org/drawingml/2006/main" prst="rect">
+            <a:avLst/>
+          </a:prstGeom>
+          <a:noFill xmlns:a="http://schemas.openxmlformats.org/drawingml/2006/main"/>
+          <a:ln xmlns:a="http://schemas.openxmlformats.org/drawingml/2006/main" w="0">
+            <a:noFill/>
+          </a:ln>
+        </p:spPr>
+        <p:txBody>
+          <a:bodyPr xmlns:a="http://schemas.openxmlformats.org/drawingml/2006/main">
+            <a:noAutofit/>
+          </a:bodyPr>
+          <a:lstStyle xmlns:a="http://schemas.openxmlformats.org/drawingml/2006/main"/>
+          <a:p xmlns:a="http://schemas.openxmlformats.org/drawingml/2006/main">
+            <a:pPr marL="254000" indent="-127000">
+              <a:spcAft>
+                <a:spcPts val="1400"/>
+              </a:spcAft>
+              <a:buChar char="•"/>
+              <a:defRPr sz="2250">
+                <a:solidFill>
+                  <a:srgbClr val="172433"/>
+                </a:solidFill>
+                <a:latin typeface="Arial"/>
+                <a:ea typeface="Arial"/>
+                <a:cs typeface="Arial"/>
+              </a:defRPr>
+            </a:pPr>
+            <a:r>
+              <a:rPr sz="2250">
+                <a:solidFill>
+                  <a:srgbClr val="172433"/>
+                </a:solidFill>
+                <a:latin typeface="Arial"/>
+                <a:ea typeface="Arial"/>
+                <a:cs typeface="Arial"/>
+              </a:rPr>
+              <a:t>Run a Python file from Visual Studio Code or PowerShell</a:t>
+            </a:r>
+          </a:p>
+          <a:p xmlns:a="http://schemas.openxmlformats.org/drawingml/2006/main">
+            <a:pPr marL="254000" indent="-127000">
+              <a:spcAft>
+                <a:spcPts val="1400"/>
+              </a:spcAft>
+              <a:buChar char="•"/>
+              <a:defRPr sz="2250">
+                <a:solidFill>
+                  <a:srgbClr val="172433"/>
+                </a:solidFill>
+                <a:latin typeface="Arial"/>
+                <a:ea typeface="Arial"/>
+                <a:cs typeface="Arial"/>
+              </a:defRPr>
+            </a:pPr>
+            <a:r>
+              <a:rPr sz="2250">
+                <a:solidFill>
+                  <a:srgbClr val="172433"/>
+                </a:solidFill>
+                <a:latin typeface="Arial"/>
+                <a:ea typeface="Arial"/>
+                <a:cs typeface="Arial"/>
+              </a:rPr>
+              <a:t>Use print() to display text</a:t>
+            </a:r>
+          </a:p>
+          <a:p xmlns:a="http://schemas.openxmlformats.org/drawingml/2006/main">
+            <a:pPr marL="254000" indent="-127000">
+              <a:spcAft>
+                <a:spcPts val="1400"/>
+              </a:spcAft>
+              <a:buChar char="•"/>
+              <a:defRPr sz="2250">
+                <a:solidFill>
+                  <a:srgbClr val="172433"/>
+                </a:solidFill>
+                <a:latin typeface="Arial"/>
+                <a:ea typeface="Arial"/>
+                <a:cs typeface="Arial"/>
+              </a:defRPr>
+            </a:pPr>
+            <a:r>
+              <a:rPr sz="2250">
+                <a:solidFill>
+                  <a:srgbClr val="172433"/>
+                </a:solidFill>
+                <a:latin typeface="Arial"/>
+                <a:ea typeface="Arial"/>
+                <a:cs typeface="Arial"/>
+              </a:rPr>
+              <a:t>Add comments that explain a program</a:t>
+            </a:r>
+          </a:p>
+          <a:p xmlns:a="http://schemas.openxmlformats.org/drawingml/2006/main">
+            <a:pPr marL="254000" indent="-127000">
+              <a:spcAft>
+                <a:spcPts val="1400"/>
+              </a:spcAft>
+              <a:buChar char="•"/>
+              <a:defRPr sz="2250">
+                <a:solidFill>
+                  <a:srgbClr val="172433"/>
+                </a:solidFill>
+                <a:latin typeface="Arial"/>
+                <a:ea typeface="Arial"/>
+                <a:cs typeface="Arial"/>
+              </a:defRPr>
+            </a:pPr>
+            <a:r>
+              <a:rPr sz="2250">
+                <a:solidFill>
+                  <a:srgbClr val="172433"/>
+                </a:solidFill>
+                <a:latin typeface="Arial"/>
+                <a:ea typeface="Arial"/>
+                <a:cs typeface="Arial"/>
+              </a:rPr>
+              <a:t>Locate the useful line in a Python error message</a:t>
+            </a:r>
+          </a:p>
+          <a:p xmlns:a="http://schemas.openxmlformats.org/drawingml/2006/main">
+            <a:pPr marL="254000" indent="-127000">
+              <a:spcAft>
+                <a:spcPts val="1400"/>
+              </a:spcAft>
+              <a:buChar char="•"/>
+              <a:defRPr sz="2250">
+                <a:solidFill>
+                  <a:srgbClr val="172433"/>
+                </a:solidFill>
+                <a:latin typeface="Arial"/>
+                <a:ea typeface="Arial"/>
+                <a:cs typeface="Arial"/>
+              </a:defRPr>
+            </a:pPr>
+            <a:r>
+              <a:rPr sz="2250">
+                <a:solidFill>
+                  <a:srgbClr val="172433"/>
+                </a:solidFill>
+                <a:latin typeface="Arial"/>
+                <a:ea typeface="Arial"/>
+                <a:cs typeface="Arial"/>
+              </a:rPr>
+              <a:t>Make and describe one Git commit</a:t>
+            </a:r>
+          </a:p>
+        </p:txBody>
+      </p:sp>
+      <p:sp>
+        <p:nvSpPr>
+          <p:cNvPr id="4" name="">
+            <a:extLst xmlns:a="http://schemas.openxmlformats.org/drawingml/2006/main">
+              <a:ext uri="{FF2B5EF4-FFF2-40B4-BE49-F238E27FC236}">
+                <a16:creationId xmlns:a16="http://schemas.microsoft.com/office/drawing/2014/main" id="{78008273-74E4-40CB-A918-91CE080FB6CE}"/>
+              </a:ext>
+            </a:extLst>
+          </p:cNvPr>
+          <p:cNvSpPr>
+            <a:spLocks xmlns:a="http://schemas.openxmlformats.org/drawingml/2006/main" noGrp="1"/>
+          </p:cNvSpPr>
+          <p:nvPr/>
+        </p:nvSpPr>
+        <p:spPr>
+          <a:xfrm xmlns:a="http://schemas.openxmlformats.org/drawingml/2006/main">
+            <a:off x="685800" y="6438900"/>
+            <a:ext cx="10820400" cy="228600"/>
+          </a:xfrm>
+          <a:prstGeom xmlns:a="http://schemas.openxmlformats.org/drawingml/2006/main" prst="rect">
+            <a:avLst/>
+          </a:prstGeom>
+          <a:noFill xmlns:a="http://schemas.openxmlformats.org/drawingml/2006/main"/>
+          <a:ln xmlns:a="http://schemas.openxmlformats.org/drawingml/2006/main" w="0">
+            <a:noFill/>
+          </a:ln>
+        </p:spPr>
+        <p:txBody>
+          <a:bodyPr xmlns:a="http://schemas.openxmlformats.org/drawingml/2006/main" anchor="ctr">
+            <a:noAutofit/>
+          </a:bodyPr>
+          <a:lstStyle xmlns:a="http://schemas.openxmlformats.org/drawingml/2006/main"/>
+          <a:p xmlns:a="http://schemas.openxmlformats.org/drawingml/2006/main">
+            <a:pPr>
+              <a:defRPr sz="1200" b="0" i="0">
+                <a:solidFill>
+                  <a:srgbClr val="5D6B78"/>
+                </a:solidFill>
+                <a:latin typeface="Arial"/>
+                <a:ea typeface="Arial"/>
+                <a:cs typeface="Arial"/>
+              </a:defRPr>
+            </a:pPr>
+            <a:r>
+              <a:rPr sz="1200" b="0" i="0">
+                <a:solidFill>
+                  <a:srgbClr val="5D6B78"/>
+                </a:solidFill>
+                <a:latin typeface="Arial"/>
+                <a:ea typeface="Arial"/>
+                <a:cs typeface="Arial"/>
+              </a:rPr>
+              <a:t>9:30-9:50 | Welcome and objectives</a:t>
+            </a:r>
+          </a:p>
+        </p:txBody>
+      </p:sp>
+    </p:spTree>
+    <p:extLst>
+      <p:ext uri="{BB962C8B-B14F-4D97-AF65-F5344CB8AC3E}">
+        <p14:creationId xmlns:p14="http://schemas.microsoft.com/office/powerpoint/2010/main" val="1175934533"/>
+      </p:ext>
+    </p:extLst>
+  </p:cSld>
+</p:sld>
+</file>
+
+<file path=ppt/slides/slide7.xml><?xml version="1.0" encoding="utf-8"?>
+<p:sld xmlns:p="http://schemas.openxmlformats.org/presentationml/2006/main">
+  <p:cSld>
+    <p:bg>
+      <p:bgPr>
+        <a:solidFill xmlns:a="http://schemas.openxmlformats.org/drawingml/2006/main">
+          <a:srgbClr val="FFFFFF"/>
+        </a:solidFill>
+      </p:bgPr>
+    </p:bg>
+    <p:spTree>
+      <p:nvGrpSpPr>
+        <p:cNvPr id="1" name=""/>
+        <p:cNvGrpSpPr/>
+        <p:nvPr/>
+      </p:nvGrpSpPr>
+      <p:grpSpPr>
+        <a:xfrm xmlns:a="http://schemas.openxmlformats.org/drawingml/2006/main"/>
+      </p:grpSpPr>
+      <p:sp>
+        <p:nvSpPr>
+          <p:cNvPr id="13" name="">
+            <a:extLst xmlns:a="http://schemas.openxmlformats.org/drawingml/2006/main">
+              <a:ext uri="{FF2B5EF4-FFF2-40B4-BE49-F238E27FC236}">
+                <a16:creationId xmlns:a16="http://schemas.microsoft.com/office/drawing/2014/main" id="{AA70D39E-915C-4FB6-9FB8-9A5819DA88FD}"/>
+              </a:ext>
+            </a:extLst>
+          </p:cNvPr>
+          <p:cNvSpPr>
+            <a:spLocks xmlns:a="http://schemas.openxmlformats.org/drawingml/2006/main" noGrp="1"/>
+          </p:cNvSpPr>
+          <p:nvPr/>
+        </p:nvSpPr>
+        <p:spPr>
+          <a:xfrm xmlns:a="http://schemas.openxmlformats.org/drawingml/2006/main">
+            <a:off x="685800" y="400050"/>
+            <a:ext cx="10820400" cy="590550"/>
+          </a:xfrm>
+          <a:prstGeom xmlns:a="http://schemas.openxmlformats.org/drawingml/2006/main" prst="rect">
+            <a:avLst/>
+          </a:prstGeom>
+          <a:noFill xmlns:a="http://schemas.openxmlformats.org/drawingml/2006/main"/>
+          <a:ln xmlns:a="http://schemas.openxmlformats.org/drawingml/2006/main" w="0">
+            <a:noFill/>
+          </a:ln>
+        </p:spPr>
+        <p:txBody>
+          <a:bodyPr xmlns:a="http://schemas.openxmlformats.org/drawingml/2006/main" anchor="ctr">
+            <a:noAutofit/>
+          </a:bodyPr>
+          <a:lstStyle xmlns:a="http://schemas.openxmlformats.org/drawingml/2006/main"/>
+          <a:p xmlns:a="http://schemas.openxmlformats.org/drawingml/2006/main">
+            <a:pPr>
+              <a:defRPr sz="3000" b="1" i="0">
+                <a:solidFill>
+                  <a:srgbClr val="173654"/>
+                </a:solidFill>
+                <a:latin typeface="Arial"/>
+                <a:ea typeface="Arial"/>
+                <a:cs typeface="Arial"/>
+              </a:defRPr>
+            </a:pPr>
+            <a:r>
+              <a:rPr sz="3000" b="1" i="0">
+                <a:solidFill>
+                  <a:srgbClr val="173654"/>
+                </a:solidFill>
+                <a:latin typeface="Arial"/>
+                <a:ea typeface="Arial"/>
+                <a:cs typeface="Arial"/>
+              </a:rPr>
+              <a:t>Input, process, output</a:t>
+            </a:r>
+          </a:p>
+        </p:txBody>
+      </p:sp>
+      <p:sp>
+        <p:nvSpPr>
+          <p:cNvPr id="2" name="">
+            <a:extLst xmlns:a="http://schemas.openxmlformats.org/drawingml/2006/main">
+              <a:ext uri="{FF2B5EF4-FFF2-40B4-BE49-F238E27FC236}">
+                <a16:creationId xmlns:a16="http://schemas.microsoft.com/office/drawing/2014/main" id="{C62F575A-E8DA-42A1-9309-B7D3742604A5}"/>
+              </a:ext>
+            </a:extLst>
+          </p:cNvPr>
+          <p:cNvSpPr>
+            <a:spLocks xmlns:a="http://schemas.openxmlformats.org/drawingml/2006/main" noGrp="1"/>
+          </p:cNvSpPr>
+          <p:nvPr/>
+        </p:nvSpPr>
+        <p:spPr>
+          <a:xfrm xmlns:a="http://schemas.openxmlformats.org/drawingml/2006/main">
+            <a:off x="704850" y="1009650"/>
+            <a:ext cx="10477500" cy="361950"/>
+          </a:xfrm>
+          <a:prstGeom xmlns:a="http://schemas.openxmlformats.org/drawingml/2006/main" prst="rect">
+            <a:avLst/>
+          </a:prstGeom>
+          <a:noFill xmlns:a="http://schemas.openxmlformats.org/drawingml/2006/main"/>
+          <a:ln xmlns:a="http://schemas.openxmlformats.org/drawingml/2006/main" w="0">
+            <a:noFill/>
+          </a:ln>
+        </p:spPr>
+        <p:txBody>
+          <a:bodyPr xmlns:a="http://schemas.openxmlformats.org/drawingml/2006/main" anchor="ctr">
+            <a:noAutofit/>
+          </a:bodyPr>
+          <a:lstStyle xmlns:a="http://schemas.openxmlformats.org/drawingml/2006/main"/>
+          <a:p xmlns:a="http://schemas.openxmlformats.org/drawingml/2006/main">
+            <a:pPr>
+              <a:defRPr sz="1575" b="0" i="0">
+                <a:solidFill>
+                  <a:srgbClr val="5D6B78"/>
+                </a:solidFill>
+                <a:latin typeface="Arial"/>
+                <a:ea typeface="Arial"/>
+                <a:cs typeface="Arial"/>
+              </a:defRPr>
+            </a:pPr>
+            <a:r>
+              <a:rPr sz="1575" b="0" i="0">
+                <a:solidFill>
+                  <a:srgbClr val="5D6B78"/>
+                </a:solidFill>
+                <a:latin typeface="Arial"/>
+                <a:ea typeface="Arial"/>
+                <a:cs typeface="Arial"/>
+              </a:rPr>
+              <a:t>A program turns information into a result</a:t>
+            </a:r>
+          </a:p>
+        </p:txBody>
+      </p:sp>
+      <p:sp>
+        <p:nvSpPr>
+          <p:cNvPr id="3" name="">
+            <a:extLst xmlns:a="http://schemas.openxmlformats.org/drawingml/2006/main">
+              <a:ext uri="{FF2B5EF4-FFF2-40B4-BE49-F238E27FC236}">
+                <a16:creationId xmlns:a16="http://schemas.microsoft.com/office/drawing/2014/main" id="{863C83EB-6EE1-4AF3-8D35-5C0E47EF55EE}"/>
+              </a:ext>
+            </a:extLst>
+          </p:cNvPr>
+          <p:cNvSpPr>
+            <a:spLocks xmlns:a="http://schemas.openxmlformats.org/drawingml/2006/main" noGrp="1"/>
+          </p:cNvSpPr>
+          <p:nvPr/>
+        </p:nvSpPr>
+        <p:spPr>
+          <a:xfrm xmlns:a="http://schemas.openxmlformats.org/drawingml/2006/main">
+            <a:off x="838200" y="2076450"/>
+            <a:ext cx="3162300" cy="666750"/>
+          </a:xfrm>
+          <a:prstGeom xmlns:a="http://schemas.openxmlformats.org/drawingml/2006/main" prst="roundRect">
+            <a:avLst>
+              <a:gd name="adj" fmla="val 11429"/>
+            </a:avLst>
+          </a:prstGeom>
+          <a:solidFill xmlns:a="http://schemas.openxmlformats.org/drawingml/2006/main">
+            <a:srgbClr val="EAF2F7"/>
+          </a:solidFill>
+          <a:ln xmlns:a="http://schemas.openxmlformats.org/drawingml/2006/main" w="0">
+            <a:noFill/>
+          </a:ln>
+        </p:spPr>
+        <p:txBody>
+          <a:bodyPr xmlns:a="http://schemas.openxmlformats.org/drawingml/2006/main" anchor="ctr">
+            <a:noAutofit/>
+          </a:bodyPr>
+          <a:lstStyle xmlns:a="http://schemas.openxmlformats.org/drawingml/2006/main"/>
+          <a:p xmlns:a="http://schemas.openxmlformats.org/drawingml/2006/main">
+            <a:pPr>
+              <a:defRPr sz="2250" b="1" i="0">
+                <a:solidFill>
+                  <a:srgbClr val="2F6F89"/>
+                </a:solidFill>
+                <a:latin typeface="Arial"/>
+                <a:ea typeface="Arial"/>
+                <a:cs typeface="Arial"/>
+              </a:defRPr>
+            </a:pPr>
+            <a:r>
+              <a:rPr sz="2250" b="1" i="0">
+                <a:solidFill>
+                  <a:srgbClr val="2F6F89"/>
+                </a:solidFill>
+                <a:latin typeface="Arial"/>
+                <a:ea typeface="Arial"/>
+                <a:cs typeface="Arial"/>
+              </a:rPr>
+              <a:t>INPUT</a:t>
+            </a:r>
+          </a:p>
+        </p:txBody>
+      </p:sp>
+      <p:sp>
+        <p:nvSpPr>
+          <p:cNvPr id="4" name="">
+            <a:extLst xmlns:a="http://schemas.openxmlformats.org/drawingml/2006/main">
+              <a:ext uri="{FF2B5EF4-FFF2-40B4-BE49-F238E27FC236}">
+                <a16:creationId xmlns:a16="http://schemas.microsoft.com/office/drawing/2014/main" id="{4457E954-38D6-4921-8EC0-95C67730781F}"/>
+              </a:ext>
+            </a:extLst>
+          </p:cNvPr>
+          <p:cNvSpPr>
+            <a:spLocks xmlns:a="http://schemas.openxmlformats.org/drawingml/2006/main" noGrp="1"/>
+          </p:cNvSpPr>
+          <p:nvPr/>
+        </p:nvSpPr>
+        <p:spPr>
+          <a:xfrm xmlns:a="http://schemas.openxmlformats.org/drawingml/2006/main">
+            <a:off x="1047750" y="3009900"/>
+            <a:ext cx="2743200" cy="857250"/>
+          </a:xfrm>
+          <a:prstGeom xmlns:a="http://schemas.openxmlformats.org/drawingml/2006/main" prst="rect">
+            <a:avLst/>
+          </a:prstGeom>
+          <a:noFill xmlns:a="http://schemas.openxmlformats.org/drawingml/2006/main"/>
+          <a:ln xmlns:a="http://schemas.openxmlformats.org/drawingml/2006/main" w="0">
+            <a:noFill/>
+          </a:ln>
+        </p:spPr>
+        <p:txBody>
+          <a:bodyPr xmlns:a="http://schemas.openxmlformats.org/drawingml/2006/main" anchor="ctr">
+            <a:noAutofit/>
+          </a:bodyPr>
+          <a:lstStyle xmlns:a="http://schemas.openxmlformats.org/drawingml/2006/main"/>
+          <a:p xmlns:a="http://schemas.openxmlformats.org/drawingml/2006/main">
+            <a:pPr>
+              <a:defRPr sz="1800" b="0" i="0">
+                <a:solidFill>
+                  <a:srgbClr val="172433"/>
+                </a:solidFill>
+                <a:latin typeface="Arial"/>
+                <a:ea typeface="Arial"/>
+                <a:cs typeface="Arial"/>
+              </a:defRPr>
+            </a:pPr>
+            <a:r>
+              <a:rPr sz="1800" b="0" i="0">
+                <a:solidFill>
+                  <a:srgbClr val="172433"/>
+                </a:solidFill>
+                <a:latin typeface="Arial"/>
+                <a:ea typeface="Arial"/>
+                <a:cs typeface="Arial"/>
+              </a:rPr>
+              <a:t>What the program receives</a:t>
+            </a:r>
+          </a:p>
+        </p:txBody>
+      </p:sp>
+      <p:sp>
+        <p:nvSpPr>
+          <p:cNvPr id="5" name="">
+            <a:extLst xmlns:a="http://schemas.openxmlformats.org/drawingml/2006/main">
+              <a:ext uri="{FF2B5EF4-FFF2-40B4-BE49-F238E27FC236}">
+                <a16:creationId xmlns:a16="http://schemas.microsoft.com/office/drawing/2014/main" id="{3DFB4704-3943-47C7-A4BF-1F060DFC0001}"/>
+              </a:ext>
+            </a:extLst>
+          </p:cNvPr>
+          <p:cNvSpPr>
+            <a:spLocks xmlns:a="http://schemas.openxmlformats.org/drawingml/2006/main" noGrp="1"/>
+          </p:cNvSpPr>
+          <p:nvPr/>
+        </p:nvSpPr>
+        <p:spPr>
+          <a:xfrm xmlns:a="http://schemas.openxmlformats.org/drawingml/2006/main">
+            <a:off x="4476750" y="2076450"/>
+            <a:ext cx="3162300" cy="666750"/>
+          </a:xfrm>
+          <a:prstGeom xmlns:a="http://schemas.openxmlformats.org/drawingml/2006/main" prst="roundRect">
+            <a:avLst>
+              <a:gd name="adj" fmla="val 11429"/>
+            </a:avLst>
+          </a:prstGeom>
+          <a:solidFill xmlns:a="http://schemas.openxmlformats.org/drawingml/2006/main">
+            <a:srgbClr val="EDF5E9"/>
+          </a:solidFill>
+          <a:ln xmlns:a="http://schemas.openxmlformats.org/drawingml/2006/main" w="0">
+            <a:noFill/>
+          </a:ln>
+        </p:spPr>
+        <p:txBody>
+          <a:bodyPr xmlns:a="http://schemas.openxmlformats.org/drawingml/2006/main" anchor="ctr">
+            <a:noAutofit/>
+          </a:bodyPr>
+          <a:lstStyle xmlns:a="http://schemas.openxmlformats.org/drawingml/2006/main"/>
+          <a:p xmlns:a="http://schemas.openxmlformats.org/drawingml/2006/main">
+            <a:pPr>
+              <a:defRPr sz="2250" b="1" i="0">
+                <a:solidFill>
+                  <a:srgbClr val="5F9F4B"/>
+                </a:solidFill>
+                <a:latin typeface="Arial"/>
+                <a:ea typeface="Arial"/>
+                <a:cs typeface="Arial"/>
+              </a:defRPr>
+            </a:pPr>
+            <a:r>
+              <a:rPr sz="2250" b="1" i="0">
+                <a:solidFill>
+                  <a:srgbClr val="5F9F4B"/>
+                </a:solidFill>
+                <a:latin typeface="Arial"/>
+                <a:ea typeface="Arial"/>
+                <a:cs typeface="Arial"/>
+              </a:rPr>
+              <a:t>PROCESS</a:t>
+            </a:r>
+          </a:p>
+        </p:txBody>
+      </p:sp>
+      <p:sp>
+        <p:nvSpPr>
+          <p:cNvPr id="6" name="">
+            <a:extLst xmlns:a="http://schemas.openxmlformats.org/drawingml/2006/main">
+              <a:ext uri="{FF2B5EF4-FFF2-40B4-BE49-F238E27FC236}">
+                <a16:creationId xmlns:a16="http://schemas.microsoft.com/office/drawing/2014/main" id="{EAC3E392-8D55-4F9C-9226-E42907759CD8}"/>
+              </a:ext>
+            </a:extLst>
+          </p:cNvPr>
+          <p:cNvSpPr>
+            <a:spLocks xmlns:a="http://schemas.openxmlformats.org/drawingml/2006/main" noGrp="1"/>
+          </p:cNvSpPr>
+          <p:nvPr/>
+        </p:nvSpPr>
+        <p:spPr>
+          <a:xfrm xmlns:a="http://schemas.openxmlformats.org/drawingml/2006/main">
+            <a:off x="4686300" y="3009900"/>
+            <a:ext cx="2743200" cy="857250"/>
+          </a:xfrm>
+          <a:prstGeom xmlns:a="http://schemas.openxmlformats.org/drawingml/2006/main" prst="rect">
+            <a:avLst/>
+          </a:prstGeom>
+          <a:noFill xmlns:a="http://schemas.openxmlformats.org/drawingml/2006/main"/>
+          <a:ln xmlns:a="http://schemas.openxmlformats.org/drawingml/2006/main" w="0">
+            <a:noFill/>
+          </a:ln>
+        </p:spPr>
+        <p:txBody>
+          <a:bodyPr xmlns:a="http://schemas.openxmlformats.org/drawingml/2006/main" anchor="ctr">
+            <a:noAutofit/>
+          </a:bodyPr>
+          <a:lstStyle xmlns:a="http://schemas.openxmlformats.org/drawingml/2006/main"/>
+          <a:p xmlns:a="http://schemas.openxmlformats.org/drawingml/2006/main">
+            <a:pPr>
+              <a:defRPr sz="1800" b="0" i="0">
+                <a:solidFill>
+                  <a:srgbClr val="172433"/>
+                </a:solidFill>
+                <a:latin typeface="Arial"/>
+                <a:ea typeface="Arial"/>
+                <a:cs typeface="Arial"/>
+              </a:defRPr>
+            </a:pPr>
+            <a:r>
+              <a:rPr sz="1800" b="0" i="0">
+                <a:solidFill>
+                  <a:srgbClr val="172433"/>
+                </a:solidFill>
+                <a:latin typeface="Arial"/>
+                <a:ea typeface="Arial"/>
+                <a:cs typeface="Arial"/>
+              </a:rPr>
+              <a:t>The steps the program follows</a:t>
+            </a:r>
+          </a:p>
+        </p:txBody>
+      </p:sp>
+      <p:sp>
+        <p:nvSpPr>
+          <p:cNvPr id="7" name="">
+            <a:extLst xmlns:a="http://schemas.openxmlformats.org/drawingml/2006/main">
+              <a:ext uri="{FF2B5EF4-FFF2-40B4-BE49-F238E27FC236}">
+                <a16:creationId xmlns:a16="http://schemas.microsoft.com/office/drawing/2014/main" id="{AB76040C-E2CB-446B-BA20-E095F30D449F}"/>
+              </a:ext>
+            </a:extLst>
+          </p:cNvPr>
+          <p:cNvSpPr>
+            <a:spLocks xmlns:a="http://schemas.openxmlformats.org/drawingml/2006/main" noGrp="1"/>
+          </p:cNvSpPr>
+          <p:nvPr/>
+        </p:nvSpPr>
+        <p:spPr>
+          <a:xfrm xmlns:a="http://schemas.openxmlformats.org/drawingml/2006/main">
+            <a:off x="8115300" y="2076450"/>
+            <a:ext cx="3162300" cy="666750"/>
+          </a:xfrm>
+          <a:prstGeom xmlns:a="http://schemas.openxmlformats.org/drawingml/2006/main" prst="roundRect">
+            <a:avLst>
+              <a:gd name="adj" fmla="val 11429"/>
+            </a:avLst>
+          </a:prstGeom>
+          <a:solidFill xmlns:a="http://schemas.openxmlformats.org/drawingml/2006/main">
+            <a:srgbClr val="FBECEC"/>
+          </a:solidFill>
+          <a:ln xmlns:a="http://schemas.openxmlformats.org/drawingml/2006/main" w="0">
+            <a:noFill/>
+          </a:ln>
+        </p:spPr>
+        <p:txBody>
+          <a:bodyPr xmlns:a="http://schemas.openxmlformats.org/drawingml/2006/main" anchor="ctr">
+            <a:noAutofit/>
+          </a:bodyPr>
+          <a:lstStyle xmlns:a="http://schemas.openxmlformats.org/drawingml/2006/main"/>
+          <a:p xmlns:a="http://schemas.openxmlformats.org/drawingml/2006/main">
+            <a:pPr>
+              <a:defRPr sz="2250" b="1" i="0">
+                <a:solidFill>
+                  <a:srgbClr val="DF6765"/>
+                </a:solidFill>
+                <a:latin typeface="Arial"/>
+                <a:ea typeface="Arial"/>
+                <a:cs typeface="Arial"/>
+              </a:defRPr>
+            </a:pPr>
+            <a:r>
+              <a:rPr sz="2250" b="1" i="0">
+                <a:solidFill>
+                  <a:srgbClr val="DF6765"/>
+                </a:solidFill>
+                <a:latin typeface="Arial"/>
+                <a:ea typeface="Arial"/>
+                <a:cs typeface="Arial"/>
+              </a:rPr>
+              <a:t>OUTPUT</a:t>
+            </a:r>
+          </a:p>
+        </p:txBody>
+      </p:sp>
+      <p:sp>
+        <p:nvSpPr>
+          <p:cNvPr id="8" name="">
+            <a:extLst xmlns:a="http://schemas.openxmlformats.org/drawingml/2006/main">
+              <a:ext uri="{FF2B5EF4-FFF2-40B4-BE49-F238E27FC236}">
+                <a16:creationId xmlns:a16="http://schemas.microsoft.com/office/drawing/2014/main" id="{9677197C-92E9-4D3F-A2FB-E795CBE5072D}"/>
+              </a:ext>
+            </a:extLst>
+          </p:cNvPr>
+          <p:cNvSpPr>
+            <a:spLocks xmlns:a="http://schemas.openxmlformats.org/drawingml/2006/main" noGrp="1"/>
+          </p:cNvSpPr>
+          <p:nvPr/>
+        </p:nvSpPr>
+        <p:spPr>
+          <a:xfrm xmlns:a="http://schemas.openxmlformats.org/drawingml/2006/main">
+            <a:off x="8324850" y="3009900"/>
+            <a:ext cx="2743200" cy="857250"/>
+          </a:xfrm>
+          <a:prstGeom xmlns:a="http://schemas.openxmlformats.org/drawingml/2006/main" prst="rect">
+            <a:avLst/>
+          </a:prstGeom>
+          <a:noFill xmlns:a="http://schemas.openxmlformats.org/drawingml/2006/main"/>
+          <a:ln xmlns:a="http://schemas.openxmlformats.org/drawingml/2006/main" w="0">
+            <a:noFill/>
+          </a:ln>
+        </p:spPr>
+        <p:txBody>
+          <a:bodyPr xmlns:a="http://schemas.openxmlformats.org/drawingml/2006/main" anchor="ctr">
+            <a:noAutofit/>
+          </a:bodyPr>
+          <a:lstStyle xmlns:a="http://schemas.openxmlformats.org/drawingml/2006/main"/>
+          <a:p xmlns:a="http://schemas.openxmlformats.org/drawingml/2006/main">
+            <a:pPr>
+              <a:defRPr sz="1800" b="0" i="0">
+                <a:solidFill>
+                  <a:srgbClr val="172433"/>
+                </a:solidFill>
+                <a:latin typeface="Arial"/>
+                <a:ea typeface="Arial"/>
+                <a:cs typeface="Arial"/>
+              </a:defRPr>
+            </a:pPr>
+            <a:r>
+              <a:rPr sz="1800" b="0" i="0">
+                <a:solidFill>
+                  <a:srgbClr val="172433"/>
+                </a:solidFill>
+                <a:latin typeface="Arial"/>
+                <a:ea typeface="Arial"/>
+                <a:cs typeface="Arial"/>
+              </a:rPr>
+              <a:t>What the program produces</a:t>
+            </a:r>
+          </a:p>
+        </p:txBody>
+      </p:sp>
+      <p:sp>
+        <p:nvSpPr>
+          <p:cNvPr id="9" name="">
+            <a:extLst xmlns:a="http://schemas.openxmlformats.org/drawingml/2006/main">
+              <a:ext uri="{FF2B5EF4-FFF2-40B4-BE49-F238E27FC236}">
+                <a16:creationId xmlns:a16="http://schemas.microsoft.com/office/drawing/2014/main" id="{489431A0-EDE4-4328-AAE9-1EAE0924B1B2}"/>
+              </a:ext>
+            </a:extLst>
+          </p:cNvPr>
+          <p:cNvSpPr>
+            <a:spLocks xmlns:a="http://schemas.openxmlformats.org/drawingml/2006/main" noGrp="1"/>
+          </p:cNvSpPr>
+          <p:nvPr/>
+        </p:nvSpPr>
+        <p:spPr>
+          <a:xfrm xmlns:a="http://schemas.openxmlformats.org/drawingml/2006/main">
+            <a:off x="1047750" y="4495800"/>
+            <a:ext cx="2724150" cy="438150"/>
+          </a:xfrm>
+          <a:prstGeom xmlns:a="http://schemas.openxmlformats.org/drawingml/2006/main" prst="rect">
+            <a:avLst/>
+          </a:prstGeom>
+          <a:noFill xmlns:a="http://schemas.openxmlformats.org/drawingml/2006/main"/>
+          <a:ln xmlns:a="http://schemas.openxmlformats.org/drawingml/2006/main" w="0">
+            <a:noFill/>
+          </a:ln>
+        </p:spPr>
+        <p:txBody>
+          <a:bodyPr xmlns:a="http://schemas.openxmlformats.org/drawingml/2006/main" anchor="ctr">
+            <a:noAutofit/>
+          </a:bodyPr>
+          <a:lstStyle xmlns:a="http://schemas.openxmlformats.org/drawingml/2006/main"/>
+          <a:p xmlns:a="http://schemas.openxmlformats.org/drawingml/2006/main">
+            <a:pPr>
+              <a:defRPr sz="1875" b="1" i="0">
+                <a:solidFill>
+                  <a:srgbClr val="2F6F89"/>
+                </a:solidFill>
+                <a:latin typeface="Arial"/>
+                <a:ea typeface="Arial"/>
+                <a:cs typeface="Arial"/>
+              </a:defRPr>
+            </a:pPr>
+            <a:r>
+              <a:rPr sz="1875" b="1" i="0">
+                <a:solidFill>
+                  <a:srgbClr val="2F6F89"/>
+                </a:solidFill>
+                <a:latin typeface="Arial"/>
+                <a:ea typeface="Arial"/>
+                <a:cs typeface="Arial"/>
+              </a:rPr>
+              <a:t>Example: your name</a:t>
+            </a:r>
+          </a:p>
+        </p:txBody>
+      </p:sp>
+      <p:sp>
+        <p:nvSpPr>
+          <p:cNvPr id="10" name="">
+            <a:extLst xmlns:a="http://schemas.openxmlformats.org/drawingml/2006/main">
+              <a:ext uri="{FF2B5EF4-FFF2-40B4-BE49-F238E27FC236}">
+                <a16:creationId xmlns:a16="http://schemas.microsoft.com/office/drawing/2014/main" id="{90358C5E-AD2F-4055-A8A7-68B3B0AB32D0}"/>
+              </a:ext>
+            </a:extLst>
+          </p:cNvPr>
+          <p:cNvSpPr>
+            <a:spLocks xmlns:a="http://schemas.openxmlformats.org/drawingml/2006/main" noGrp="1"/>
+          </p:cNvSpPr>
+          <p:nvPr/>
+        </p:nvSpPr>
+        <p:spPr>
+          <a:xfrm xmlns:a="http://schemas.openxmlformats.org/drawingml/2006/main">
+            <a:off x="4705350" y="4495800"/>
+            <a:ext cx="2724150" cy="552450"/>
+          </a:xfrm>
+          <a:prstGeom xmlns:a="http://schemas.openxmlformats.org/drawingml/2006/main" prst="rect">
+            <a:avLst/>
+          </a:prstGeom>
+          <a:noFill xmlns:a="http://schemas.openxmlformats.org/drawingml/2006/main"/>
+          <a:ln xmlns:a="http://schemas.openxmlformats.org/drawingml/2006/main" w="0">
+            <a:noFill/>
+          </a:ln>
+        </p:spPr>
+        <p:txBody>
+          <a:bodyPr xmlns:a="http://schemas.openxmlformats.org/drawingml/2006/main" anchor="ctr">
+            <a:noAutofit/>
+          </a:bodyPr>
+          <a:lstStyle xmlns:a="http://schemas.openxmlformats.org/drawingml/2006/main"/>
+          <a:p xmlns:a="http://schemas.openxmlformats.org/drawingml/2006/main">
+            <a:pPr>
+              <a:defRPr sz="1875" b="1" i="0">
+                <a:solidFill>
+                  <a:srgbClr val="5F9F4B"/>
+                </a:solidFill>
+                <a:latin typeface="Arial"/>
+                <a:ea typeface="Arial"/>
+                <a:cs typeface="Arial"/>
+              </a:defRPr>
+            </a:pPr>
+            <a:r>
+              <a:rPr sz="1875" b="1" i="0">
+                <a:solidFill>
+                  <a:srgbClr val="5F9F4B"/>
+                </a:solidFill>
+                <a:latin typeface="Arial"/>
+                <a:ea typeface="Arial"/>
+                <a:cs typeface="Arial"/>
+              </a:rPr>
+              <a:t>Combine it with a greeting</a:t>
+            </a:r>
+          </a:p>
+        </p:txBody>
+      </p:sp>
+      <p:sp>
+        <p:nvSpPr>
+          <p:cNvPr id="11" name="">
+            <a:extLst xmlns:a="http://schemas.openxmlformats.org/drawingml/2006/main">
+              <a:ext uri="{FF2B5EF4-FFF2-40B4-BE49-F238E27FC236}">
+                <a16:creationId xmlns:a16="http://schemas.microsoft.com/office/drawing/2014/main" id="{2C5475B7-7EE6-4EA4-9756-73E6EDB32515}"/>
+              </a:ext>
+            </a:extLst>
+          </p:cNvPr>
+          <p:cNvSpPr>
+            <a:spLocks xmlns:a="http://schemas.openxmlformats.org/drawingml/2006/main" noGrp="1"/>
+          </p:cNvSpPr>
+          <p:nvPr/>
+        </p:nvSpPr>
+        <p:spPr>
+          <a:xfrm xmlns:a="http://schemas.openxmlformats.org/drawingml/2006/main">
+            <a:off x="8324850" y="4495800"/>
+            <a:ext cx="2724150" cy="438150"/>
+          </a:xfrm>
+          <a:prstGeom xmlns:a="http://schemas.openxmlformats.org/drawingml/2006/main" prst="rect">
+            <a:avLst/>
+          </a:prstGeom>
+          <a:noFill xmlns:a="http://schemas.openxmlformats.org/drawingml/2006/main"/>
+          <a:ln xmlns:a="http://schemas.openxmlformats.org/drawingml/2006/main" w="0">
+            <a:noFill/>
+          </a:ln>
+        </p:spPr>
+        <p:txBody>
+          <a:bodyPr xmlns:a="http://schemas.openxmlformats.org/drawingml/2006/main" anchor="ctr">
+            <a:noAutofit/>
+          </a:bodyPr>
+          <a:lstStyle xmlns:a="http://schemas.openxmlformats.org/drawingml/2006/main"/>
+          <a:p xmlns:a="http://schemas.openxmlformats.org/drawingml/2006/main">
+            <a:pPr>
+              <a:defRPr sz="1875" b="1" i="0">
+                <a:solidFill>
+                  <a:srgbClr val="DF6765"/>
+                </a:solidFill>
+                <a:latin typeface="Arial"/>
+                <a:ea typeface="Arial"/>
+                <a:cs typeface="Arial"/>
+              </a:defRPr>
+            </a:pPr>
+            <a:r>
+              <a:rPr sz="1875" b="1" i="0">
+                <a:solidFill>
+                  <a:srgbClr val="DF6765"/>
+                </a:solidFill>
+                <a:latin typeface="Arial"/>
+                <a:ea typeface="Arial"/>
+                <a:cs typeface="Arial"/>
+              </a:rPr>
+              <a:t>Hello, Maya!</a:t>
+            </a:r>
+          </a:p>
+        </p:txBody>
+      </p:sp>
+      <p:sp>
+        <p:nvSpPr>
+          <p:cNvPr id="12" name="">
+            <a:extLst xmlns:a="http://schemas.openxmlformats.org/drawingml/2006/main">
+              <a:ext uri="{FF2B5EF4-FFF2-40B4-BE49-F238E27FC236}">
+                <a16:creationId xmlns:a16="http://schemas.microsoft.com/office/drawing/2014/main" id="{22D493B3-96FF-45B4-A4BD-D2C4103B0A3A}"/>
+              </a:ext>
+            </a:extLst>
+          </p:cNvPr>
+          <p:cNvSpPr>
+            <a:spLocks xmlns:a="http://schemas.openxmlformats.org/drawingml/2006/main" noGrp="1"/>
+          </p:cNvSpPr>
+          <p:nvPr/>
+        </p:nvSpPr>
+        <p:spPr>
+          <a:xfrm xmlns:a="http://schemas.openxmlformats.org/drawingml/2006/main">
+            <a:off x="685800" y="6438900"/>
+            <a:ext cx="10820400" cy="228600"/>
+          </a:xfrm>
+          <a:prstGeom xmlns:a="http://schemas.openxmlformats.org/drawingml/2006/main" prst="rect">
+            <a:avLst/>
+          </a:prstGeom>
+          <a:noFill xmlns:a="http://schemas.openxmlformats.org/drawingml/2006/main"/>
+          <a:ln xmlns:a="http://schemas.openxmlformats.org/drawingml/2006/main" w="0">
+            <a:noFill/>
+          </a:ln>
+        </p:spPr>
+        <p:txBody>
+          <a:bodyPr xmlns:a="http://schemas.openxmlformats.org/drawingml/2006/main" anchor="ctr">
+            <a:noAutofit/>
+          </a:bodyPr>
+          <a:lstStyle xmlns:a="http://schemas.openxmlformats.org/drawingml/2006/main"/>
+          <a:p xmlns:a="http://schemas.openxmlformats.org/drawingml/2006/main">
+            <a:pPr>
+              <a:defRPr sz="1200" b="0" i="0">
+                <a:solidFill>
+                  <a:srgbClr val="5D6B78"/>
+                </a:solidFill>
+                <a:latin typeface="Arial"/>
+                <a:ea typeface="Arial"/>
+                <a:cs typeface="Arial"/>
+              </a:defRPr>
+            </a:pPr>
+            <a:r>
+              <a:rPr sz="1200" b="0" i="0">
+                <a:solidFill>
+                  <a:srgbClr val="5D6B78"/>
+                </a:solidFill>
+                <a:latin typeface="Arial"/>
+                <a:ea typeface="Arial"/>
+                <a:cs typeface="Arial"/>
+              </a:rPr>
+              <a:t>9:50-10:25 | Lesson and live coding</a:t>
+            </a:r>
+          </a:p>
+        </p:txBody>
+      </p:sp>
+    </p:spTree>
+    <p:extLst>
+      <p:ext uri="{BB962C8B-B14F-4D97-AF65-F5344CB8AC3E}">
+        <p14:creationId xmlns:p14="http://schemas.microsoft.com/office/powerpoint/2010/main" val="89799441"/>
+      </p:ext>
+    </p:extLst>
+  </p:cSld>
+</p:sld>
+</file>
+
+<file path=ppt/slides/slide8.xml><?xml version="1.0" encoding="utf-8"?>
 <p:sld xmlns:p="http://schemas.openxmlformats.org/presentationml/2006/main">
   <p:cSld>
     <p:bg>
@@ -6211,7 +8566,7 @@
           <p:cNvPr id="6" name="">
             <a:extLst xmlns:a="http://schemas.openxmlformats.org/drawingml/2006/main">
               <a:ext uri="{FF2B5EF4-FFF2-40B4-BE49-F238E27FC236}">
-                <a16:creationId xmlns:a16="http://schemas.microsoft.com/office/drawing/2014/main" id="{2A0CBAF3-1646-4AD2-8151-20BF7EB60866}"/>
+                <a16:creationId xmlns:a16="http://schemas.microsoft.com/office/drawing/2014/main" id="{BADAFA25-026D-4ABA-ABA1-5A52EFE19981}"/>
               </a:ext>
             </a:extLst>
           </p:cNvPr>
@@ -6268,7 +8623,7 @@
           <p:cNvPr id="2" name="">
             <a:extLst xmlns:a="http://schemas.openxmlformats.org/drawingml/2006/main">
               <a:ext uri="{FF2B5EF4-FFF2-40B4-BE49-F238E27FC236}">
-                <a16:creationId xmlns:a16="http://schemas.microsoft.com/office/drawing/2014/main" id="{39F30ADB-3785-41F0-9BC5-997A1A54492C}"/>
+                <a16:creationId xmlns:a16="http://schemas.microsoft.com/office/drawing/2014/main" id="{33654394-9E1D-4E59-987C-26F1F2094E70}"/>
               </a:ext>
             </a:extLst>
           </p:cNvPr>
@@ -6352,7 +8707,7 @@
           <p:cNvPr id="3" name="">
             <a:extLst xmlns:a="http://schemas.openxmlformats.org/drawingml/2006/main">
               <a:ext uri="{FF2B5EF4-FFF2-40B4-BE49-F238E27FC236}">
-                <a16:creationId xmlns:a16="http://schemas.microsoft.com/office/drawing/2014/main" id="{1CB271FD-CBD7-4CDF-908A-61E6127EBDBD}"/>
+                <a16:creationId xmlns:a16="http://schemas.microsoft.com/office/drawing/2014/main" id="{9D09D597-AD6A-4389-AB33-5847B344E907}"/>
               </a:ext>
             </a:extLst>
           </p:cNvPr>
@@ -6409,7 +8764,7 @@
           <p:cNvPr id="4" name="">
             <a:extLst xmlns:a="http://schemas.openxmlformats.org/drawingml/2006/main">
               <a:ext uri="{FF2B5EF4-FFF2-40B4-BE49-F238E27FC236}">
-                <a16:creationId xmlns:a16="http://schemas.microsoft.com/office/drawing/2014/main" id="{FA44B958-3197-4CFE-A0F6-035A28AE9187}"/>
+                <a16:creationId xmlns:a16="http://schemas.microsoft.com/office/drawing/2014/main" id="{38361CE1-3899-4422-B0B8-EEEE354D87A5}"/>
               </a:ext>
             </a:extLst>
           </p:cNvPr>
@@ -6466,7 +8821,7 @@
           <p:cNvPr id="5" name="">
             <a:extLst xmlns:a="http://schemas.openxmlformats.org/drawingml/2006/main">
               <a:ext uri="{FF2B5EF4-FFF2-40B4-BE49-F238E27FC236}">
-                <a16:creationId xmlns:a16="http://schemas.microsoft.com/office/drawing/2014/main" id="{F2F78068-13FE-4E09-A76C-D9666521EB43}"/>
+                <a16:creationId xmlns:a16="http://schemas.microsoft.com/office/drawing/2014/main" id="{1A82DAA0-446B-4F13-AF82-04DE26B1190E}"/>
               </a:ext>
             </a:extLst>
           </p:cNvPr>
@@ -6521,14 +8876,14 @@
     </p:spTree>
     <p:extLst>
       <p:ext uri="{BB962C8B-B14F-4D97-AF65-F5344CB8AC3E}">
-        <p14:creationId xmlns:p14="http://schemas.microsoft.com/office/powerpoint/2010/main" val="494191938"/>
+        <p14:creationId xmlns:p14="http://schemas.microsoft.com/office/powerpoint/2010/main" val="309618594"/>
       </p:ext>
     </p:extLst>
   </p:cSld>
 </p:sld>
 </file>
 
-<file path=ppt/slides/slide7.xml><?xml version="1.0" encoding="utf-8"?>
+<file path=ppt/slides/slide9.xml><?xml version="1.0" encoding="utf-8"?>
 <p:sld xmlns:p="http://schemas.openxmlformats.org/presentationml/2006/main">
   <p:cSld>
     <p:bg>
@@ -6552,7 +8907,7 @@
           <p:cNvPr id="4" name="">
             <a:extLst xmlns:a="http://schemas.openxmlformats.org/drawingml/2006/main">
               <a:ext uri="{FF2B5EF4-FFF2-40B4-BE49-F238E27FC236}">
-                <a16:creationId xmlns:a16="http://schemas.microsoft.com/office/drawing/2014/main" id="{F9734774-5C3E-4C96-BEC5-DCB132AD339B}"/>
+                <a16:creationId xmlns:a16="http://schemas.microsoft.com/office/drawing/2014/main" id="{7A141C57-347B-43F1-8EAF-B664FE026072}"/>
               </a:ext>
             </a:extLst>
           </p:cNvPr>
@@ -6609,7 +8964,7 @@
           <p:cNvPr id="2" name="">
             <a:extLst xmlns:a="http://schemas.openxmlformats.org/drawingml/2006/main">
               <a:ext uri="{FF2B5EF4-FFF2-40B4-BE49-F238E27FC236}">
-                <a16:creationId xmlns:a16="http://schemas.microsoft.com/office/drawing/2014/main" id="{A7A405C3-9EB1-41FE-B7FD-68EC9DFCDB60}"/>
+                <a16:creationId xmlns:a16="http://schemas.microsoft.com/office/drawing/2014/main" id="{9EACD736-5263-4EF7-BAB3-A05CAD6D8870}"/>
               </a:ext>
             </a:extLst>
           </p:cNvPr>
@@ -6666,7 +9021,7 @@
           <p:cNvPr id="3" name="">
             <a:extLst xmlns:a="http://schemas.openxmlformats.org/drawingml/2006/main">
               <a:ext uri="{FF2B5EF4-FFF2-40B4-BE49-F238E27FC236}">
-                <a16:creationId xmlns:a16="http://schemas.microsoft.com/office/drawing/2014/main" id="{1E1FC42E-F137-4A57-AE41-C21FEB245D72}"/>
+                <a16:creationId xmlns:a16="http://schemas.microsoft.com/office/drawing/2014/main" id="{1A4460CF-0A00-4E3F-9DD6-FD6D9943738D}"/>
               </a:ext>
             </a:extLst>
           </p:cNvPr>
@@ -6721,778 +9076,7 @@
     </p:spTree>
     <p:extLst>
       <p:ext uri="{BB962C8B-B14F-4D97-AF65-F5344CB8AC3E}">
-        <p14:creationId xmlns:p14="http://schemas.microsoft.com/office/powerpoint/2010/main" val="25551826"/>
-      </p:ext>
-    </p:extLst>
-  </p:cSld>
-</p:sld>
-</file>
-
-<file path=ppt/slides/slide8.xml><?xml version="1.0" encoding="utf-8"?>
-<p:sld xmlns:p="http://schemas.openxmlformats.org/presentationml/2006/main">
-  <p:cSld>
-    <p:bg>
-      <p:bgPr>
-        <a:solidFill xmlns:a="http://schemas.openxmlformats.org/drawingml/2006/main">
-          <a:srgbClr val="FFFFFF"/>
-        </a:solidFill>
-      </p:bgPr>
-    </p:bg>
-    <p:spTree>
-      <p:nvGrpSpPr>
-        <p:cNvPr id="1" name=""/>
-        <p:cNvGrpSpPr/>
-        <p:nvPr/>
-      </p:nvGrpSpPr>
-      <p:grpSpPr>
-        <a:xfrm xmlns:a="http://schemas.openxmlformats.org/drawingml/2006/main"/>
-      </p:grpSpPr>
-      <p:sp>
-        <p:nvSpPr>
-          <p:cNvPr id="8" name="">
-            <a:extLst xmlns:a="http://schemas.openxmlformats.org/drawingml/2006/main">
-              <a:ext uri="{FF2B5EF4-FFF2-40B4-BE49-F238E27FC236}">
-                <a16:creationId xmlns:a16="http://schemas.microsoft.com/office/drawing/2014/main" id="{E4378682-636F-458E-8EF3-D1532C8CED08}"/>
-              </a:ext>
-            </a:extLst>
-          </p:cNvPr>
-          <p:cNvSpPr>
-            <a:spLocks xmlns:a="http://schemas.openxmlformats.org/drawingml/2006/main" noGrp="1"/>
-          </p:cNvSpPr>
-          <p:nvPr/>
-        </p:nvSpPr>
-        <p:spPr>
-          <a:xfrm xmlns:a="http://schemas.openxmlformats.org/drawingml/2006/main">
-            <a:off x="685800" y="400050"/>
-            <a:ext cx="10820400" cy="590550"/>
-          </a:xfrm>
-          <a:prstGeom xmlns:a="http://schemas.openxmlformats.org/drawingml/2006/main" prst="rect">
-            <a:avLst/>
-          </a:prstGeom>
-          <a:noFill xmlns:a="http://schemas.openxmlformats.org/drawingml/2006/main"/>
-          <a:ln xmlns:a="http://schemas.openxmlformats.org/drawingml/2006/main" w="0">
-            <a:noFill/>
-          </a:ln>
-        </p:spPr>
-        <p:txBody>
-          <a:bodyPr xmlns:a="http://schemas.openxmlformats.org/drawingml/2006/main" anchor="ctr">
-            <a:noAutofit/>
-          </a:bodyPr>
-          <a:lstStyle xmlns:a="http://schemas.openxmlformats.org/drawingml/2006/main"/>
-          <a:p xmlns:a="http://schemas.openxmlformats.org/drawingml/2006/main">
-            <a:pPr>
-              <a:defRPr sz="3000" b="1" i="0">
-                <a:solidFill>
-                  <a:srgbClr val="173654"/>
-                </a:solidFill>
-                <a:latin typeface="Arial"/>
-                <a:ea typeface="Arial"/>
-                <a:cs typeface="Arial"/>
-              </a:defRPr>
-            </a:pPr>
-            <a:r>
-              <a:rPr sz="3000" b="1" i="0">
-                <a:solidFill>
-                  <a:srgbClr val="173654"/>
-                </a:solidFill>
-                <a:latin typeface="Arial"/>
-                <a:ea typeface="Arial"/>
-                <a:cs typeface="Arial"/>
-              </a:rPr>
-              <a:t>Guided Python lab</a:t>
-            </a:r>
-          </a:p>
-        </p:txBody>
-      </p:sp>
-      <p:sp>
-        <p:nvSpPr>
-          <p:cNvPr id="2" name="">
-            <a:extLst xmlns:a="http://schemas.openxmlformats.org/drawingml/2006/main">
-              <a:ext uri="{FF2B5EF4-FFF2-40B4-BE49-F238E27FC236}">
-                <a16:creationId xmlns:a16="http://schemas.microsoft.com/office/drawing/2014/main" id="{56133BD5-60B4-41AD-AA86-B1054FBFA5AC}"/>
-              </a:ext>
-            </a:extLst>
-          </p:cNvPr>
-          <p:cNvSpPr>
-            <a:spLocks xmlns:a="http://schemas.openxmlformats.org/drawingml/2006/main" noGrp="1"/>
-          </p:cNvSpPr>
-          <p:nvPr/>
-        </p:nvSpPr>
-        <p:spPr>
-          <a:xfrm xmlns:a="http://schemas.openxmlformats.org/drawingml/2006/main">
-            <a:off x="704850" y="1009650"/>
-            <a:ext cx="10477500" cy="361950"/>
-          </a:xfrm>
-          <a:prstGeom xmlns:a="http://schemas.openxmlformats.org/drawingml/2006/main" prst="rect">
-            <a:avLst/>
-          </a:prstGeom>
-          <a:noFill xmlns:a="http://schemas.openxmlformats.org/drawingml/2006/main"/>
-          <a:ln xmlns:a="http://schemas.openxmlformats.org/drawingml/2006/main" w="0">
-            <a:noFill/>
-          </a:ln>
-        </p:spPr>
-        <p:txBody>
-          <a:bodyPr xmlns:a="http://schemas.openxmlformats.org/drawingml/2006/main" anchor="ctr">
-            <a:noAutofit/>
-          </a:bodyPr>
-          <a:lstStyle xmlns:a="http://schemas.openxmlformats.org/drawingml/2006/main"/>
-          <a:p xmlns:a="http://schemas.openxmlformats.org/drawingml/2006/main">
-            <a:pPr>
-              <a:defRPr sz="1575" b="0" i="0">
-                <a:solidFill>
-                  <a:srgbClr val="5D6B78"/>
-                </a:solidFill>
-                <a:latin typeface="Arial"/>
-                <a:ea typeface="Arial"/>
-                <a:cs typeface="Arial"/>
-              </a:defRPr>
-            </a:pPr>
-            <a:r>
-              <a:rPr sz="1575" b="0" i="0">
-                <a:solidFill>
-                  <a:srgbClr val="5D6B78"/>
-                </a:solidFill>
-                <a:latin typeface="Arial"/>
-                <a:ea typeface="Arial"/>
-                <a:cs typeface="Arial"/>
-              </a:rPr>
-              <a:t>Work with the class first, then repeat the steps independently</a:t>
-            </a:r>
-          </a:p>
-        </p:txBody>
-      </p:sp>
-      <p:sp>
-        <p:nvSpPr>
-          <p:cNvPr id="3" name="">
-            <a:extLst xmlns:a="http://schemas.openxmlformats.org/drawingml/2006/main">
-              <a:ext uri="{FF2B5EF4-FFF2-40B4-BE49-F238E27FC236}">
-                <a16:creationId xmlns:a16="http://schemas.microsoft.com/office/drawing/2014/main" id="{E0315989-A59F-482C-87D9-1E1BF93802C4}"/>
-              </a:ext>
-            </a:extLst>
-          </p:cNvPr>
-          <p:cNvSpPr>
-            <a:spLocks xmlns:a="http://schemas.openxmlformats.org/drawingml/2006/main" noGrp="1"/>
-          </p:cNvSpPr>
-          <p:nvPr/>
-        </p:nvSpPr>
-        <p:spPr>
-          <a:xfrm xmlns:a="http://schemas.openxmlformats.org/drawingml/2006/main">
-            <a:off x="857250" y="1676400"/>
-            <a:ext cx="7239000" cy="3619500"/>
-          </a:xfrm>
-          <a:prstGeom xmlns:a="http://schemas.openxmlformats.org/drawingml/2006/main" prst="rect">
-            <a:avLst/>
-          </a:prstGeom>
-          <a:noFill xmlns:a="http://schemas.openxmlformats.org/drawingml/2006/main"/>
-          <a:ln xmlns:a="http://schemas.openxmlformats.org/drawingml/2006/main" w="0">
-            <a:noFill/>
-          </a:ln>
-        </p:spPr>
-        <p:txBody>
-          <a:bodyPr xmlns:a="http://schemas.openxmlformats.org/drawingml/2006/main">
-            <a:noAutofit/>
-          </a:bodyPr>
-          <a:lstStyle xmlns:a="http://schemas.openxmlformats.org/drawingml/2006/main"/>
-          <a:p xmlns:a="http://schemas.openxmlformats.org/drawingml/2006/main">
-            <a:pPr marL="254000" indent="-127000">
-              <a:spcAft>
-                <a:spcPts val="1200"/>
-              </a:spcAft>
-              <a:buChar char="•"/>
-              <a:defRPr sz="2025">
-                <a:solidFill>
-                  <a:srgbClr val="172433"/>
-                </a:solidFill>
-                <a:latin typeface="Arial"/>
-                <a:ea typeface="Arial"/>
-                <a:cs typeface="Arial"/>
-              </a:defRPr>
-            </a:pPr>
-            <a:r>
-              <a:rPr sz="2025">
-                <a:solidFill>
-                  <a:srgbClr val="172433"/>
-                </a:solidFill>
-                <a:latin typeface="Arial"/>
-                <a:ea typeface="Arial"/>
-                <a:cs typeface="Arial"/>
-              </a:rPr>
-              <a:t>Open the course repository in Visual Studio Code</a:t>
-            </a:r>
-          </a:p>
-          <a:p xmlns:a="http://schemas.openxmlformats.org/drawingml/2006/main">
-            <a:pPr marL="254000" indent="-127000">
-              <a:spcAft>
-                <a:spcPts val="1200"/>
-              </a:spcAft>
-              <a:buChar char="•"/>
-              <a:defRPr sz="2025">
-                <a:solidFill>
-                  <a:srgbClr val="172433"/>
-                </a:solidFill>
-                <a:latin typeface="Arial"/>
-                <a:ea typeface="Arial"/>
-                <a:cs typeface="Arial"/>
-              </a:defRPr>
-            </a:pPr>
-            <a:r>
-              <a:rPr sz="2025">
-                <a:solidFill>
-                  <a:srgbClr val="172433"/>
-                </a:solidFill>
-                <a:latin typeface="Arial"/>
-                <a:ea typeface="Arial"/>
-                <a:cs typeface="Arial"/>
-              </a:rPr>
-              <a:t>Run setup/verify_setup.py</a:t>
-            </a:r>
-          </a:p>
-          <a:p xmlns:a="http://schemas.openxmlformats.org/drawingml/2006/main">
-            <a:pPr marL="254000" indent="-127000">
-              <a:spcAft>
-                <a:spcPts val="1200"/>
-              </a:spcAft>
-              <a:buChar char="•"/>
-              <a:defRPr sz="2025">
-                <a:solidFill>
-                  <a:srgbClr val="172433"/>
-                </a:solidFill>
-                <a:latin typeface="Arial"/>
-                <a:ea typeface="Arial"/>
-                <a:cs typeface="Arial"/>
-              </a:defRPr>
-            </a:pPr>
-            <a:r>
-              <a:rPr sz="2025">
-                <a:solidFill>
-                  <a:srgbClr val="172433"/>
-                </a:solidFill>
-                <a:latin typeface="Arial"/>
-                <a:ea typeface="Arial"/>
-                <a:cs typeface="Arial"/>
-              </a:rPr>
-              <a:t>Run week-01-python-basics/examples/hello.py</a:t>
-            </a:r>
-          </a:p>
-          <a:p xmlns:a="http://schemas.openxmlformats.org/drawingml/2006/main">
-            <a:pPr marL="254000" indent="-127000">
-              <a:spcAft>
-                <a:spcPts val="1200"/>
-              </a:spcAft>
-              <a:buChar char="•"/>
-              <a:defRPr sz="2025">
-                <a:solidFill>
-                  <a:srgbClr val="172433"/>
-                </a:solidFill>
-                <a:latin typeface="Arial"/>
-                <a:ea typeface="Arial"/>
-                <a:cs typeface="Arial"/>
-              </a:defRPr>
-            </a:pPr>
-            <a:r>
-              <a:rPr sz="2025">
-                <a:solidFill>
-                  <a:srgbClr val="172433"/>
-                </a:solidFill>
-                <a:latin typeface="Arial"/>
-                <a:ea typeface="Arial"/>
-                <a:cs typeface="Arial"/>
-              </a:rPr>
-              <a:t>Change every displayed message</a:t>
-            </a:r>
-          </a:p>
-          <a:p xmlns:a="http://schemas.openxmlformats.org/drawingml/2006/main">
-            <a:pPr marL="254000" indent="-127000">
-              <a:spcAft>
-                <a:spcPts val="1200"/>
-              </a:spcAft>
-              <a:buChar char="•"/>
-              <a:defRPr sz="2025">
-                <a:solidFill>
-                  <a:srgbClr val="172433"/>
-                </a:solidFill>
-                <a:latin typeface="Arial"/>
-                <a:ea typeface="Arial"/>
-                <a:cs typeface="Arial"/>
-              </a:defRPr>
-            </a:pPr>
-            <a:r>
-              <a:rPr sz="2025">
-                <a:solidFill>
-                  <a:srgbClr val="172433"/>
-                </a:solidFill>
-                <a:latin typeface="Arial"/>
-                <a:ea typeface="Arial"/>
-                <a:cs typeface="Arial"/>
-              </a:rPr>
-              <a:t>Create one error, read it, and repair it</a:t>
-            </a:r>
-          </a:p>
-        </p:txBody>
-      </p:sp>
-      <p:sp>
-        <p:nvSpPr>
-          <p:cNvPr id="4" name="">
-            <a:extLst xmlns:a="http://schemas.openxmlformats.org/drawingml/2006/main">
-              <a:ext uri="{FF2B5EF4-FFF2-40B4-BE49-F238E27FC236}">
-                <a16:creationId xmlns:a16="http://schemas.microsoft.com/office/drawing/2014/main" id="{DCD486ED-CA1D-43CB-9040-6523E3EF5075}"/>
-              </a:ext>
-            </a:extLst>
-          </p:cNvPr>
-          <p:cNvSpPr>
-            <a:spLocks xmlns:a="http://schemas.openxmlformats.org/drawingml/2006/main" noGrp="1"/>
-          </p:cNvSpPr>
-          <p:nvPr/>
-        </p:nvSpPr>
-        <p:spPr>
-          <a:xfrm xmlns:a="http://schemas.openxmlformats.org/drawingml/2006/main">
-            <a:off x="8286750" y="1752600"/>
-            <a:ext cx="2762250" cy="419100"/>
-          </a:xfrm>
-          <a:prstGeom xmlns:a="http://schemas.openxmlformats.org/drawingml/2006/main" prst="rect">
-            <a:avLst/>
-          </a:prstGeom>
-          <a:noFill xmlns:a="http://schemas.openxmlformats.org/drawingml/2006/main"/>
-          <a:ln xmlns:a="http://schemas.openxmlformats.org/drawingml/2006/main" w="0">
-            <a:noFill/>
-          </a:ln>
-        </p:spPr>
-        <p:txBody>
-          <a:bodyPr xmlns:a="http://schemas.openxmlformats.org/drawingml/2006/main" anchor="ctr">
-            <a:noAutofit/>
-          </a:bodyPr>
-          <a:lstStyle xmlns:a="http://schemas.openxmlformats.org/drawingml/2006/main"/>
-          <a:p xmlns:a="http://schemas.openxmlformats.org/drawingml/2006/main">
-            <a:pPr>
-              <a:defRPr sz="1800" b="1" i="0">
-                <a:solidFill>
-                  <a:srgbClr val="2F6F89"/>
-                </a:solidFill>
-                <a:latin typeface="Arial"/>
-                <a:ea typeface="Arial"/>
-                <a:cs typeface="Arial"/>
-              </a:defRPr>
-            </a:pPr>
-            <a:r>
-              <a:rPr sz="1800" b="1" i="0">
-                <a:solidFill>
-                  <a:srgbClr val="2F6F89"/>
-                </a:solidFill>
-                <a:latin typeface="Arial"/>
-                <a:ea typeface="Arial"/>
-                <a:cs typeface="Arial"/>
-              </a:rPr>
-              <a:t>Command</a:t>
-            </a:r>
-          </a:p>
-        </p:txBody>
-      </p:sp>
-      <p:sp>
-        <p:nvSpPr>
-          <p:cNvPr id="5" name="">
-            <a:extLst xmlns:a="http://schemas.openxmlformats.org/drawingml/2006/main">
-              <a:ext uri="{FF2B5EF4-FFF2-40B4-BE49-F238E27FC236}">
-                <a16:creationId xmlns:a16="http://schemas.microsoft.com/office/drawing/2014/main" id="{79495DA0-414A-46F4-ADAE-768E699F16A7}"/>
-              </a:ext>
-            </a:extLst>
-          </p:cNvPr>
-          <p:cNvSpPr>
-            <a:spLocks xmlns:a="http://schemas.openxmlformats.org/drawingml/2006/main" noGrp="1"/>
-          </p:cNvSpPr>
-          <p:nvPr/>
-        </p:nvSpPr>
-        <p:spPr>
-          <a:xfrm xmlns:a="http://schemas.openxmlformats.org/drawingml/2006/main">
-            <a:off x="8248650" y="2305050"/>
-            <a:ext cx="3143250" cy="1428750"/>
-          </a:xfrm>
-          <a:prstGeom xmlns:a="http://schemas.openxmlformats.org/drawingml/2006/main" prst="roundRect">
-            <a:avLst>
-              <a:gd name="adj" fmla="val 5333"/>
-            </a:avLst>
-          </a:prstGeom>
-          <a:solidFill xmlns:a="http://schemas.openxmlformats.org/drawingml/2006/main">
-            <a:srgbClr val="173654"/>
-          </a:solidFill>
-          <a:ln xmlns:a="http://schemas.openxmlformats.org/drawingml/2006/main" w="0">
-            <a:noFill/>
-          </a:ln>
-        </p:spPr>
-        <p:txBody>
-          <a:bodyPr xmlns:a="http://schemas.openxmlformats.org/drawingml/2006/main" anchor="ctr">
-            <a:noAutofit/>
-          </a:bodyPr>
-          <a:lstStyle xmlns:a="http://schemas.openxmlformats.org/drawingml/2006/main"/>
-          <a:p xmlns:a="http://schemas.openxmlformats.org/drawingml/2006/main">
-            <a:pPr>
-              <a:defRPr sz="1725" b="0" i="0">
-                <a:solidFill>
-                  <a:srgbClr val="FFFFFF"/>
-                </a:solidFill>
-                <a:latin typeface="Consolas"/>
-                <a:ea typeface="Consolas"/>
-                <a:cs typeface="Consolas"/>
-              </a:defRPr>
-            </a:pPr>
-            <a:r>
-              <a:rPr sz="1725" b="0" i="0">
-                <a:solidFill>
-                  <a:srgbClr val="FFFFFF"/>
-                </a:solidFill>
-                <a:latin typeface="Consolas"/>
-                <a:ea typeface="Consolas"/>
-                <a:cs typeface="Consolas"/>
-              </a:rPr>
-              <a:t>python week-01-python-basics/</a:t>
-            </a:r>
-          </a:p>
-          <a:p xmlns:a="http://schemas.openxmlformats.org/drawingml/2006/main">
-            <a:pPr>
-              <a:defRPr sz="1725" b="0" i="0">
-                <a:solidFill>
-                  <a:srgbClr val="FFFFFF"/>
-                </a:solidFill>
-                <a:latin typeface="Consolas"/>
-                <a:ea typeface="Consolas"/>
-                <a:cs typeface="Consolas"/>
-              </a:defRPr>
-            </a:pPr>
-            <a:r>
-              <a:rPr sz="1725" b="0" i="0">
-                <a:solidFill>
-                  <a:srgbClr val="FFFFFF"/>
-                </a:solidFill>
-                <a:latin typeface="Consolas"/>
-                <a:ea typeface="Consolas"/>
-                <a:cs typeface="Consolas"/>
-              </a:rPr>
-              <a:t>examples/hello.py</a:t>
-            </a:r>
-          </a:p>
-        </p:txBody>
-      </p:sp>
-      <p:sp>
-        <p:nvSpPr>
-          <p:cNvPr id="6" name="">
-            <a:extLst xmlns:a="http://schemas.openxmlformats.org/drawingml/2006/main">
-              <a:ext uri="{FF2B5EF4-FFF2-40B4-BE49-F238E27FC236}">
-                <a16:creationId xmlns:a16="http://schemas.microsoft.com/office/drawing/2014/main" id="{2121233A-B6ED-4509-9721-93F510E08B10}"/>
-              </a:ext>
-            </a:extLst>
-          </p:cNvPr>
-          <p:cNvSpPr>
-            <a:spLocks xmlns:a="http://schemas.openxmlformats.org/drawingml/2006/main" noGrp="1"/>
-          </p:cNvSpPr>
-          <p:nvPr/>
-        </p:nvSpPr>
-        <p:spPr>
-          <a:xfrm xmlns:a="http://schemas.openxmlformats.org/drawingml/2006/main">
-            <a:off x="8248650" y="4171950"/>
-            <a:ext cx="3143250" cy="952500"/>
-          </a:xfrm>
-          <a:prstGeom xmlns:a="http://schemas.openxmlformats.org/drawingml/2006/main" prst="roundRect">
-            <a:avLst>
-              <a:gd name="adj" fmla="val 8000"/>
-            </a:avLst>
-          </a:prstGeom>
-          <a:solidFill xmlns:a="http://schemas.openxmlformats.org/drawingml/2006/main">
-            <a:srgbClr val="EAF2F7"/>
-          </a:solidFill>
-          <a:ln xmlns:a="http://schemas.openxmlformats.org/drawingml/2006/main" w="0">
-            <a:noFill/>
-          </a:ln>
-        </p:spPr>
-        <p:txBody>
-          <a:bodyPr xmlns:a="http://schemas.openxmlformats.org/drawingml/2006/main" anchor="ctr">
-            <a:noAutofit/>
-          </a:bodyPr>
-          <a:lstStyle xmlns:a="http://schemas.openxmlformats.org/drawingml/2006/main"/>
-          <a:p xmlns:a="http://schemas.openxmlformats.org/drawingml/2006/main">
-            <a:pPr>
-              <a:defRPr sz="1650" b="0" i="0">
-                <a:solidFill>
-                  <a:srgbClr val="172433"/>
-                </a:solidFill>
-                <a:latin typeface="Arial"/>
-                <a:ea typeface="Arial"/>
-                <a:cs typeface="Arial"/>
-              </a:defRPr>
-            </a:pPr>
-            <a:r>
-              <a:rPr sz="1650" b="0" i="0">
-                <a:solidFill>
-                  <a:srgbClr val="172433"/>
-                </a:solidFill>
-                <a:latin typeface="Arial"/>
-                <a:ea typeface="Arial"/>
-                <a:cs typeface="Arial"/>
-              </a:rPr>
-              <a:t>Ask for help with the complete error message visible.</a:t>
-            </a:r>
-          </a:p>
-        </p:txBody>
-      </p:sp>
-      <p:sp>
-        <p:nvSpPr>
-          <p:cNvPr id="7" name="">
-            <a:extLst xmlns:a="http://schemas.openxmlformats.org/drawingml/2006/main">
-              <a:ext uri="{FF2B5EF4-FFF2-40B4-BE49-F238E27FC236}">
-                <a16:creationId xmlns:a16="http://schemas.microsoft.com/office/drawing/2014/main" id="{4D04C49D-CA49-41CE-A9FC-D7C97E8AC442}"/>
-              </a:ext>
-            </a:extLst>
-          </p:cNvPr>
-          <p:cNvSpPr>
-            <a:spLocks xmlns:a="http://schemas.openxmlformats.org/drawingml/2006/main" noGrp="1"/>
-          </p:cNvSpPr>
-          <p:nvPr/>
-        </p:nvSpPr>
-        <p:spPr>
-          <a:xfrm xmlns:a="http://schemas.openxmlformats.org/drawingml/2006/main">
-            <a:off x="685800" y="6438900"/>
-            <a:ext cx="10820400" cy="228600"/>
-          </a:xfrm>
-          <a:prstGeom xmlns:a="http://schemas.openxmlformats.org/drawingml/2006/main" prst="rect">
-            <a:avLst/>
-          </a:prstGeom>
-          <a:noFill xmlns:a="http://schemas.openxmlformats.org/drawingml/2006/main"/>
-          <a:ln xmlns:a="http://schemas.openxmlformats.org/drawingml/2006/main" w="0">
-            <a:noFill/>
-          </a:ln>
-        </p:spPr>
-        <p:txBody>
-          <a:bodyPr xmlns:a="http://schemas.openxmlformats.org/drawingml/2006/main" anchor="ctr">
-            <a:noAutofit/>
-          </a:bodyPr>
-          <a:lstStyle xmlns:a="http://schemas.openxmlformats.org/drawingml/2006/main"/>
-          <a:p xmlns:a="http://schemas.openxmlformats.org/drawingml/2006/main">
-            <a:pPr>
-              <a:defRPr sz="1200" b="0" i="0">
-                <a:solidFill>
-                  <a:srgbClr val="5D6B78"/>
-                </a:solidFill>
-                <a:latin typeface="Arial"/>
-                <a:ea typeface="Arial"/>
-                <a:cs typeface="Arial"/>
-              </a:defRPr>
-            </a:pPr>
-            <a:r>
-              <a:rPr sz="1200" b="0" i="0">
-                <a:solidFill>
-                  <a:srgbClr val="5D6B78"/>
-                </a:solidFill>
-                <a:latin typeface="Arial"/>
-                <a:ea typeface="Arial"/>
-                <a:cs typeface="Arial"/>
-              </a:rPr>
-              <a:t>10:35-11:20 | Guided lab</a:t>
-            </a:r>
-          </a:p>
-        </p:txBody>
-      </p:sp>
-    </p:spTree>
-    <p:extLst>
-      <p:ext uri="{BB962C8B-B14F-4D97-AF65-F5344CB8AC3E}">
-        <p14:creationId xmlns:p14="http://schemas.microsoft.com/office/powerpoint/2010/main" val="1447018388"/>
-      </p:ext>
-    </p:extLst>
-  </p:cSld>
-</p:sld>
-</file>
-
-<file path=ppt/slides/slide9.xml><?xml version="1.0" encoding="utf-8"?>
-<p:sld xmlns:p="http://schemas.openxmlformats.org/presentationml/2006/main">
-  <p:cSld>
-    <p:bg>
-      <p:bgPr>
-        <a:solidFill xmlns:a="http://schemas.openxmlformats.org/drawingml/2006/main">
-          <a:srgbClr val="3C8994"/>
-        </a:solidFill>
-      </p:bgPr>
-    </p:bg>
-    <p:spTree>
-      <p:nvGrpSpPr>
-        <p:cNvPr id="1" name=""/>
-        <p:cNvGrpSpPr/>
-        <p:nvPr/>
-      </p:nvGrpSpPr>
-      <p:grpSpPr>
-        <a:xfrm xmlns:a="http://schemas.openxmlformats.org/drawingml/2006/main"/>
-      </p:grpSpPr>
-      <p:sp>
-        <p:nvSpPr>
-          <p:cNvPr id="4" name="">
-            <a:extLst xmlns:a="http://schemas.openxmlformats.org/drawingml/2006/main">
-              <a:ext uri="{FF2B5EF4-FFF2-40B4-BE49-F238E27FC236}">
-                <a16:creationId xmlns:a16="http://schemas.microsoft.com/office/drawing/2014/main" id="{B7BB444B-8583-48E7-B241-F25B4EE35B7E}"/>
-              </a:ext>
-            </a:extLst>
-          </p:cNvPr>
-          <p:cNvSpPr>
-            <a:spLocks xmlns:a="http://schemas.openxmlformats.org/drawingml/2006/main" noGrp="1"/>
-          </p:cNvSpPr>
-          <p:nvPr/>
-        </p:nvSpPr>
-        <p:spPr>
-          <a:xfrm xmlns:a="http://schemas.openxmlformats.org/drawingml/2006/main">
-            <a:off x="685800" y="2095500"/>
-            <a:ext cx="10820400" cy="952500"/>
-          </a:xfrm>
-          <a:prstGeom xmlns:a="http://schemas.openxmlformats.org/drawingml/2006/main" prst="rect">
-            <a:avLst/>
-          </a:prstGeom>
-          <a:noFill xmlns:a="http://schemas.openxmlformats.org/drawingml/2006/main"/>
-          <a:ln xmlns:a="http://schemas.openxmlformats.org/drawingml/2006/main" w="0">
-            <a:noFill/>
-          </a:ln>
-        </p:spPr>
-        <p:txBody>
-          <a:bodyPr xmlns:a="http://schemas.openxmlformats.org/drawingml/2006/main" anchor="ctr">
-            <a:noAutofit/>
-          </a:bodyPr>
-          <a:lstStyle xmlns:a="http://schemas.openxmlformats.org/drawingml/2006/main"/>
-          <a:p xmlns:a="http://schemas.openxmlformats.org/drawingml/2006/main">
-            <a:pPr>
-              <a:defRPr sz="5400" b="1" i="0">
-                <a:solidFill>
-                  <a:srgbClr val="FFFFFF"/>
-                </a:solidFill>
-                <a:latin typeface="Arial"/>
-                <a:ea typeface="Arial"/>
-                <a:cs typeface="Arial"/>
-              </a:defRPr>
-            </a:pPr>
-            <a:r>
-              <a:rPr sz="5400" b="1" i="0">
-                <a:solidFill>
-                  <a:srgbClr val="FFFFFF"/>
-                </a:solidFill>
-                <a:latin typeface="Arial"/>
-                <a:ea typeface="Arial"/>
-                <a:cs typeface="Arial"/>
-              </a:rPr>
-              <a:t>Break</a:t>
-            </a:r>
-          </a:p>
-        </p:txBody>
-      </p:sp>
-      <p:sp>
-        <p:nvSpPr>
-          <p:cNvPr id="2" name="">
-            <a:extLst xmlns:a="http://schemas.openxmlformats.org/drawingml/2006/main">
-              <a:ext uri="{FF2B5EF4-FFF2-40B4-BE49-F238E27FC236}">
-                <a16:creationId xmlns:a16="http://schemas.microsoft.com/office/drawing/2014/main" id="{4FD642D5-3A21-4DC7-967A-0D0A63B08900}"/>
-              </a:ext>
-            </a:extLst>
-          </p:cNvPr>
-          <p:cNvSpPr>
-            <a:spLocks xmlns:a="http://schemas.openxmlformats.org/drawingml/2006/main" noGrp="1"/>
-          </p:cNvSpPr>
-          <p:nvPr/>
-        </p:nvSpPr>
-        <p:spPr>
-          <a:xfrm xmlns:a="http://schemas.openxmlformats.org/drawingml/2006/main">
-            <a:off x="685800" y="3238500"/>
-            <a:ext cx="10820400" cy="571500"/>
-          </a:xfrm>
-          <a:prstGeom xmlns:a="http://schemas.openxmlformats.org/drawingml/2006/main" prst="rect">
-            <a:avLst/>
-          </a:prstGeom>
-          <a:noFill xmlns:a="http://schemas.openxmlformats.org/drawingml/2006/main"/>
-          <a:ln xmlns:a="http://schemas.openxmlformats.org/drawingml/2006/main" w="0">
-            <a:noFill/>
-          </a:ln>
-        </p:spPr>
-        <p:txBody>
-          <a:bodyPr xmlns:a="http://schemas.openxmlformats.org/drawingml/2006/main" anchor="ctr">
-            <a:noAutofit/>
-          </a:bodyPr>
-          <a:lstStyle xmlns:a="http://schemas.openxmlformats.org/drawingml/2006/main"/>
-          <a:p xmlns:a="http://schemas.openxmlformats.org/drawingml/2006/main">
-            <a:pPr>
-              <a:defRPr sz="2700" b="0" i="0">
-                <a:solidFill>
-                  <a:srgbClr val="FFFFFF"/>
-                </a:solidFill>
-                <a:latin typeface="Arial"/>
-                <a:ea typeface="Arial"/>
-                <a:cs typeface="Arial"/>
-              </a:defRPr>
-            </a:pPr>
-            <a:r>
-              <a:rPr sz="2700" b="0" i="0">
-                <a:solidFill>
-                  <a:srgbClr val="FFFFFF"/>
-                </a:solidFill>
-                <a:latin typeface="Arial"/>
-                <a:ea typeface="Arial"/>
-                <a:cs typeface="Arial"/>
-              </a:rPr>
-              <a:t>11:20-11:30</a:t>
-            </a:r>
-          </a:p>
-        </p:txBody>
-      </p:sp>
-      <p:sp>
-        <p:nvSpPr>
-          <p:cNvPr id="3" name="">
-            <a:extLst xmlns:a="http://schemas.openxmlformats.org/drawingml/2006/main">
-              <a:ext uri="{FF2B5EF4-FFF2-40B4-BE49-F238E27FC236}">
-                <a16:creationId xmlns:a16="http://schemas.microsoft.com/office/drawing/2014/main" id="{65BE855E-E53E-4703-BAD1-26909A02C03D}"/>
-              </a:ext>
-            </a:extLst>
-          </p:cNvPr>
-          <p:cNvSpPr>
-            <a:spLocks xmlns:a="http://schemas.openxmlformats.org/drawingml/2006/main" noGrp="1"/>
-          </p:cNvSpPr>
-          <p:nvPr/>
-        </p:nvSpPr>
-        <p:spPr>
-          <a:xfrm xmlns:a="http://schemas.openxmlformats.org/drawingml/2006/main">
-            <a:off x="685800" y="4171950"/>
-            <a:ext cx="10820400" cy="495300"/>
-          </a:xfrm>
-          <a:prstGeom xmlns:a="http://schemas.openxmlformats.org/drawingml/2006/main" prst="rect">
-            <a:avLst/>
-          </a:prstGeom>
-          <a:noFill xmlns:a="http://schemas.openxmlformats.org/drawingml/2006/main"/>
-          <a:ln xmlns:a="http://schemas.openxmlformats.org/drawingml/2006/main" w="0">
-            <a:noFill/>
-          </a:ln>
-        </p:spPr>
-        <p:txBody>
-          <a:bodyPr xmlns:a="http://schemas.openxmlformats.org/drawingml/2006/main" anchor="ctr">
-            <a:noAutofit/>
-          </a:bodyPr>
-          <a:lstStyle xmlns:a="http://schemas.openxmlformats.org/drawingml/2006/main"/>
-          <a:p xmlns:a="http://schemas.openxmlformats.org/drawingml/2006/main">
-            <a:pPr>
-              <a:defRPr sz="1875" b="0" i="0">
-                <a:solidFill>
-                  <a:srgbClr val="FFFFFF"/>
-                </a:solidFill>
-                <a:latin typeface="Arial"/>
-                <a:ea typeface="Arial"/>
-                <a:cs typeface="Arial"/>
-              </a:defRPr>
-            </a:pPr>
-            <a:r>
-              <a:rPr sz="1875" b="0" i="0">
-                <a:solidFill>
-                  <a:srgbClr val="FFFFFF"/>
-                </a:solidFill>
-                <a:latin typeface="Arial"/>
-                <a:ea typeface="Arial"/>
-                <a:cs typeface="Arial"/>
-              </a:rPr>
-              <a:t>After the break: build something that introduces you.</a:t>
-            </a:r>
-          </a:p>
-        </p:txBody>
-      </p:sp>
-    </p:spTree>
-    <p:extLst>
-      <p:ext uri="{BB962C8B-B14F-4D97-AF65-F5344CB8AC3E}">
-        <p14:creationId xmlns:p14="http://schemas.microsoft.com/office/powerpoint/2010/main" val="1533614616"/>
+        <p14:creationId xmlns:p14="http://schemas.microsoft.com/office/powerpoint/2010/main" val="164943933"/>
       </p:ext>
     </p:extLst>
   </p:cSld>
